--- a/power_point/Day2.pptx
+++ b/power_point/Day2.pptx
@@ -5,7 +5,7 @@
     <p:sldMasterId id="2147483684" r:id="rId1"/>
   </p:sldMasterIdLst>
   <p:notesMasterIdLst>
-    <p:notesMasterId r:id="rId24"/>
+    <p:notesMasterId r:id="rId32"/>
   </p:notesMasterIdLst>
   <p:sldIdLst>
     <p:sldId id="256" r:id="rId2"/>
@@ -30,6 +30,14 @@
     <p:sldId id="307" r:id="rId21"/>
     <p:sldId id="308" r:id="rId22"/>
     <p:sldId id="309" r:id="rId23"/>
+    <p:sldId id="310" r:id="rId24"/>
+    <p:sldId id="316" r:id="rId25"/>
+    <p:sldId id="312" r:id="rId26"/>
+    <p:sldId id="317" r:id="rId27"/>
+    <p:sldId id="318" r:id="rId28"/>
+    <p:sldId id="313" r:id="rId29"/>
+    <p:sldId id="314" r:id="rId30"/>
+    <p:sldId id="315" r:id="rId31"/>
   </p:sldIdLst>
   <p:sldSz cx="12192000" cy="6858000"/>
   <p:notesSz cx="6858000" cy="9144000"/>
@@ -218,7 +226,7 @@
           <a:p>
             <a:fld id="{AD06BF8C-4158-F342-8216-E1A8A29CF1BB}" type="datetimeFigureOut">
               <a:rPr lang="en-GB" smtClean="0"/>
-              <a:t>23/09/2026</a:t>
+              <a:t>25/09/2026</a:t>
             </a:fld>
             <a:endParaRPr lang="en-GB"/>
           </a:p>
@@ -616,7 +624,7 @@
           <a:p>
             <a:fld id="{DE396E4B-6C64-E643-9A0A-AB5E13C2F5FA}" type="datetime1">
               <a:rPr lang="it-IT" smtClean="0"/>
-              <a:t>23/09/26</a:t>
+              <a:t>25/09/26</a:t>
             </a:fld>
             <a:endParaRPr lang="en-GB"/>
           </a:p>
@@ -789,7 +797,7 @@
           <a:p>
             <a:fld id="{31B09858-3BFB-DA41-A1A7-0A2A32E9793F}" type="datetime1">
               <a:rPr lang="it-IT" smtClean="0"/>
-              <a:t>23/09/26</a:t>
+              <a:t>25/09/26</a:t>
             </a:fld>
             <a:endParaRPr lang="en-GB"/>
           </a:p>
@@ -972,7 +980,7 @@
           <a:p>
             <a:fld id="{2C58458F-C659-9242-908F-36A06BB8B093}" type="datetime1">
               <a:rPr lang="it-IT" smtClean="0"/>
-              <a:t>23/09/26</a:t>
+              <a:t>25/09/26</a:t>
             </a:fld>
             <a:endParaRPr lang="en-GB"/>
           </a:p>
@@ -1145,7 +1153,7 @@
           <a:p>
             <a:fld id="{761DFEEA-1162-B343-ACBF-B3E92F6AC390}" type="datetime1">
               <a:rPr lang="it-IT" smtClean="0"/>
-              <a:t>23/09/26</a:t>
+              <a:t>25/09/26</a:t>
             </a:fld>
             <a:endParaRPr lang="en-GB"/>
           </a:p>
@@ -1394,7 +1402,7 @@
           <a:p>
             <a:fld id="{449ECE03-5904-2640-B404-A3FEAB598526}" type="datetime1">
               <a:rPr lang="it-IT" smtClean="0"/>
-              <a:t>23/09/26</a:t>
+              <a:t>25/09/26</a:t>
             </a:fld>
             <a:endParaRPr lang="en-GB"/>
           </a:p>
@@ -1629,7 +1637,7 @@
           <a:p>
             <a:fld id="{60BAE46A-96B1-BD4E-91A6-BD8913D3E1E1}" type="datetime1">
               <a:rPr lang="it-IT" smtClean="0"/>
-              <a:t>23/09/26</a:t>
+              <a:t>25/09/26</a:t>
             </a:fld>
             <a:endParaRPr lang="en-GB"/>
           </a:p>
@@ -1999,7 +2007,7 @@
           <a:p>
             <a:fld id="{9BACEE35-98CA-3449-A912-39DDE1219E25}" type="datetime1">
               <a:rPr lang="it-IT" smtClean="0"/>
-              <a:t>23/09/26</a:t>
+              <a:t>25/09/26</a:t>
             </a:fld>
             <a:endParaRPr lang="en-GB"/>
           </a:p>
@@ -2120,7 +2128,7 @@
           <a:p>
             <a:fld id="{5953B74D-CC1D-D544-8CB0-DB12C3D1744A}" type="datetime1">
               <a:rPr lang="it-IT" smtClean="0"/>
-              <a:t>23/09/26</a:t>
+              <a:t>25/09/26</a:t>
             </a:fld>
             <a:endParaRPr lang="en-GB"/>
           </a:p>
@@ -2218,7 +2226,7 @@
           <a:p>
             <a:fld id="{77398775-032D-C849-B9B0-C1D11ED802C1}" type="datetime1">
               <a:rPr lang="it-IT" smtClean="0"/>
-              <a:t>23/09/26</a:t>
+              <a:t>25/09/26</a:t>
             </a:fld>
             <a:endParaRPr lang="en-GB"/>
           </a:p>
@@ -2498,7 +2506,7 @@
           <a:p>
             <a:fld id="{28DD5ADB-7CE0-804E-9C85-40A519507F1A}" type="datetime1">
               <a:rPr lang="it-IT" smtClean="0"/>
-              <a:t>23/09/26</a:t>
+              <a:t>25/09/26</a:t>
             </a:fld>
             <a:endParaRPr lang="en-GB"/>
           </a:p>
@@ -2758,7 +2766,7 @@
           <a:p>
             <a:fld id="{D404C8A3-CA6B-DB4B-8A18-5294010BD3CB}" type="datetime1">
               <a:rPr lang="it-IT" smtClean="0"/>
-              <a:t>23/09/26</a:t>
+              <a:t>25/09/26</a:t>
             </a:fld>
             <a:endParaRPr lang="en-GB"/>
           </a:p>
@@ -2974,7 +2982,7 @@
           <a:p>
             <a:fld id="{01A1503F-4B7A-6348-924A-FFD23680AA8F}" type="datetime1">
               <a:rPr lang="it-IT" smtClean="0"/>
-              <a:t>23/09/26</a:t>
+              <a:t>25/09/26</a:t>
             </a:fld>
             <a:endParaRPr lang="en-GB"/>
           </a:p>
@@ -3435,7 +3443,7 @@
           <a:p>
             <a:fld id="{220AD085-7898-BE4F-A67D-B59B606A6206}" type="datetime1">
               <a:rPr lang="it-IT" smtClean="0"/>
-              <a:t>23/09/26</a:t>
+              <a:t>25/09/26</a:t>
             </a:fld>
             <a:endParaRPr lang="en-GB"/>
           </a:p>
@@ -3657,7 +3665,7 @@
           <a:p>
             <a:fld id="{761DFEEA-1162-B343-ACBF-B3E92F6AC390}" type="datetime1">
               <a:rPr lang="it-IT" smtClean="0"/>
-              <a:t>23/09/26</a:t>
+              <a:t>25/09/26</a:t>
             </a:fld>
             <a:endParaRPr lang="en-GB" dirty="0"/>
           </a:p>
@@ -4228,6 +4236,160 @@
             <a:r>
               <a:rPr lang="en-GB" dirty="0"/>
               <a:t>Alignment file SAM – its binary format is termed BAM</a:t>
+            </a:r>
+          </a:p>
+        </p:txBody>
+      </p:sp>
+      <p:sp>
+        <p:nvSpPr>
+          <p:cNvPr id="7" name="TextBox 6">
+            <a:extLst>
+              <a:ext uri="{FF2B5EF4-FFF2-40B4-BE49-F238E27FC236}">
+                <a16:creationId xmlns:a16="http://schemas.microsoft.com/office/drawing/2014/main" id="{0AAEACDE-AD0C-E1A2-FF1F-8F3E82CB7DF5}"/>
+              </a:ext>
+            </a:extLst>
+          </p:cNvPr>
+          <p:cNvSpPr txBox="1"/>
+          <p:nvPr/>
+        </p:nvSpPr>
+        <p:spPr>
+          <a:xfrm>
+            <a:off x="1874081" y="3001458"/>
+            <a:ext cx="5739072" cy="1323439"/>
+          </a:xfrm>
+          <a:prstGeom prst="rect">
+            <a:avLst/>
+          </a:prstGeom>
+          <a:solidFill>
+            <a:schemeClr val="bg1"/>
+          </a:solidFill>
+          <a:ln>
+            <a:solidFill>
+              <a:schemeClr val="tx1"/>
+            </a:solidFill>
+          </a:ln>
+        </p:spPr>
+        <p:txBody>
+          <a:bodyPr wrap="none" rtlCol="0">
+            <a:spAutoFit/>
+          </a:bodyPr>
+          <a:lstStyle/>
+          <a:p>
+            <a:r>
+              <a:rPr lang="en-GB" sz="1600" dirty="0">
+                <a:solidFill>
+                  <a:schemeClr val="accent3">
+                    <a:lumMod val="75000"/>
+                  </a:schemeClr>
+                </a:solidFill>
+                <a:latin typeface="Courier New" panose="02070309020205020404" pitchFamily="49" charset="0"/>
+                <a:cs typeface="Courier New" panose="02070309020205020404" pitchFamily="49" charset="0"/>
+              </a:rPr>
+              <a:t>docker run --rm \</a:t>
+            </a:r>
+          </a:p>
+          <a:p>
+            <a:r>
+              <a:rPr lang="en-GB" sz="1600" dirty="0">
+                <a:solidFill>
+                  <a:schemeClr val="accent3">
+                    <a:lumMod val="75000"/>
+                  </a:schemeClr>
+                </a:solidFill>
+                <a:latin typeface="Courier New" panose="02070309020205020404" pitchFamily="49" charset="0"/>
+                <a:cs typeface="Courier New" panose="02070309020205020404" pitchFamily="49" charset="0"/>
+              </a:rPr>
+              <a:t>  --user "$(id -u):$(id -g)" \</a:t>
+            </a:r>
+          </a:p>
+          <a:p>
+            <a:r>
+              <a:rPr lang="en-GB" sz="1600" dirty="0">
+                <a:solidFill>
+                  <a:schemeClr val="accent3">
+                    <a:lumMod val="75000"/>
+                  </a:schemeClr>
+                </a:solidFill>
+                <a:latin typeface="Courier New" panose="02070309020205020404" pitchFamily="49" charset="0"/>
+                <a:cs typeface="Courier New" panose="02070309020205020404" pitchFamily="49" charset="0"/>
+              </a:rPr>
+              <a:t>  -v "$PWD:/work" \</a:t>
+            </a:r>
+          </a:p>
+          <a:p>
+            <a:r>
+              <a:rPr lang="en-GB" sz="1600" dirty="0">
+                <a:solidFill>
+                  <a:schemeClr val="accent3">
+                    <a:lumMod val="75000"/>
+                  </a:schemeClr>
+                </a:solidFill>
+                <a:latin typeface="Courier New" panose="02070309020205020404" pitchFamily="49" charset="0"/>
+                <a:cs typeface="Courier New" panose="02070309020205020404" pitchFamily="49" charset="0"/>
+              </a:rPr>
+              <a:t>  -w /work it \</a:t>
+            </a:r>
+          </a:p>
+          <a:p>
+            <a:r>
+              <a:rPr lang="en-GB" sz="1600" dirty="0">
+                <a:solidFill>
+                  <a:schemeClr val="accent3">
+                    <a:lumMod val="75000"/>
+                  </a:schemeClr>
+                </a:solidFill>
+                <a:latin typeface="Courier New" panose="02070309020205020404" pitchFamily="49" charset="0"/>
+                <a:cs typeface="Courier New" panose="02070309020205020404" pitchFamily="49" charset="0"/>
+              </a:rPr>
+              <a:t>  </a:t>
+            </a:r>
+            <a:r>
+              <a:rPr lang="en-GB" sz="1600" dirty="0" err="1">
+                <a:solidFill>
+                  <a:schemeClr val="accent3">
+                    <a:lumMod val="75000"/>
+                  </a:schemeClr>
+                </a:solidFill>
+                <a:latin typeface="Courier New" panose="02070309020205020404" pitchFamily="49" charset="0"/>
+                <a:cs typeface="Courier New" panose="02070309020205020404" pitchFamily="49" charset="0"/>
+              </a:rPr>
+              <a:t>docker.io</a:t>
+            </a:r>
+            <a:r>
+              <a:rPr lang="en-GB" sz="1600" dirty="0">
+                <a:solidFill>
+                  <a:schemeClr val="accent3">
+                    <a:lumMod val="75000"/>
+                  </a:schemeClr>
+                </a:solidFill>
+                <a:latin typeface="Courier New" panose="02070309020205020404" pitchFamily="49" charset="0"/>
+                <a:cs typeface="Courier New" panose="02070309020205020404" pitchFamily="49" charset="0"/>
+              </a:rPr>
+              <a:t>/</a:t>
+            </a:r>
+            <a:r>
+              <a:rPr lang="en-GB" sz="1600" dirty="0" err="1">
+                <a:solidFill>
+                  <a:schemeClr val="accent3">
+                    <a:lumMod val="75000"/>
+                  </a:schemeClr>
+                </a:solidFill>
+                <a:latin typeface="Courier New" panose="02070309020205020404" pitchFamily="49" charset="0"/>
+                <a:cs typeface="Courier New" panose="02070309020205020404" pitchFamily="49" charset="0"/>
+              </a:rPr>
+              <a:t>fgualdr</a:t>
+            </a:r>
+            <a:r>
+              <a:rPr lang="en-GB" sz="1600" dirty="0">
+                <a:solidFill>
+                  <a:schemeClr val="accent3">
+                    <a:lumMod val="75000"/>
+                  </a:schemeClr>
+                </a:solidFill>
+                <a:latin typeface="Courier New" panose="02070309020205020404" pitchFamily="49" charset="0"/>
+                <a:cs typeface="Courier New" panose="02070309020205020404" pitchFamily="49" charset="0"/>
+              </a:rPr>
+              <a:t>/ngs-bowtie2-samtools bash</a:t>
             </a:r>
           </a:p>
         </p:txBody>
@@ -4394,6 +4556,51 @@
                       </p:childTnLst>
                     </p:cTn>
                   </p:par>
+                  <p:par>
+                    <p:cTn id="15" fill="hold">
+                      <p:stCondLst>
+                        <p:cond delay="indefinite"/>
+                      </p:stCondLst>
+                      <p:childTnLst>
+                        <p:par>
+                          <p:cTn id="16" fill="hold">
+                            <p:stCondLst>
+                              <p:cond delay="0"/>
+                            </p:stCondLst>
+                            <p:childTnLst>
+                              <p:par>
+                                <p:cTn id="17" presetID="1" presetClass="entr" presetSubtype="0" fill="hold" grpId="0" nodeType="clickEffect">
+                                  <p:stCondLst>
+                                    <p:cond delay="0"/>
+                                  </p:stCondLst>
+                                  <p:childTnLst>
+                                    <p:set>
+                                      <p:cBhvr>
+                                        <p:cTn id="18" dur="1" fill="hold">
+                                          <p:stCondLst>
+                                            <p:cond delay="0"/>
+                                          </p:stCondLst>
+                                        </p:cTn>
+                                        <p:tgtEl>
+                                          <p:spTgt spid="7"/>
+                                        </p:tgtEl>
+                                        <p:attrNameLst>
+                                          <p:attrName>style.visibility</p:attrName>
+                                        </p:attrNameLst>
+                                      </p:cBhvr>
+                                      <p:to>
+                                        <p:strVal val="visible"/>
+                                      </p:to>
+                                    </p:set>
+                                  </p:childTnLst>
+                                </p:cTn>
+                              </p:par>
+                            </p:childTnLst>
+                          </p:cTn>
+                        </p:par>
+                      </p:childTnLst>
+                    </p:cTn>
+                  </p:par>
                 </p:childTnLst>
               </p:cTn>
               <p:prevCondLst>
@@ -4420,6 +4627,7 @@
       <p:bldP spid="15" grpId="0"/>
       <p:bldP spid="19" grpId="0" animBg="1"/>
       <p:bldP spid="20" grpId="0"/>
+      <p:bldP spid="7" grpId="0" animBg="1"/>
     </p:bldLst>
   </p:timing>
 </p:sld>
@@ -6401,7 +6609,7 @@
           <a:p>
             <a:fld id="{761DFEEA-1162-B343-ACBF-B3E92F6AC390}" type="datetime1">
               <a:rPr lang="it-IT" smtClean="0"/>
-              <a:t>23/09/26</a:t>
+              <a:t>25/09/26</a:t>
             </a:fld>
             <a:endParaRPr lang="en-GB"/>
           </a:p>
@@ -7083,7 +7291,7 @@
           <a:p>
             <a:fld id="{761DFEEA-1162-B343-ACBF-B3E92F6AC390}" type="datetime1">
               <a:rPr lang="it-IT" smtClean="0"/>
-              <a:t>23/09/26</a:t>
+              <a:t>25/09/26</a:t>
             </a:fld>
             <a:endParaRPr lang="en-GB"/>
           </a:p>
@@ -7655,7 +7863,7 @@
           <a:p>
             <a:fld id="{761DFEEA-1162-B343-ACBF-B3E92F6AC390}" type="datetime1">
               <a:rPr lang="it-IT" smtClean="0"/>
-              <a:t>23/09/26</a:t>
+              <a:t>25/09/26</a:t>
             </a:fld>
             <a:endParaRPr lang="en-GB"/>
           </a:p>
@@ -8733,7 +8941,7 @@
           <a:p>
             <a:fld id="{761DFEEA-1162-B343-ACBF-B3E92F6AC390}" type="datetime1">
               <a:rPr lang="it-IT" smtClean="0"/>
-              <a:t>23/09/26</a:t>
+              <a:t>25/09/26</a:t>
             </a:fld>
             <a:endParaRPr lang="en-GB"/>
           </a:p>
@@ -9134,7 +9342,7 @@
           <a:p>
             <a:fld id="{761DFEEA-1162-B343-ACBF-B3E92F6AC390}" type="datetime1">
               <a:rPr lang="it-IT" smtClean="0"/>
-              <a:t>23/09/26</a:t>
+              <a:t>25/09/26</a:t>
             </a:fld>
             <a:endParaRPr lang="en-GB"/>
           </a:p>
@@ -9359,8 +9567,8 @@
         </p:nvSpPr>
         <p:spPr>
           <a:xfrm>
-            <a:off x="469886" y="5111374"/>
-            <a:ext cx="11521167" cy="369332"/>
+            <a:off x="167101" y="5111374"/>
+            <a:ext cx="11857798" cy="369332"/>
           </a:xfrm>
           <a:prstGeom prst="rect">
             <a:avLst/>
@@ -9375,7 +9583,19 @@
           <a:p>
             <a:r>
               <a:rPr lang="en-GB" dirty="0"/>
-              <a:t>We expect read 1 to be in the same orientation as the RNA! So we can count reads per gene in a strand specific manner.</a:t>
+              <a:t>We expect read 1 to be in the </a:t>
+            </a:r>
+            <a:r>
+              <a:rPr lang="en-GB" b="1" dirty="0">
+                <a:solidFill>
+                  <a:srgbClr val="FF0000"/>
+                </a:solidFill>
+              </a:rPr>
+              <a:t>opposite</a:t>
+            </a:r>
+            <a:r>
+              <a:rPr lang="en-GB" dirty="0"/>
+              <a:t> orientation as the RNA! So we can count reads per gene in a strand specific manner.</a:t>
             </a:r>
           </a:p>
         </p:txBody>
@@ -9464,7 +9684,7 @@
           <a:p>
             <a:fld id="{761DFEEA-1162-B343-ACBF-B3E92F6AC390}" type="datetime1">
               <a:rPr lang="it-IT" smtClean="0"/>
-              <a:t>23/09/26</a:t>
+              <a:t>25/09/26</a:t>
             </a:fld>
             <a:endParaRPr lang="en-GB"/>
           </a:p>
@@ -10243,7 +10463,7 @@
           <a:p>
             <a:fld id="{761DFEEA-1162-B343-ACBF-B3E92F6AC390}" type="datetime1">
               <a:rPr lang="it-IT" smtClean="0"/>
-              <a:t>23/09/26</a:t>
+              <a:t>25/09/26</a:t>
             </a:fld>
             <a:endParaRPr lang="en-GB"/>
           </a:p>
@@ -10710,7 +10930,7 @@
           <a:p>
             <a:fld id="{761DFEEA-1162-B343-ACBF-B3E92F6AC390}" type="datetime1">
               <a:rPr lang="it-IT" smtClean="0"/>
-              <a:t>23/09/26</a:t>
+              <a:t>25/09/26</a:t>
             </a:fld>
             <a:endParaRPr lang="en-GB"/>
           </a:p>
@@ -10810,7 +11030,7 @@
                   </a:schemeClr>
                 </a:solidFill>
               </a:rPr>
-              <a:t>trimmed FASTQ → alignment → BAM → gene counts → DESeq2 → biological interpretation</a:t>
+              <a:t>trimmed FASTQ → alignment → BAM → gene counts → DEGs:DESeq2 → biological interpretation</a:t>
             </a:r>
           </a:p>
         </p:txBody>
@@ -10978,7 +11198,7 @@
           <a:p>
             <a:fld id="{761DFEEA-1162-B343-ACBF-B3E92F6AC390}" type="datetime1">
               <a:rPr lang="it-IT" smtClean="0"/>
-              <a:t>23/09/26</a:t>
+              <a:t>25/09/26</a:t>
             </a:fld>
             <a:endParaRPr lang="en-GB"/>
           </a:p>
@@ -11689,7 +11909,7 @@
           <a:p>
             <a:fld id="{761DFEEA-1162-B343-ACBF-B3E92F6AC390}" type="datetime1">
               <a:rPr lang="it-IT" smtClean="0"/>
-              <a:t>23/09/26</a:t>
+              <a:t>25/09/26</a:t>
             </a:fld>
             <a:endParaRPr lang="en-GB"/>
           </a:p>
@@ -12142,7 +12362,7 @@
                 <a:latin typeface="Courier New" panose="02070309020205020404" pitchFamily="49" charset="0"/>
                 <a:cs typeface="Courier New" panose="02070309020205020404" pitchFamily="49" charset="0"/>
               </a:rPr>
-              <a:t>  -s 1 \</a:t>
+              <a:t>  -s 2 \</a:t>
             </a:r>
           </a:p>
           <a:p>
@@ -12300,8 +12520,8 @@
         </p:nvSpPr>
         <p:spPr>
           <a:xfrm>
-            <a:off x="5816944" y="2638335"/>
-            <a:ext cx="6098058" cy="2308324"/>
+            <a:off x="4149970" y="2990027"/>
+            <a:ext cx="7754984" cy="2031325"/>
           </a:xfrm>
           <a:prstGeom prst="rect">
             <a:avLst/>
@@ -12499,16 +12719,21 @@
             <p:ph type="title"/>
           </p:nvPr>
         </p:nvSpPr>
-        <p:spPr/>
+        <p:spPr>
+          <a:xfrm>
+            <a:off x="134470" y="122282"/>
+            <a:ext cx="12192000" cy="1495503"/>
+          </a:xfrm>
+        </p:spPr>
         <p:txBody>
           <a:bodyPr>
-            <a:normAutofit fontScale="90000"/>
+            <a:normAutofit/>
           </a:bodyPr>
           <a:lstStyle/>
           <a:p>
             <a:r>
-              <a:rPr lang="en-GB" dirty="0"/>
-              <a:t>Differential expression analysis in R</a:t>
+              <a:rPr lang="en-IT" b="1" dirty="0"/>
+              <a:t>From a count matrix to differential expression with DESeq2</a:t>
             </a:r>
           </a:p>
         </p:txBody>
@@ -12531,12 +12756,14 @@
         </p:nvSpPr>
         <p:spPr>
           <a:xfrm>
-            <a:off x="398929" y="956048"/>
+            <a:off x="429074" y="1947189"/>
             <a:ext cx="11192435" cy="519627"/>
           </a:xfrm>
         </p:spPr>
         <p:txBody>
-          <a:bodyPr/>
+          <a:bodyPr>
+            <a:normAutofit fontScale="85000" lnSpcReduction="10000"/>
+          </a:bodyPr>
           <a:lstStyle/>
           <a:p>
             <a:pPr marL="0" indent="0">
@@ -12544,7 +12771,7 @@
             </a:pPr>
             <a:r>
               <a:rPr lang="en-IT" dirty="0"/>
-              <a:t>Aim: Differential expression: effect size relative to biological variability</a:t>
+              <a:t>Aim: Differential expression: effect size relative to biological variability using Deseq2</a:t>
             </a:r>
             <a:endParaRPr lang="en-GB" dirty="0"/>
           </a:p>
@@ -12573,7 +12800,7 @@
           <a:p>
             <a:fld id="{761DFEEA-1162-B343-ACBF-B3E92F6AC390}" type="datetime1">
               <a:rPr lang="it-IT" smtClean="0"/>
-              <a:t>23/09/26</a:t>
+              <a:t>25/09/26</a:t>
             </a:fld>
             <a:endParaRPr lang="en-GB"/>
           </a:p>
@@ -12636,10 +12863,4495 @@
           </a:p>
         </p:txBody>
       </p:sp>
+      <p:sp>
+        <p:nvSpPr>
+          <p:cNvPr id="11" name="TextBox 10">
+            <a:extLst>
+              <a:ext uri="{FF2B5EF4-FFF2-40B4-BE49-F238E27FC236}">
+                <a16:creationId xmlns:a16="http://schemas.microsoft.com/office/drawing/2014/main" id="{0F4E0143-7916-5223-2B80-0DB098A8D101}"/>
+              </a:ext>
+            </a:extLst>
+          </p:cNvPr>
+          <p:cNvSpPr txBox="1"/>
+          <p:nvPr/>
+        </p:nvSpPr>
+        <p:spPr>
+          <a:xfrm>
+            <a:off x="1309513" y="2785117"/>
+            <a:ext cx="4543774" cy="2308324"/>
+          </a:xfrm>
+          <a:prstGeom prst="rect">
+            <a:avLst/>
+          </a:prstGeom>
+          <a:noFill/>
+          <a:ln>
+            <a:solidFill>
+              <a:schemeClr val="tx1"/>
+            </a:solidFill>
+          </a:ln>
+        </p:spPr>
+        <p:txBody>
+          <a:bodyPr wrap="square" rtlCol="0">
+            <a:spAutoFit/>
+          </a:bodyPr>
+          <a:lstStyle/>
+          <a:p>
+            <a:r>
+              <a:rPr lang="en-GB" sz="2400" dirty="0"/>
+              <a:t>Deseq2 is an R library:</a:t>
+            </a:r>
+          </a:p>
+          <a:p>
+            <a:endParaRPr lang="en-GB" sz="2400" dirty="0"/>
+          </a:p>
+          <a:p>
+            <a:r>
+              <a:rPr lang="en-GB" sz="2400" dirty="0"/>
+              <a:t>R libraries are none other than a set of pre-made functions that takes an input object and generate an output.</a:t>
+            </a:r>
+          </a:p>
+        </p:txBody>
+      </p:sp>
+      <p:sp>
+        <p:nvSpPr>
+          <p:cNvPr id="12" name="TextBox 11">
+            <a:extLst>
+              <a:ext uri="{FF2B5EF4-FFF2-40B4-BE49-F238E27FC236}">
+                <a16:creationId xmlns:a16="http://schemas.microsoft.com/office/drawing/2014/main" id="{B74904CD-D93E-D648-BFEF-BE571702BFFD}"/>
+              </a:ext>
+            </a:extLst>
+          </p:cNvPr>
+          <p:cNvSpPr txBox="1"/>
+          <p:nvPr/>
+        </p:nvSpPr>
+        <p:spPr>
+          <a:xfrm>
+            <a:off x="6658231" y="3272129"/>
+            <a:ext cx="4402552" cy="1200329"/>
+          </a:xfrm>
+          <a:prstGeom prst="rect">
+            <a:avLst/>
+          </a:prstGeom>
+          <a:noFill/>
+          <a:ln>
+            <a:solidFill>
+              <a:schemeClr val="tx1"/>
+            </a:solidFill>
+          </a:ln>
+        </p:spPr>
+        <p:txBody>
+          <a:bodyPr wrap="none" rtlCol="0">
+            <a:spAutoFit/>
+          </a:bodyPr>
+          <a:lstStyle/>
+          <a:p>
+            <a:pPr algn="ctr"/>
+            <a:r>
+              <a:rPr lang="en-GB" sz="2400" dirty="0"/>
+              <a:t>Raw integer counts (input matrix)</a:t>
+            </a:r>
+          </a:p>
+          <a:p>
+            <a:pPr algn="ctr"/>
+            <a:r>
+              <a:rPr lang="en-IT" sz="2400" dirty="0"/>
+              <a:t>↓</a:t>
+            </a:r>
+          </a:p>
+          <a:p>
+            <a:pPr algn="ctr"/>
+            <a:r>
+              <a:rPr lang="en-IT" sz="2400" dirty="0"/>
+              <a:t>DEG calling</a:t>
+            </a:r>
+            <a:endParaRPr lang="en-GB" sz="2400" dirty="0"/>
+          </a:p>
+        </p:txBody>
+      </p:sp>
+      <p:sp>
+        <p:nvSpPr>
+          <p:cNvPr id="8" name="TextBox 7">
+            <a:extLst>
+              <a:ext uri="{FF2B5EF4-FFF2-40B4-BE49-F238E27FC236}">
+                <a16:creationId xmlns:a16="http://schemas.microsoft.com/office/drawing/2014/main" id="{0912FED0-743D-BA6D-4CF3-E438943D6073}"/>
+              </a:ext>
+            </a:extLst>
+          </p:cNvPr>
+          <p:cNvSpPr txBox="1"/>
+          <p:nvPr/>
+        </p:nvSpPr>
+        <p:spPr>
+          <a:xfrm>
+            <a:off x="5967048" y="5093441"/>
+            <a:ext cx="6224952" cy="680956"/>
+          </a:xfrm>
+          <a:prstGeom prst="rect">
+            <a:avLst/>
+          </a:prstGeom>
+          <a:noFill/>
+        </p:spPr>
+        <p:txBody>
+          <a:bodyPr wrap="square">
+            <a:spAutoFit/>
+          </a:bodyPr>
+          <a:lstStyle/>
+          <a:p>
+            <a:r>
+              <a:rPr lang="en-IT" sz="1800" b="0" i="0" dirty="0">
+                <a:solidFill>
+                  <a:schemeClr val="tx1"/>
+                </a:solidFill>
+                <a:effectLst/>
+                <a:latin typeface="+mn-lt"/>
+              </a:rPr>
+              <a:t>Love MI, Huber W, Anders S. </a:t>
+            </a:r>
+            <a:r>
+              <a:rPr lang="en-IT" sz="1800" b="1" i="0" dirty="0">
+                <a:solidFill>
+                  <a:schemeClr val="tx1"/>
+                </a:solidFill>
+                <a:effectLst/>
+                <a:latin typeface="+mn-lt"/>
+              </a:rPr>
+              <a:t>Moderated estimation of fold change and dispersion for RNA-seq data with DESeq2.</a:t>
+            </a:r>
+            <a:r>
+              <a:rPr lang="en-IT" sz="1800" b="0" i="0" dirty="0">
+                <a:solidFill>
+                  <a:schemeClr val="tx1"/>
+                </a:solidFill>
+                <a:effectLst/>
+                <a:latin typeface="+mn-lt"/>
+              </a:rPr>
+              <a:t> </a:t>
+            </a:r>
+            <a:r>
+              <a:rPr lang="en-IT" sz="1800" b="0" i="1" dirty="0">
+                <a:solidFill>
+                  <a:schemeClr val="tx1"/>
+                </a:solidFill>
+                <a:effectLst/>
+                <a:latin typeface="+mn-lt"/>
+              </a:rPr>
+              <a:t>Genome Biology</a:t>
+            </a:r>
+            <a:r>
+              <a:rPr lang="en-IT" sz="1800" b="0" i="0" dirty="0">
+                <a:solidFill>
+                  <a:schemeClr val="tx1"/>
+                </a:solidFill>
+                <a:effectLst/>
+                <a:latin typeface="+mn-lt"/>
+              </a:rPr>
+              <a:t> 15, 550 (2014). </a:t>
+            </a:r>
+            <a:r>
+              <a:rPr lang="en-IT" sz="1800" b="0" i="0" u="sng" dirty="0">
+                <a:solidFill>
+                  <a:schemeClr val="tx1"/>
+                </a:solidFill>
+                <a:effectLst/>
+                <a:latin typeface="+mn-lt"/>
+                <a:hlinkClick r:id="rId2"/>
+              </a:rPr>
+              <a:t>doi:10.1186/s13059-014-0550-8</a:t>
+            </a:r>
+            <a:endParaRPr lang="en-GB" dirty="0"/>
+          </a:p>
+        </p:txBody>
+      </p:sp>
     </p:spTree>
     <p:extLst>
       <p:ext uri="{BB962C8B-B14F-4D97-AF65-F5344CB8AC3E}">
         <p14:creationId xmlns:p14="http://schemas.microsoft.com/office/powerpoint/2010/main" val="775283965"/>
+      </p:ext>
+    </p:extLst>
+  </p:cSld>
+  <p:clrMapOvr>
+    <a:masterClrMapping/>
+  </p:clrMapOvr>
+</p:sld>
+</file>
+
+<file path=ppt/slides/slide23.xml><?xml version="1.0" encoding="utf-8"?>
+<p:sld xmlns:a="http://schemas.openxmlformats.org/drawingml/2006/main" xmlns:r="http://schemas.openxmlformats.org/officeDocument/2006/relationships" xmlns:p="http://schemas.openxmlformats.org/presentationml/2006/main">
+  <p:cSld>
+    <p:spTree>
+      <p:nvGrpSpPr>
+        <p:cNvPr id="1" name=""/>
+        <p:cNvGrpSpPr/>
+        <p:nvPr/>
+      </p:nvGrpSpPr>
+      <p:grpSpPr>
+        <a:xfrm>
+          <a:off x="0" y="0"/>
+          <a:ext cx="0" cy="0"/>
+          <a:chOff x="0" y="0"/>
+          <a:chExt cx="0" cy="0"/>
+        </a:xfrm>
+      </p:grpSpPr>
+      <p:sp>
+        <p:nvSpPr>
+          <p:cNvPr id="2" name="Title 1">
+            <a:extLst>
+              <a:ext uri="{FF2B5EF4-FFF2-40B4-BE49-F238E27FC236}">
+                <a16:creationId xmlns:a16="http://schemas.microsoft.com/office/drawing/2014/main" id="{FC9D3C47-93E5-D34D-DBCF-FB9B9E2A0A3A}"/>
+              </a:ext>
+            </a:extLst>
+          </p:cNvPr>
+          <p:cNvSpPr>
+            <a:spLocks noGrp="1"/>
+          </p:cNvSpPr>
+          <p:nvPr>
+            <p:ph type="title"/>
+          </p:nvPr>
+        </p:nvSpPr>
+        <p:spPr/>
+        <p:txBody>
+          <a:bodyPr>
+            <a:normAutofit fontScale="90000"/>
+          </a:bodyPr>
+          <a:lstStyle/>
+          <a:p>
+            <a:r>
+              <a:rPr lang="en-GB" dirty="0"/>
+              <a:t>Deseq2 WF:</a:t>
+            </a:r>
+          </a:p>
+        </p:txBody>
+      </p:sp>
+      <p:sp>
+        <p:nvSpPr>
+          <p:cNvPr id="4" name="Date Placeholder 3">
+            <a:extLst>
+              <a:ext uri="{FF2B5EF4-FFF2-40B4-BE49-F238E27FC236}">
+                <a16:creationId xmlns:a16="http://schemas.microsoft.com/office/drawing/2014/main" id="{9C917387-5B6B-ADEC-B3D9-1B60F5A650C6}"/>
+              </a:ext>
+            </a:extLst>
+          </p:cNvPr>
+          <p:cNvSpPr>
+            <a:spLocks noGrp="1"/>
+          </p:cNvSpPr>
+          <p:nvPr>
+            <p:ph type="dt" sz="half" idx="10"/>
+          </p:nvPr>
+        </p:nvSpPr>
+        <p:spPr/>
+        <p:txBody>
+          <a:bodyPr/>
+          <a:lstStyle/>
+          <a:p>
+            <a:fld id="{761DFEEA-1162-B343-ACBF-B3E92F6AC390}" type="datetime1">
+              <a:rPr lang="it-IT" smtClean="0"/>
+              <a:t>25/09/26</a:t>
+            </a:fld>
+            <a:endParaRPr lang="en-GB"/>
+          </a:p>
+        </p:txBody>
+      </p:sp>
+      <p:sp>
+        <p:nvSpPr>
+          <p:cNvPr id="5" name="Footer Placeholder 4">
+            <a:extLst>
+              <a:ext uri="{FF2B5EF4-FFF2-40B4-BE49-F238E27FC236}">
+                <a16:creationId xmlns:a16="http://schemas.microsoft.com/office/drawing/2014/main" id="{2BEAA14B-FC42-490A-0721-12B408C13B64}"/>
+              </a:ext>
+            </a:extLst>
+          </p:cNvPr>
+          <p:cNvSpPr>
+            <a:spLocks noGrp="1"/>
+          </p:cNvSpPr>
+          <p:nvPr>
+            <p:ph type="ftr" sz="quarter" idx="11"/>
+          </p:nvPr>
+        </p:nvSpPr>
+        <p:spPr/>
+        <p:txBody>
+          <a:bodyPr/>
+          <a:lstStyle/>
+          <a:p>
+            <a:r>
+              <a:rPr lang="en-GB"/>
+              <a:t>Day 1: Reproducible NGS Data Analysis on Personal Laptops</a:t>
+            </a:r>
+          </a:p>
+        </p:txBody>
+      </p:sp>
+      <p:sp>
+        <p:nvSpPr>
+          <p:cNvPr id="6" name="Slide Number Placeholder 5">
+            <a:extLst>
+              <a:ext uri="{FF2B5EF4-FFF2-40B4-BE49-F238E27FC236}">
+                <a16:creationId xmlns:a16="http://schemas.microsoft.com/office/drawing/2014/main" id="{1106E59F-29A4-A429-2471-8ED3269201B5}"/>
+              </a:ext>
+            </a:extLst>
+          </p:cNvPr>
+          <p:cNvSpPr>
+            <a:spLocks noGrp="1"/>
+          </p:cNvSpPr>
+          <p:nvPr>
+            <p:ph type="sldNum" sz="quarter" idx="12"/>
+          </p:nvPr>
+        </p:nvSpPr>
+        <p:spPr/>
+        <p:txBody>
+          <a:bodyPr/>
+          <a:lstStyle/>
+          <a:p>
+            <a:fld id="{62E92BA6-6E87-3343-8D2C-B7A656D628E4}" type="slidenum">
+              <a:rPr lang="en-GB" smtClean="0"/>
+              <a:t>22</a:t>
+            </a:fld>
+            <a:endParaRPr lang="en-GB"/>
+          </a:p>
+        </p:txBody>
+      </p:sp>
+      <mc:AlternateContent xmlns:mc="http://schemas.openxmlformats.org/markup-compatibility/2006" xmlns:a14="http://schemas.microsoft.com/office/drawing/2010/main">
+        <mc:Choice Requires="a14">
+          <p:sp>
+            <p:nvSpPr>
+              <p:cNvPr id="8" name="TextBox 7">
+                <a:extLst>
+                  <a:ext uri="{FF2B5EF4-FFF2-40B4-BE49-F238E27FC236}">
+                    <a16:creationId xmlns:a16="http://schemas.microsoft.com/office/drawing/2014/main" id="{2AEB5933-8DBE-A12A-DCD3-82119FCDDFCC}"/>
+                  </a:ext>
+                </a:extLst>
+              </p:cNvPr>
+              <p:cNvSpPr txBox="1"/>
+              <p:nvPr/>
+            </p:nvSpPr>
+            <p:spPr>
+              <a:xfrm>
+                <a:off x="432577" y="1850852"/>
+                <a:ext cx="10801480" cy="2585323"/>
+              </a:xfrm>
+              <a:prstGeom prst="rect">
+                <a:avLst/>
+              </a:prstGeom>
+              <a:noFill/>
+              <a:ln>
+                <a:solidFill>
+                  <a:schemeClr val="tx1"/>
+                </a:solidFill>
+              </a:ln>
+            </p:spPr>
+            <p:txBody>
+              <a:bodyPr wrap="square">
+                <a:spAutoFit/>
+              </a:bodyPr>
+              <a:lstStyle/>
+              <a:p>
+                <a:r>
+                  <a:rPr lang="en-IT" dirty="0"/>
+                  <a:t>→ account for differences in library size (compute size factor)</a:t>
+                </a:r>
+                <a:br>
+                  <a:rPr lang="en-IT" dirty="0"/>
+                </a:br>
+                <a:r>
+                  <a:rPr lang="en-IT" dirty="0"/>
+                  <a:t>→ </a:t>
+                </a:r>
+                <a:r>
+                  <a:rPr lang="en-IT" b="1" dirty="0">
+                    <a:solidFill>
+                      <a:srgbClr val="FF0000"/>
+                    </a:solidFill>
+                  </a:rPr>
+                  <a:t>fit a GLM</a:t>
+                </a:r>
+                <a:r>
+                  <a:rPr lang="en-IT" dirty="0">
+                    <a:solidFill>
+                      <a:srgbClr val="FF0000"/>
+                    </a:solidFill>
+                  </a:rPr>
+                  <a:t> </a:t>
+                </a:r>
+                <a:r>
+                  <a:rPr lang="en-IT" dirty="0"/>
+                  <a:t>describing the EXPECTED COUNT for each sample from the experimental design</a:t>
+                </a:r>
+              </a:p>
+              <a:p>
+                <a:r>
+                  <a:rPr lang="en-IT" dirty="0"/>
+                  <a:t>→ ask how much the OBSERVED COUNTS vary around those fitted expectations</a:t>
+                </a:r>
+              </a:p>
+              <a:p>
+                <a:r>
+                  <a:rPr lang="en-IT" dirty="0"/>
+                  <a:t>→ model that variability with a gene-specific NEGATIVE-BINOMIAL DISPERSION alpha_i</a:t>
+                </a:r>
+              </a:p>
+              <a:p>
+                <a:r>
+                  <a:rPr lang="en-IT" dirty="0"/>
+                  <a:t>→ </a:t>
+                </a:r>
+                <a:r>
+                  <a:rPr lang="en-IT" b="1" dirty="0">
+                    <a:solidFill>
+                      <a:srgbClr val="FF0000"/>
+                    </a:solidFill>
+                  </a:rPr>
+                  <a:t>stabilize </a:t>
+                </a:r>
+                <a14:m>
+                  <m:oMath xmlns:m="http://schemas.openxmlformats.org/officeDocument/2006/math">
+                    <m:sSub>
+                      <m:sSubPr>
+                        <m:ctrlPr>
+                          <a:rPr lang="en-IT" i="1">
+                            <a:latin typeface="Cambria Math" panose="02040503050406030204" pitchFamily="18" charset="0"/>
+                          </a:rPr>
+                        </m:ctrlPr>
+                      </m:sSubPr>
+                      <m:e>
+                        <m:r>
+                          <a:rPr lang="en-IT" i="1">
+                            <a:latin typeface="Cambria Math" panose="02040503050406030204" pitchFamily="18" charset="0"/>
+                          </a:rPr>
+                          <m:t>𝛼</m:t>
+                        </m:r>
+                      </m:e>
+                      <m:sub>
+                        <m:r>
+                          <a:rPr lang="en-IT" i="1">
+                            <a:latin typeface="Cambria Math" panose="02040503050406030204" pitchFamily="18" charset="0"/>
+                          </a:rPr>
+                          <m:t>𝑖</m:t>
+                        </m:r>
+                      </m:sub>
+                    </m:sSub>
+                  </m:oMath>
+                </a14:m>
+                <a:r>
+                  <a:rPr lang="en-IT" b="1" dirty="0">
+                    <a:solidFill>
+                      <a:srgbClr val="FF0000"/>
+                    </a:solidFill>
+                  </a:rPr>
+                  <a:t> using information from all genes</a:t>
+                </a:r>
+                <a:br>
+                  <a:rPr lang="en-IT" dirty="0"/>
+                </a:br>
+                <a:r>
+                  <a:rPr lang="en-IT" dirty="0"/>
+                  <a:t>→ use </a:t>
+                </a:r>
+                <a14:m>
+                  <m:oMath xmlns:m="http://schemas.openxmlformats.org/officeDocument/2006/math">
+                    <m:sSub>
+                      <m:sSubPr>
+                        <m:ctrlPr>
+                          <a:rPr lang="en-IT" i="1">
+                            <a:latin typeface="Cambria Math" panose="02040503050406030204" pitchFamily="18" charset="0"/>
+                          </a:rPr>
+                        </m:ctrlPr>
+                      </m:sSubPr>
+                      <m:e>
+                        <m:r>
+                          <a:rPr lang="en-IT" i="1">
+                            <a:latin typeface="Cambria Math" panose="02040503050406030204" pitchFamily="18" charset="0"/>
+                          </a:rPr>
+                          <m:t>𝛼</m:t>
+                        </m:r>
+                      </m:e>
+                      <m:sub>
+                        <m:r>
+                          <a:rPr lang="en-IT" i="1">
+                            <a:latin typeface="Cambria Math" panose="02040503050406030204" pitchFamily="18" charset="0"/>
+                          </a:rPr>
+                          <m:t>𝑖</m:t>
+                        </m:r>
+                      </m:sub>
+                    </m:sSub>
+                  </m:oMath>
+                </a14:m>
+                <a:r>
+                  <a:rPr lang="en-IT" dirty="0"/>
+                  <a:t>+ fitted means + design + number of replicates to determine uncertainty of the coefficients </a:t>
+                </a:r>
+                <a:r>
+                  <a:rPr lang="en-IT" b="1" dirty="0">
+                    <a:solidFill>
+                      <a:srgbClr val="FF0000"/>
+                    </a:solidFill>
+                  </a:rPr>
+                  <a:t>SE(log2FC)</a:t>
+                </a:r>
+                <a:br>
+                  <a:rPr lang="en-IT" dirty="0"/>
+                </a:br>
+                <a:r>
+                  <a:rPr lang="en-IT" dirty="0"/>
+                  <a:t>→ standardize the effect: </a:t>
+                </a:r>
+                <a:r>
+                  <a:rPr lang="en-IT" dirty="0">
+                    <a:solidFill>
+                      <a:srgbClr val="FF0000"/>
+                    </a:solidFill>
+                  </a:rPr>
+                  <a:t>z = log2FC / SE(log2FC)</a:t>
+                </a:r>
+              </a:p>
+              <a:p>
+                <a:r>
+                  <a:rPr lang="en-IT" dirty="0"/>
+                  <a:t>→ obtain a </a:t>
+                </a:r>
+                <a:r>
+                  <a:rPr lang="en-IT" b="1" dirty="0">
+                    <a:solidFill>
+                      <a:srgbClr val="FF0000"/>
+                    </a:solidFill>
+                  </a:rPr>
+                  <a:t>Wald-test p-value</a:t>
+                </a:r>
+                <a:br>
+                  <a:rPr lang="en-IT" dirty="0">
+                    <a:solidFill>
+                      <a:srgbClr val="FF0000"/>
+                    </a:solidFill>
+                  </a:rPr>
+                </a:br>
+                <a:r>
+                  <a:rPr lang="en-IT" dirty="0"/>
+                  <a:t>→ correct across thousands of genes for </a:t>
+                </a:r>
+                <a:r>
+                  <a:rPr lang="en-IT" b="1" dirty="0">
+                    <a:solidFill>
+                      <a:srgbClr val="FF0000"/>
+                    </a:solidFill>
+                  </a:rPr>
+                  <a:t>multiple testing / FDR</a:t>
+                </a:r>
+                <a:endParaRPr lang="en-GB" dirty="0">
+                  <a:solidFill>
+                    <a:srgbClr val="FF0000"/>
+                  </a:solidFill>
+                </a:endParaRPr>
+              </a:p>
+            </p:txBody>
+          </p:sp>
+        </mc:Choice>
+        <mc:Fallback xmlns="">
+          <p:sp>
+            <p:nvSpPr>
+              <p:cNvPr id="8" name="TextBox 7">
+                <a:extLst>
+                  <a:ext uri="{FF2B5EF4-FFF2-40B4-BE49-F238E27FC236}">
+                    <a16:creationId xmlns:a16="http://schemas.microsoft.com/office/drawing/2014/main" id="{2AEB5933-8DBE-A12A-DCD3-82119FCDDFCC}"/>
+                  </a:ext>
+                </a:extLst>
+              </p:cNvPr>
+              <p:cNvSpPr txBox="1">
+                <a:spLocks noRot="1" noChangeAspect="1" noMove="1" noResize="1" noEditPoints="1" noAdjustHandles="1" noChangeArrowheads="1" noChangeShapeType="1" noTextEdit="1"/>
+              </p:cNvSpPr>
+              <p:nvPr/>
+            </p:nvSpPr>
+            <p:spPr>
+              <a:xfrm>
+                <a:off x="432577" y="1850852"/>
+                <a:ext cx="10801480" cy="2585323"/>
+              </a:xfrm>
+              <a:prstGeom prst="rect">
+                <a:avLst/>
+              </a:prstGeom>
+              <a:blipFill>
+                <a:blip r:embed="rId2"/>
+                <a:stretch>
+                  <a:fillRect l="-352" t="-1463" r="-117" b="-2439"/>
+                </a:stretch>
+              </a:blipFill>
+              <a:ln>
+                <a:solidFill>
+                  <a:schemeClr val="tx1"/>
+                </a:solidFill>
+              </a:ln>
+            </p:spPr>
+            <p:txBody>
+              <a:bodyPr/>
+              <a:lstStyle/>
+              <a:p>
+                <a:r>
+                  <a:rPr lang="en-GB">
+                    <a:noFill/>
+                  </a:rPr>
+                  <a:t> </a:t>
+                </a:r>
+              </a:p>
+            </p:txBody>
+          </p:sp>
+        </mc:Fallback>
+      </mc:AlternateContent>
+    </p:spTree>
+    <p:extLst>
+      <p:ext uri="{BB962C8B-B14F-4D97-AF65-F5344CB8AC3E}">
+        <p14:creationId xmlns:p14="http://schemas.microsoft.com/office/powerpoint/2010/main" val="2329393053"/>
+      </p:ext>
+    </p:extLst>
+  </p:cSld>
+  <p:clrMapOvr>
+    <a:masterClrMapping/>
+  </p:clrMapOvr>
+</p:sld>
+</file>
+
+<file path=ppt/slides/slide24.xml><?xml version="1.0" encoding="utf-8"?>
+<p:sld xmlns:a="http://schemas.openxmlformats.org/drawingml/2006/main" xmlns:r="http://schemas.openxmlformats.org/officeDocument/2006/relationships" xmlns:p="http://schemas.openxmlformats.org/presentationml/2006/main">
+  <p:cSld>
+    <p:spTree>
+      <p:nvGrpSpPr>
+        <p:cNvPr id="1" name="">
+          <a:extLst>
+            <a:ext uri="{FF2B5EF4-FFF2-40B4-BE49-F238E27FC236}">
+              <a16:creationId xmlns:a16="http://schemas.microsoft.com/office/drawing/2014/main" id="{DD0EF261-8240-F469-A8C4-23FEE976DBA1}"/>
+            </a:ext>
+          </a:extLst>
+        </p:cNvPr>
+        <p:cNvGrpSpPr/>
+        <p:nvPr/>
+      </p:nvGrpSpPr>
+      <p:grpSpPr>
+        <a:xfrm>
+          <a:off x="0" y="0"/>
+          <a:ext cx="0" cy="0"/>
+          <a:chOff x="0" y="0"/>
+          <a:chExt cx="0" cy="0"/>
+        </a:xfrm>
+      </p:grpSpPr>
+      <p:sp>
+        <p:nvSpPr>
+          <p:cNvPr id="2" name="Title 1">
+            <a:extLst>
+              <a:ext uri="{FF2B5EF4-FFF2-40B4-BE49-F238E27FC236}">
+                <a16:creationId xmlns:a16="http://schemas.microsoft.com/office/drawing/2014/main" id="{665EAEF5-6ECB-5711-9CC0-B3943776CC73}"/>
+              </a:ext>
+            </a:extLst>
+          </p:cNvPr>
+          <p:cNvSpPr>
+            <a:spLocks noGrp="1"/>
+          </p:cNvSpPr>
+          <p:nvPr>
+            <p:ph type="title"/>
+          </p:nvPr>
+        </p:nvSpPr>
+        <p:spPr>
+          <a:xfrm>
+            <a:off x="134470" y="122282"/>
+            <a:ext cx="12192000" cy="1033278"/>
+          </a:xfrm>
+        </p:spPr>
+        <p:txBody>
+          <a:bodyPr>
+            <a:normAutofit fontScale="90000"/>
+          </a:bodyPr>
+          <a:lstStyle/>
+          <a:p>
+            <a:r>
+              <a:rPr lang="en-IT" b="1" dirty="0"/>
+              <a:t>The experimental design: decide what the model should explain</a:t>
+            </a:r>
+            <a:r>
+              <a:rPr lang="en-GB" dirty="0"/>
+              <a:t>:</a:t>
+            </a:r>
+          </a:p>
+        </p:txBody>
+      </p:sp>
+      <p:sp>
+        <p:nvSpPr>
+          <p:cNvPr id="4" name="Date Placeholder 3">
+            <a:extLst>
+              <a:ext uri="{FF2B5EF4-FFF2-40B4-BE49-F238E27FC236}">
+                <a16:creationId xmlns:a16="http://schemas.microsoft.com/office/drawing/2014/main" id="{3D71E14C-0C51-E4A7-7A71-1881235C4391}"/>
+              </a:ext>
+            </a:extLst>
+          </p:cNvPr>
+          <p:cNvSpPr>
+            <a:spLocks noGrp="1"/>
+          </p:cNvSpPr>
+          <p:nvPr>
+            <p:ph type="dt" sz="half" idx="10"/>
+          </p:nvPr>
+        </p:nvSpPr>
+        <p:spPr/>
+        <p:txBody>
+          <a:bodyPr/>
+          <a:lstStyle/>
+          <a:p>
+            <a:fld id="{761DFEEA-1162-B343-ACBF-B3E92F6AC390}" type="datetime1">
+              <a:rPr lang="it-IT" smtClean="0"/>
+              <a:t>25/09/26</a:t>
+            </a:fld>
+            <a:endParaRPr lang="en-GB"/>
+          </a:p>
+        </p:txBody>
+      </p:sp>
+      <p:sp>
+        <p:nvSpPr>
+          <p:cNvPr id="5" name="Footer Placeholder 4">
+            <a:extLst>
+              <a:ext uri="{FF2B5EF4-FFF2-40B4-BE49-F238E27FC236}">
+                <a16:creationId xmlns:a16="http://schemas.microsoft.com/office/drawing/2014/main" id="{9D330A5E-656A-B032-9C24-4148E9DCEAB6}"/>
+              </a:ext>
+            </a:extLst>
+          </p:cNvPr>
+          <p:cNvSpPr>
+            <a:spLocks noGrp="1"/>
+          </p:cNvSpPr>
+          <p:nvPr>
+            <p:ph type="ftr" sz="quarter" idx="11"/>
+          </p:nvPr>
+        </p:nvSpPr>
+        <p:spPr/>
+        <p:txBody>
+          <a:bodyPr/>
+          <a:lstStyle/>
+          <a:p>
+            <a:r>
+              <a:rPr lang="en-GB"/>
+              <a:t>Day 1: Reproducible NGS Data Analysis on Personal Laptops</a:t>
+            </a:r>
+          </a:p>
+        </p:txBody>
+      </p:sp>
+      <p:sp>
+        <p:nvSpPr>
+          <p:cNvPr id="6" name="Slide Number Placeholder 5">
+            <a:extLst>
+              <a:ext uri="{FF2B5EF4-FFF2-40B4-BE49-F238E27FC236}">
+                <a16:creationId xmlns:a16="http://schemas.microsoft.com/office/drawing/2014/main" id="{70CA0A6B-0138-1449-8E66-03DAC3229B47}"/>
+              </a:ext>
+            </a:extLst>
+          </p:cNvPr>
+          <p:cNvSpPr>
+            <a:spLocks noGrp="1"/>
+          </p:cNvSpPr>
+          <p:nvPr>
+            <p:ph type="sldNum" sz="quarter" idx="12"/>
+          </p:nvPr>
+        </p:nvSpPr>
+        <p:spPr/>
+        <p:txBody>
+          <a:bodyPr/>
+          <a:lstStyle/>
+          <a:p>
+            <a:fld id="{62E92BA6-6E87-3343-8D2C-B7A656D628E4}" type="slidenum">
+              <a:rPr lang="en-GB" smtClean="0"/>
+              <a:t>23</a:t>
+            </a:fld>
+            <a:endParaRPr lang="en-GB"/>
+          </a:p>
+        </p:txBody>
+      </p:sp>
+      <p:graphicFrame>
+        <p:nvGraphicFramePr>
+          <p:cNvPr id="3" name="Table 2">
+            <a:extLst>
+              <a:ext uri="{FF2B5EF4-FFF2-40B4-BE49-F238E27FC236}">
+                <a16:creationId xmlns:a16="http://schemas.microsoft.com/office/drawing/2014/main" id="{67C907B4-6032-92F9-64F2-0D7DF136A538}"/>
+              </a:ext>
+            </a:extLst>
+          </p:cNvPr>
+          <p:cNvGraphicFramePr>
+            <a:graphicFrameLocks noGrp="1"/>
+          </p:cNvGraphicFramePr>
+          <p:nvPr>
+            <p:extLst>
+              <p:ext uri="{D42A27DB-BD31-4B8C-83A1-F6EECF244321}">
+                <p14:modId xmlns:p14="http://schemas.microsoft.com/office/powerpoint/2010/main" val="2413427957"/>
+              </p:ext>
+            </p:extLst>
+          </p:nvPr>
+        </p:nvGraphicFramePr>
+        <p:xfrm>
+          <a:off x="4353120" y="958268"/>
+          <a:ext cx="7182909" cy="5081723"/>
+        </p:xfrm>
+        <a:graphic>
+          <a:graphicData uri="http://schemas.openxmlformats.org/drawingml/2006/table">
+            <a:tbl>
+              <a:tblPr>
+                <a:tableStyleId>{5C22544A-7EE6-4342-B048-85BDC9FD1C3A}</a:tableStyleId>
+              </a:tblPr>
+              <a:tblGrid>
+                <a:gridCol w="2394303">
+                  <a:extLst>
+                    <a:ext uri="{9D8B030D-6E8A-4147-A177-3AD203B41FA5}">
+                      <a16:colId xmlns:a16="http://schemas.microsoft.com/office/drawing/2014/main" val="1282357558"/>
+                    </a:ext>
+                  </a:extLst>
+                </a:gridCol>
+                <a:gridCol w="2394303">
+                  <a:extLst>
+                    <a:ext uri="{9D8B030D-6E8A-4147-A177-3AD203B41FA5}">
+                      <a16:colId xmlns:a16="http://schemas.microsoft.com/office/drawing/2014/main" val="1292603320"/>
+                    </a:ext>
+                  </a:extLst>
+                </a:gridCol>
+                <a:gridCol w="2394303">
+                  <a:extLst>
+                    <a:ext uri="{9D8B030D-6E8A-4147-A177-3AD203B41FA5}">
+                      <a16:colId xmlns:a16="http://schemas.microsoft.com/office/drawing/2014/main" val="613739051"/>
+                    </a:ext>
+                  </a:extLst>
+                </a:gridCol>
+              </a:tblGrid>
+              <a:tr h="221392">
+                <a:tc>
+                  <a:txBody>
+                    <a:bodyPr/>
+                    <a:lstStyle/>
+                    <a:p>
+                      <a:pPr algn="l" fontAlgn="t">
+                        <a:buNone/>
+                      </a:pPr>
+                      <a:r>
+                        <a:rPr lang="en-IT" sz="1400" b="1" dirty="0">
+                          <a:solidFill>
+                            <a:srgbClr val="FF0000"/>
+                          </a:solidFill>
+                          <a:effectLst/>
+                        </a:rPr>
+                        <a:t>Experimental structure</a:t>
+                      </a:r>
+                      <a:endParaRPr lang="en-IT" sz="1400" b="1" i="0" dirty="0">
+                        <a:solidFill>
+                          <a:srgbClr val="FF0000"/>
+                        </a:solidFill>
+                        <a:effectLst/>
+                        <a:latin typeface="Source Sans Pro" panose="020B0503030403020204" pitchFamily="34" charset="0"/>
+                      </a:endParaRPr>
+                    </a:p>
+                  </a:txBody>
+                  <a:tcPr marL="72662" marR="72662" marT="36331" marB="36331"/>
+                </a:tc>
+                <a:tc>
+                  <a:txBody>
+                    <a:bodyPr/>
+                    <a:lstStyle/>
+                    <a:p>
+                      <a:pPr algn="l" fontAlgn="t">
+                        <a:buNone/>
+                      </a:pPr>
+                      <a:r>
+                        <a:rPr lang="en-IT" sz="1400" b="1">
+                          <a:solidFill>
+                            <a:srgbClr val="FF0000"/>
+                          </a:solidFill>
+                          <a:effectLst/>
+                        </a:rPr>
+                        <a:t>Typical DESeq2 design</a:t>
+                      </a:r>
+                      <a:endParaRPr lang="en-IT" sz="1400" b="1" i="0">
+                        <a:solidFill>
+                          <a:srgbClr val="FF0000"/>
+                        </a:solidFill>
+                        <a:effectLst/>
+                        <a:latin typeface="Source Sans Pro" panose="020B0503030403020204" pitchFamily="34" charset="0"/>
+                      </a:endParaRPr>
+                    </a:p>
+                  </a:txBody>
+                  <a:tcPr marL="72662" marR="72662" marT="36331" marB="36331"/>
+                </a:tc>
+                <a:tc>
+                  <a:txBody>
+                    <a:bodyPr/>
+                    <a:lstStyle/>
+                    <a:p>
+                      <a:pPr algn="l" fontAlgn="t">
+                        <a:buNone/>
+                      </a:pPr>
+                      <a:r>
+                        <a:rPr lang="en-IT" sz="1400" b="1" dirty="0">
+                          <a:solidFill>
+                            <a:srgbClr val="FF0000"/>
+                          </a:solidFill>
+                          <a:effectLst/>
+                        </a:rPr>
+                        <a:t>Principle</a:t>
+                      </a:r>
+                      <a:endParaRPr lang="en-IT" sz="1400" b="1" i="0" dirty="0">
+                        <a:solidFill>
+                          <a:srgbClr val="FF0000"/>
+                        </a:solidFill>
+                        <a:effectLst/>
+                        <a:latin typeface="Source Sans Pro" panose="020B0503030403020204" pitchFamily="34" charset="0"/>
+                      </a:endParaRPr>
+                    </a:p>
+                  </a:txBody>
+                  <a:tcPr marL="72662" marR="72662" marT="36331" marB="36331"/>
+                </a:tc>
+                <a:extLst>
+                  <a:ext uri="{0D108BD9-81ED-4DB2-BD59-A6C34878D82A}">
+                    <a16:rowId xmlns:a16="http://schemas.microsoft.com/office/drawing/2014/main" val="3917410425"/>
+                  </a:ext>
+                </a:extLst>
+              </a:tr>
+              <a:tr h="508635">
+                <a:tc>
+                  <a:txBody>
+                    <a:bodyPr/>
+                    <a:lstStyle/>
+                    <a:p>
+                      <a:pPr algn="l" fontAlgn="t">
+                        <a:buNone/>
+                      </a:pPr>
+                      <a:r>
+                        <a:rPr lang="en-IT" sz="1400">
+                          <a:effectLst/>
+                        </a:rPr>
+                        <a:t>Two independent conditions with biological replicates</a:t>
+                      </a:r>
+                      <a:endParaRPr lang="en-IT" sz="1400" b="0" i="0">
+                        <a:solidFill>
+                          <a:srgbClr val="343A40"/>
+                        </a:solidFill>
+                        <a:effectLst/>
+                        <a:latin typeface="Source Sans Pro" panose="020B0503030403020204" pitchFamily="34" charset="0"/>
+                      </a:endParaRPr>
+                    </a:p>
+                  </a:txBody>
+                  <a:tcPr marL="72662" marR="72662" marT="36331" marB="36331"/>
+                </a:tc>
+                <a:tc>
+                  <a:txBody>
+                    <a:bodyPr/>
+                    <a:lstStyle/>
+                    <a:p>
+                      <a:pPr algn="l" fontAlgn="t">
+                        <a:buNone/>
+                      </a:pPr>
+                      <a:r>
+                        <a:rPr lang="en-IT" sz="1400">
+                          <a:effectLst/>
+                        </a:rPr>
+                        <a:t>~ condition</a:t>
+                      </a:r>
+                      <a:endParaRPr lang="en-IT" sz="1400" b="0" i="0">
+                        <a:solidFill>
+                          <a:srgbClr val="343A40"/>
+                        </a:solidFill>
+                        <a:effectLst/>
+                        <a:latin typeface="Source Sans Pro" panose="020B0503030403020204" pitchFamily="34" charset="0"/>
+                      </a:endParaRPr>
+                    </a:p>
+                  </a:txBody>
+                  <a:tcPr marL="72662" marR="72662" marT="36331" marB="36331"/>
+                </a:tc>
+                <a:tc>
+                  <a:txBody>
+                    <a:bodyPr/>
+                    <a:lstStyle/>
+                    <a:p>
+                      <a:pPr algn="l" fontAlgn="t">
+                        <a:buNone/>
+                      </a:pPr>
+                      <a:r>
+                        <a:rPr lang="en-IT" sz="1400" dirty="0">
+                          <a:effectLst/>
+                        </a:rPr>
+                        <a:t>Replicate are not covariates</a:t>
+                      </a:r>
+                      <a:endParaRPr lang="en-IT" sz="1400" b="0" i="0" dirty="0">
+                        <a:solidFill>
+                          <a:srgbClr val="343A40"/>
+                        </a:solidFill>
+                        <a:effectLst/>
+                        <a:latin typeface="Source Sans Pro" panose="020B0503030403020204" pitchFamily="34" charset="0"/>
+                      </a:endParaRPr>
+                    </a:p>
+                  </a:txBody>
+                  <a:tcPr marL="72662" marR="72662" marT="36331" marB="36331"/>
+                </a:tc>
+                <a:extLst>
+                  <a:ext uri="{0D108BD9-81ED-4DB2-BD59-A6C34878D82A}">
+                    <a16:rowId xmlns:a16="http://schemas.microsoft.com/office/drawing/2014/main" val="2945539258"/>
+                  </a:ext>
+                </a:extLst>
+              </a:tr>
+              <a:tr h="726621">
+                <a:tc>
+                  <a:txBody>
+                    <a:bodyPr/>
+                    <a:lstStyle/>
+                    <a:p>
+                      <a:pPr algn="l" fontAlgn="t">
+                        <a:buNone/>
+                      </a:pPr>
+                      <a:r>
+                        <a:rPr lang="en-IT" sz="1400">
+                          <a:effectLst/>
+                        </a:rPr>
+                        <a:t>Same patient / donor / animal measured in both conditions</a:t>
+                      </a:r>
+                      <a:endParaRPr lang="en-IT" sz="1400" b="0" i="0">
+                        <a:solidFill>
+                          <a:srgbClr val="343A40"/>
+                        </a:solidFill>
+                        <a:effectLst/>
+                        <a:latin typeface="Source Sans Pro" panose="020B0503030403020204" pitchFamily="34" charset="0"/>
+                      </a:endParaRPr>
+                    </a:p>
+                  </a:txBody>
+                  <a:tcPr marL="72662" marR="72662" marT="36331" marB="36331"/>
+                </a:tc>
+                <a:tc>
+                  <a:txBody>
+                    <a:bodyPr/>
+                    <a:lstStyle/>
+                    <a:p>
+                      <a:pPr algn="l" fontAlgn="t">
+                        <a:buNone/>
+                      </a:pPr>
+                      <a:r>
+                        <a:rPr lang="en-IT" sz="1400">
+                          <a:effectLst/>
+                        </a:rPr>
+                        <a:t>~ subject + condition</a:t>
+                      </a:r>
+                      <a:endParaRPr lang="en-IT" sz="1400" b="0" i="0">
+                        <a:solidFill>
+                          <a:srgbClr val="343A40"/>
+                        </a:solidFill>
+                        <a:effectLst/>
+                        <a:latin typeface="Source Sans Pro" panose="020B0503030403020204" pitchFamily="34" charset="0"/>
+                      </a:endParaRPr>
+                    </a:p>
+                  </a:txBody>
+                  <a:tcPr marL="72662" marR="72662" marT="36331" marB="36331"/>
+                </a:tc>
+                <a:tc>
+                  <a:txBody>
+                    <a:bodyPr/>
+                    <a:lstStyle/>
+                    <a:p>
+                      <a:pPr algn="l" fontAlgn="t">
+                        <a:buNone/>
+                      </a:pPr>
+                      <a:r>
+                        <a:rPr lang="en-IT" sz="1400" dirty="0">
+                          <a:effectLst/>
+                        </a:rPr>
+                        <a:t>Subject is a blocking factor because measurements are paired</a:t>
+                      </a:r>
+                      <a:endParaRPr lang="en-IT" sz="1400" b="0" i="0" dirty="0">
+                        <a:solidFill>
+                          <a:srgbClr val="343A40"/>
+                        </a:solidFill>
+                        <a:effectLst/>
+                        <a:latin typeface="Source Sans Pro" panose="020B0503030403020204" pitchFamily="34" charset="0"/>
+                      </a:endParaRPr>
+                    </a:p>
+                  </a:txBody>
+                  <a:tcPr marL="72662" marR="72662" marT="36331" marB="36331"/>
+                </a:tc>
+                <a:extLst>
+                  <a:ext uri="{0D108BD9-81ED-4DB2-BD59-A6C34878D82A}">
+                    <a16:rowId xmlns:a16="http://schemas.microsoft.com/office/drawing/2014/main" val="2317604949"/>
+                  </a:ext>
+                </a:extLst>
+              </a:tr>
+              <a:tr h="944608">
+                <a:tc>
+                  <a:txBody>
+                    <a:bodyPr/>
+                    <a:lstStyle/>
+                    <a:p>
+                      <a:pPr algn="l" fontAlgn="t">
+                        <a:buNone/>
+                      </a:pPr>
+                      <a:r>
+                        <a:rPr lang="en-IT" sz="1400">
+                          <a:effectLst/>
+                        </a:rPr>
+                        <a:t>Samples processed in different technical batches, with conditions represented across batches</a:t>
+                      </a:r>
+                      <a:endParaRPr lang="en-IT" sz="1400" b="0" i="0">
+                        <a:solidFill>
+                          <a:srgbClr val="343A40"/>
+                        </a:solidFill>
+                        <a:effectLst/>
+                        <a:latin typeface="Source Sans Pro" panose="020B0503030403020204" pitchFamily="34" charset="0"/>
+                      </a:endParaRPr>
+                    </a:p>
+                  </a:txBody>
+                  <a:tcPr marL="72662" marR="72662" marT="36331" marB="36331"/>
+                </a:tc>
+                <a:tc>
+                  <a:txBody>
+                    <a:bodyPr/>
+                    <a:lstStyle/>
+                    <a:p>
+                      <a:pPr algn="l" fontAlgn="t">
+                        <a:buNone/>
+                      </a:pPr>
+                      <a:r>
+                        <a:rPr lang="en-IT" sz="1400">
+                          <a:effectLst/>
+                        </a:rPr>
+                        <a:t>~ batch + condition</a:t>
+                      </a:r>
+                      <a:endParaRPr lang="en-IT" sz="1400" b="0" i="0">
+                        <a:solidFill>
+                          <a:srgbClr val="343A40"/>
+                        </a:solidFill>
+                        <a:effectLst/>
+                        <a:latin typeface="Source Sans Pro" panose="020B0503030403020204" pitchFamily="34" charset="0"/>
+                      </a:endParaRPr>
+                    </a:p>
+                  </a:txBody>
+                  <a:tcPr marL="72662" marR="72662" marT="36331" marB="36331"/>
+                </a:tc>
+                <a:tc>
+                  <a:txBody>
+                    <a:bodyPr/>
+                    <a:lstStyle/>
+                    <a:p>
+                      <a:pPr algn="l" fontAlgn="t">
+                        <a:buNone/>
+                      </a:pPr>
+                      <a:r>
+                        <a:rPr lang="en-IT" sz="1400">
+                          <a:effectLst/>
+                        </a:rPr>
+                        <a:t>Account for systematic batch variation while estimating condition</a:t>
+                      </a:r>
+                      <a:endParaRPr lang="en-IT" sz="1400" b="0" i="0">
+                        <a:solidFill>
+                          <a:srgbClr val="343A40"/>
+                        </a:solidFill>
+                        <a:effectLst/>
+                        <a:latin typeface="Source Sans Pro" panose="020B0503030403020204" pitchFamily="34" charset="0"/>
+                      </a:endParaRPr>
+                    </a:p>
+                  </a:txBody>
+                  <a:tcPr marL="72662" marR="72662" marT="36331" marB="36331"/>
+                </a:tc>
+                <a:extLst>
+                  <a:ext uri="{0D108BD9-81ED-4DB2-BD59-A6C34878D82A}">
+                    <a16:rowId xmlns:a16="http://schemas.microsoft.com/office/drawing/2014/main" val="2528709023"/>
+                  </a:ext>
+                </a:extLst>
+              </a:tr>
+              <a:tr h="726621">
+                <a:tc>
+                  <a:txBody>
+                    <a:bodyPr/>
+                    <a:lstStyle/>
+                    <a:p>
+                      <a:pPr algn="l" fontAlgn="t">
+                        <a:buNone/>
+                      </a:pPr>
+                      <a:r>
+                        <a:rPr lang="en-IT" sz="1400">
+                          <a:effectLst/>
+                        </a:rPr>
+                        <a:t>Genotype and treatment where treatment effect may differ by genotype</a:t>
+                      </a:r>
+                      <a:endParaRPr lang="en-IT" sz="1400" b="0" i="0">
+                        <a:solidFill>
+                          <a:srgbClr val="343A40"/>
+                        </a:solidFill>
+                        <a:effectLst/>
+                        <a:latin typeface="Source Sans Pro" panose="020B0503030403020204" pitchFamily="34" charset="0"/>
+                      </a:endParaRPr>
+                    </a:p>
+                  </a:txBody>
+                  <a:tcPr marL="72662" marR="72662" marT="36331" marB="36331"/>
+                </a:tc>
+                <a:tc>
+                  <a:txBody>
+                    <a:bodyPr/>
+                    <a:lstStyle/>
+                    <a:p>
+                      <a:pPr algn="l" fontAlgn="t">
+                        <a:buNone/>
+                      </a:pPr>
+                      <a:r>
+                        <a:rPr lang="en-IT" sz="1400">
+                          <a:effectLst/>
+                        </a:rPr>
+                        <a:t>~ genotype + treatment + genotype:treatment</a:t>
+                      </a:r>
+                      <a:endParaRPr lang="en-IT" sz="1400" b="0" i="0">
+                        <a:solidFill>
+                          <a:srgbClr val="343A40"/>
+                        </a:solidFill>
+                        <a:effectLst/>
+                        <a:latin typeface="Source Sans Pro" panose="020B0503030403020204" pitchFamily="34" charset="0"/>
+                      </a:endParaRPr>
+                    </a:p>
+                  </a:txBody>
+                  <a:tcPr marL="72662" marR="72662" marT="36331" marB="36331"/>
+                </a:tc>
+                <a:tc>
+                  <a:txBody>
+                    <a:bodyPr/>
+                    <a:lstStyle/>
+                    <a:p>
+                      <a:pPr algn="l" fontAlgn="t">
+                        <a:buNone/>
+                      </a:pPr>
+                      <a:r>
+                        <a:rPr lang="en-IT" sz="1400">
+                          <a:effectLst/>
+                        </a:rPr>
+                        <a:t>Use an interaction only when the scientific question is about different responses</a:t>
+                      </a:r>
+                      <a:endParaRPr lang="en-IT" sz="1400" b="0" i="0">
+                        <a:solidFill>
+                          <a:srgbClr val="343A40"/>
+                        </a:solidFill>
+                        <a:effectLst/>
+                        <a:latin typeface="Source Sans Pro" panose="020B0503030403020204" pitchFamily="34" charset="0"/>
+                      </a:endParaRPr>
+                    </a:p>
+                  </a:txBody>
+                  <a:tcPr marL="72662" marR="72662" marT="36331" marB="36331"/>
+                </a:tc>
+                <a:extLst>
+                  <a:ext uri="{0D108BD9-81ED-4DB2-BD59-A6C34878D82A}">
+                    <a16:rowId xmlns:a16="http://schemas.microsoft.com/office/drawing/2014/main" val="1641567043"/>
+                  </a:ext>
+                </a:extLst>
+              </a:tr>
+              <a:tr h="944608">
+                <a:tc>
+                  <a:txBody>
+                    <a:bodyPr/>
+                    <a:lstStyle/>
+                    <a:p>
+                      <a:pPr algn="l" fontAlgn="t">
+                        <a:buNone/>
+                      </a:pPr>
+                      <a:r>
+                        <a:rPr lang="en-IT" sz="1400">
+                          <a:effectLst/>
+                        </a:rPr>
+                        <a:t>Same biological library sequenced twice</a:t>
+                      </a:r>
+                      <a:endParaRPr lang="en-IT" sz="1400" b="0" i="0">
+                        <a:solidFill>
+                          <a:srgbClr val="343A40"/>
+                        </a:solidFill>
+                        <a:effectLst/>
+                        <a:latin typeface="Source Sans Pro" panose="020B0503030403020204" pitchFamily="34" charset="0"/>
+                      </a:endParaRPr>
+                    </a:p>
+                  </a:txBody>
+                  <a:tcPr marL="72662" marR="72662" marT="36331" marB="36331"/>
+                </a:tc>
+                <a:tc>
+                  <a:txBody>
+                    <a:bodyPr/>
+                    <a:lstStyle/>
+                    <a:p>
+                      <a:pPr algn="l" fontAlgn="t">
+                        <a:buNone/>
+                      </a:pPr>
+                      <a:r>
+                        <a:rPr lang="en-IT" sz="1400">
+                          <a:effectLst/>
+                        </a:rPr>
+                        <a:t>Collapse technical runs before DESeq2</a:t>
+                      </a:r>
+                      <a:endParaRPr lang="en-IT" sz="1400" b="0" i="0">
+                        <a:solidFill>
+                          <a:srgbClr val="343A40"/>
+                        </a:solidFill>
+                        <a:effectLst/>
+                        <a:latin typeface="Source Sans Pro" panose="020B0503030403020204" pitchFamily="34" charset="0"/>
+                      </a:endParaRPr>
+                    </a:p>
+                  </a:txBody>
+                  <a:tcPr marL="72662" marR="72662" marT="36331" marB="36331"/>
+                </a:tc>
+                <a:tc>
+                  <a:txBody>
+                    <a:bodyPr/>
+                    <a:lstStyle/>
+                    <a:p>
+                      <a:pPr algn="l" fontAlgn="t">
+                        <a:buNone/>
+                      </a:pPr>
+                      <a:r>
+                        <a:rPr lang="en-IT" sz="1400">
+                          <a:effectLst/>
+                        </a:rPr>
+                        <a:t>Multiple sequencing runs of the same library are not independent biological replicates</a:t>
+                      </a:r>
+                      <a:endParaRPr lang="en-IT" sz="1400" b="0" i="0">
+                        <a:solidFill>
+                          <a:srgbClr val="343A40"/>
+                        </a:solidFill>
+                        <a:effectLst/>
+                        <a:latin typeface="Source Sans Pro" panose="020B0503030403020204" pitchFamily="34" charset="0"/>
+                      </a:endParaRPr>
+                    </a:p>
+                  </a:txBody>
+                  <a:tcPr marL="72662" marR="72662" marT="36331" marB="36331"/>
+                </a:tc>
+                <a:extLst>
+                  <a:ext uri="{0D108BD9-81ED-4DB2-BD59-A6C34878D82A}">
+                    <a16:rowId xmlns:a16="http://schemas.microsoft.com/office/drawing/2014/main" val="1451494379"/>
+                  </a:ext>
+                </a:extLst>
+              </a:tr>
+              <a:tr h="944608">
+                <a:tc>
+                  <a:txBody>
+                    <a:bodyPr/>
+                    <a:lstStyle/>
+                    <a:p>
+                      <a:pPr algn="l" fontAlgn="t">
+                        <a:buNone/>
+                      </a:pPr>
+                      <a:r>
+                        <a:rPr lang="en-IT" sz="1400" dirty="0">
+                          <a:effectLst/>
+                        </a:rPr>
+                        <a:t>Batch and condition perfectly confounded</a:t>
+                      </a:r>
+                      <a:endParaRPr lang="en-IT" sz="1400" b="0" i="0" dirty="0">
+                        <a:solidFill>
+                          <a:srgbClr val="343A40"/>
+                        </a:solidFill>
+                        <a:effectLst/>
+                        <a:latin typeface="Source Sans Pro" panose="020B0503030403020204" pitchFamily="34" charset="0"/>
+                      </a:endParaRPr>
+                    </a:p>
+                  </a:txBody>
+                  <a:tcPr marL="72662" marR="72662" marT="36331" marB="36331"/>
+                </a:tc>
+                <a:tc>
+                  <a:txBody>
+                    <a:bodyPr/>
+                    <a:lstStyle/>
+                    <a:p>
+                      <a:pPr algn="l" fontAlgn="t">
+                        <a:buNone/>
+                      </a:pPr>
+                      <a:r>
+                        <a:rPr lang="en-IT" sz="1400">
+                          <a:effectLst/>
+                        </a:rPr>
+                        <a:t>No valid formula can separate them</a:t>
+                      </a:r>
+                      <a:endParaRPr lang="en-IT" sz="1400" b="0" i="0">
+                        <a:solidFill>
+                          <a:srgbClr val="343A40"/>
+                        </a:solidFill>
+                        <a:effectLst/>
+                        <a:latin typeface="Source Sans Pro" panose="020B0503030403020204" pitchFamily="34" charset="0"/>
+                      </a:endParaRPr>
+                    </a:p>
+                  </a:txBody>
+                  <a:tcPr marL="72662" marR="72662" marT="36331" marB="36331"/>
+                </a:tc>
+                <a:tc>
+                  <a:txBody>
+                    <a:bodyPr/>
+                    <a:lstStyle/>
+                    <a:p>
+                      <a:pPr algn="l" fontAlgn="t">
+                        <a:buNone/>
+                      </a:pPr>
+                      <a:r>
+                        <a:rPr lang="en-IT" sz="1400" dirty="0">
+                          <a:effectLst/>
+                        </a:rPr>
+                        <a:t>The experiment itself does not contain enough information to estimate both effects</a:t>
+                      </a:r>
+                      <a:endParaRPr lang="en-IT" sz="1400" b="0" i="0" dirty="0">
+                        <a:solidFill>
+                          <a:srgbClr val="343A40"/>
+                        </a:solidFill>
+                        <a:effectLst/>
+                        <a:latin typeface="Source Sans Pro" panose="020B0503030403020204" pitchFamily="34" charset="0"/>
+                      </a:endParaRPr>
+                    </a:p>
+                  </a:txBody>
+                  <a:tcPr marL="72662" marR="72662" marT="36331" marB="36331"/>
+                </a:tc>
+                <a:extLst>
+                  <a:ext uri="{0D108BD9-81ED-4DB2-BD59-A6C34878D82A}">
+                    <a16:rowId xmlns:a16="http://schemas.microsoft.com/office/drawing/2014/main" val="884456662"/>
+                  </a:ext>
+                </a:extLst>
+              </a:tr>
+            </a:tbl>
+          </a:graphicData>
+        </a:graphic>
+      </p:graphicFrame>
+      <p:sp>
+        <p:nvSpPr>
+          <p:cNvPr id="9" name="TextBox 8">
+            <a:extLst>
+              <a:ext uri="{FF2B5EF4-FFF2-40B4-BE49-F238E27FC236}">
+                <a16:creationId xmlns:a16="http://schemas.microsoft.com/office/drawing/2014/main" id="{D970A113-AA00-1616-6C23-5B71EA5F9112}"/>
+              </a:ext>
+            </a:extLst>
+          </p:cNvPr>
+          <p:cNvSpPr txBox="1"/>
+          <p:nvPr/>
+        </p:nvSpPr>
+        <p:spPr>
+          <a:xfrm>
+            <a:off x="443211" y="1681985"/>
+            <a:ext cx="3533178" cy="2862322"/>
+          </a:xfrm>
+          <a:prstGeom prst="rect">
+            <a:avLst/>
+          </a:prstGeom>
+          <a:noFill/>
+        </p:spPr>
+        <p:txBody>
+          <a:bodyPr wrap="square">
+            <a:spAutoFit/>
+          </a:bodyPr>
+          <a:lstStyle/>
+          <a:p>
+            <a:r>
+              <a:rPr lang="en-IT" sz="1800" b="1" i="1" dirty="0">
+                <a:solidFill>
+                  <a:schemeClr val="bg1">
+                    <a:lumMod val="50000"/>
+                  </a:schemeClr>
+                </a:solidFill>
+                <a:effectLst/>
+                <a:latin typeface="+mn-lt"/>
+              </a:rPr>
+              <a:t>Include variables that represent real, identifiable sources of systematic variation that should be accounted for while estimating the biological effect of interest. </a:t>
+            </a:r>
+          </a:p>
+          <a:p>
+            <a:endParaRPr lang="en-IT" b="1" i="1" dirty="0">
+              <a:solidFill>
+                <a:schemeClr val="bg1">
+                  <a:lumMod val="50000"/>
+                </a:schemeClr>
+              </a:solidFill>
+            </a:endParaRPr>
+          </a:p>
+          <a:p>
+            <a:r>
+              <a:rPr lang="en-IT" sz="1800" b="1" i="1" dirty="0">
+                <a:solidFill>
+                  <a:schemeClr val="bg1">
+                    <a:lumMod val="50000"/>
+                  </a:schemeClr>
+                </a:solidFill>
+                <a:effectLst/>
+                <a:latin typeface="+mn-lt"/>
+              </a:rPr>
+              <a:t>!!!Do not add columns simply because they exist in the metadata!!!</a:t>
+            </a:r>
+            <a:endParaRPr lang="en-GB" i="1" dirty="0">
+              <a:solidFill>
+                <a:schemeClr val="bg1">
+                  <a:lumMod val="50000"/>
+                </a:schemeClr>
+              </a:solidFill>
+            </a:endParaRPr>
+          </a:p>
+        </p:txBody>
+      </p:sp>
+    </p:spTree>
+    <p:extLst>
+      <p:ext uri="{BB962C8B-B14F-4D97-AF65-F5344CB8AC3E}">
+        <p14:creationId xmlns:p14="http://schemas.microsoft.com/office/powerpoint/2010/main" val="2210901823"/>
+      </p:ext>
+    </p:extLst>
+  </p:cSld>
+  <p:clrMapOvr>
+    <a:masterClrMapping/>
+  </p:clrMapOvr>
+</p:sld>
+</file>
+
+<file path=ppt/slides/slide25.xml><?xml version="1.0" encoding="utf-8"?>
+<p:sld xmlns:a="http://schemas.openxmlformats.org/drawingml/2006/main" xmlns:r="http://schemas.openxmlformats.org/officeDocument/2006/relationships" xmlns:p="http://schemas.openxmlformats.org/presentationml/2006/main">
+  <p:cSld>
+    <p:spTree>
+      <p:nvGrpSpPr>
+        <p:cNvPr id="1" name=""/>
+        <p:cNvGrpSpPr/>
+        <p:nvPr/>
+      </p:nvGrpSpPr>
+      <p:grpSpPr>
+        <a:xfrm>
+          <a:off x="0" y="0"/>
+          <a:ext cx="0" cy="0"/>
+          <a:chOff x="0" y="0"/>
+          <a:chExt cx="0" cy="0"/>
+        </a:xfrm>
+      </p:grpSpPr>
+      <p:sp>
+        <p:nvSpPr>
+          <p:cNvPr id="2" name="Title 1">
+            <a:extLst>
+              <a:ext uri="{FF2B5EF4-FFF2-40B4-BE49-F238E27FC236}">
+                <a16:creationId xmlns:a16="http://schemas.microsoft.com/office/drawing/2014/main" id="{09A075BF-B93A-0183-CFA1-0D3132D5A2C9}"/>
+              </a:ext>
+            </a:extLst>
+          </p:cNvPr>
+          <p:cNvSpPr>
+            <a:spLocks noGrp="1"/>
+          </p:cNvSpPr>
+          <p:nvPr>
+            <p:ph type="title"/>
+          </p:nvPr>
+        </p:nvSpPr>
+        <p:spPr/>
+        <p:txBody>
+          <a:bodyPr>
+            <a:normAutofit fontScale="90000"/>
+          </a:bodyPr>
+          <a:lstStyle/>
+          <a:p>
+            <a:r>
+              <a:rPr lang="en-GB" b="1" dirty="0"/>
+              <a:t>Evaluate sample concordance through PCA</a:t>
+            </a:r>
+          </a:p>
+        </p:txBody>
+      </p:sp>
+      <p:sp>
+        <p:nvSpPr>
+          <p:cNvPr id="4" name="Date Placeholder 3">
+            <a:extLst>
+              <a:ext uri="{FF2B5EF4-FFF2-40B4-BE49-F238E27FC236}">
+                <a16:creationId xmlns:a16="http://schemas.microsoft.com/office/drawing/2014/main" id="{D6EF6D9E-86F6-6583-92A7-C72AF854D662}"/>
+              </a:ext>
+            </a:extLst>
+          </p:cNvPr>
+          <p:cNvSpPr>
+            <a:spLocks noGrp="1"/>
+          </p:cNvSpPr>
+          <p:nvPr>
+            <p:ph type="dt" sz="half" idx="10"/>
+          </p:nvPr>
+        </p:nvSpPr>
+        <p:spPr/>
+        <p:txBody>
+          <a:bodyPr/>
+          <a:lstStyle/>
+          <a:p>
+            <a:fld id="{761DFEEA-1162-B343-ACBF-B3E92F6AC390}" type="datetime1">
+              <a:rPr lang="it-IT" smtClean="0"/>
+              <a:t>25/09/26</a:t>
+            </a:fld>
+            <a:endParaRPr lang="en-GB"/>
+          </a:p>
+        </p:txBody>
+      </p:sp>
+      <p:sp>
+        <p:nvSpPr>
+          <p:cNvPr id="5" name="Footer Placeholder 4">
+            <a:extLst>
+              <a:ext uri="{FF2B5EF4-FFF2-40B4-BE49-F238E27FC236}">
+                <a16:creationId xmlns:a16="http://schemas.microsoft.com/office/drawing/2014/main" id="{27C9E8D3-24F6-F712-A44C-DE33B11678E2}"/>
+              </a:ext>
+            </a:extLst>
+          </p:cNvPr>
+          <p:cNvSpPr>
+            <a:spLocks noGrp="1"/>
+          </p:cNvSpPr>
+          <p:nvPr>
+            <p:ph type="ftr" sz="quarter" idx="11"/>
+          </p:nvPr>
+        </p:nvSpPr>
+        <p:spPr/>
+        <p:txBody>
+          <a:bodyPr/>
+          <a:lstStyle/>
+          <a:p>
+            <a:r>
+              <a:rPr lang="en-GB"/>
+              <a:t>Day 1: Reproducible NGS Data Analysis on Personal Laptops</a:t>
+            </a:r>
+          </a:p>
+        </p:txBody>
+      </p:sp>
+      <p:sp>
+        <p:nvSpPr>
+          <p:cNvPr id="6" name="Slide Number Placeholder 5">
+            <a:extLst>
+              <a:ext uri="{FF2B5EF4-FFF2-40B4-BE49-F238E27FC236}">
+                <a16:creationId xmlns:a16="http://schemas.microsoft.com/office/drawing/2014/main" id="{D227591B-349A-C273-991C-ABFD1B268642}"/>
+              </a:ext>
+            </a:extLst>
+          </p:cNvPr>
+          <p:cNvSpPr>
+            <a:spLocks noGrp="1"/>
+          </p:cNvSpPr>
+          <p:nvPr>
+            <p:ph type="sldNum" sz="quarter" idx="12"/>
+          </p:nvPr>
+        </p:nvSpPr>
+        <p:spPr/>
+        <p:txBody>
+          <a:bodyPr/>
+          <a:lstStyle/>
+          <a:p>
+            <a:fld id="{62E92BA6-6E87-3343-8D2C-B7A656D628E4}" type="slidenum">
+              <a:rPr lang="en-GB" smtClean="0"/>
+              <a:t>24</a:t>
+            </a:fld>
+            <a:endParaRPr lang="en-GB"/>
+          </a:p>
+        </p:txBody>
+      </p:sp>
+      <p:sp>
+        <p:nvSpPr>
+          <p:cNvPr id="10" name="TextBox 9">
+            <a:extLst>
+              <a:ext uri="{FF2B5EF4-FFF2-40B4-BE49-F238E27FC236}">
+                <a16:creationId xmlns:a16="http://schemas.microsoft.com/office/drawing/2014/main" id="{FD7DACFD-3BAD-E47C-9495-876072B72EE4}"/>
+              </a:ext>
+            </a:extLst>
+          </p:cNvPr>
+          <p:cNvSpPr txBox="1"/>
+          <p:nvPr/>
+        </p:nvSpPr>
+        <p:spPr>
+          <a:xfrm>
+            <a:off x="134470" y="963428"/>
+            <a:ext cx="11234057" cy="707886"/>
+          </a:xfrm>
+          <a:prstGeom prst="rect">
+            <a:avLst/>
+          </a:prstGeom>
+          <a:noFill/>
+        </p:spPr>
+        <p:txBody>
+          <a:bodyPr wrap="square">
+            <a:spAutoFit/>
+          </a:bodyPr>
+          <a:lstStyle/>
+          <a:p>
+            <a:r>
+              <a:rPr lang="en-IT" sz="2000" b="0" i="0" dirty="0">
+                <a:solidFill>
+                  <a:schemeClr val="tx1"/>
+                </a:solidFill>
+                <a:effectLst/>
+                <a:latin typeface="+mn-lt"/>
+              </a:rPr>
+              <a:t>Before testing genes one by one, we should first ask whether the </a:t>
+            </a:r>
+            <a:r>
+              <a:rPr lang="en-IT" sz="2000" b="1" i="0" dirty="0">
+                <a:solidFill>
+                  <a:schemeClr val="tx1"/>
+                </a:solidFill>
+                <a:effectLst/>
+                <a:latin typeface="+mn-lt"/>
+              </a:rPr>
+              <a:t>samples themselves</a:t>
+            </a:r>
+            <a:r>
+              <a:rPr lang="en-IT" sz="2000" b="0" i="0" dirty="0">
+                <a:solidFill>
+                  <a:schemeClr val="tx1"/>
+                </a:solidFill>
+                <a:effectLst/>
+                <a:latin typeface="+mn-lt"/>
+              </a:rPr>
+              <a:t> behave as expected.</a:t>
+            </a:r>
+            <a:endParaRPr lang="en-GB" sz="2000" dirty="0"/>
+          </a:p>
+        </p:txBody>
+      </p:sp>
+      <p:sp>
+        <p:nvSpPr>
+          <p:cNvPr id="12" name="TextBox 11">
+            <a:extLst>
+              <a:ext uri="{FF2B5EF4-FFF2-40B4-BE49-F238E27FC236}">
+                <a16:creationId xmlns:a16="http://schemas.microsoft.com/office/drawing/2014/main" id="{9F82043D-909B-236C-AEC2-082AE01EF78D}"/>
+              </a:ext>
+            </a:extLst>
+          </p:cNvPr>
+          <p:cNvSpPr txBox="1"/>
+          <p:nvPr/>
+        </p:nvSpPr>
+        <p:spPr>
+          <a:xfrm>
+            <a:off x="134470" y="2095983"/>
+            <a:ext cx="11421134" cy="3477875"/>
+          </a:xfrm>
+          <a:prstGeom prst="rect">
+            <a:avLst/>
+          </a:prstGeom>
+          <a:noFill/>
+          <a:ln>
+            <a:solidFill>
+              <a:schemeClr val="tx1"/>
+            </a:solidFill>
+          </a:ln>
+        </p:spPr>
+        <p:txBody>
+          <a:bodyPr wrap="square">
+            <a:spAutoFit/>
+          </a:bodyPr>
+          <a:lstStyle/>
+          <a:p>
+            <a:r>
+              <a:rPr lang="en-IT" sz="2000" dirty="0"/>
+              <a:t>Principal component analysis (PCA) is widely used because it is </a:t>
+            </a:r>
+            <a:r>
+              <a:rPr lang="en-IT" sz="2000" b="1" dirty="0"/>
+              <a:t>unsupervised</a:t>
+            </a:r>
+            <a:r>
+              <a:rPr lang="en-IT" sz="2000" dirty="0"/>
+              <a:t>: it does not know the sample labels. It simply identifies the major directions of variation across the expression profiles.</a:t>
+            </a:r>
+          </a:p>
+          <a:p>
+            <a:endParaRPr lang="en-IT" sz="2000" dirty="0"/>
+          </a:p>
+          <a:p>
+            <a:r>
+              <a:rPr lang="en-IT" sz="2000" dirty="0"/>
+              <a:t>PCA can be computed by </a:t>
+            </a:r>
+            <a:r>
+              <a:rPr lang="en-IT" sz="2000" b="1" dirty="0"/>
+              <a:t>singular value decomposition (SVD)</a:t>
+            </a:r>
+            <a:r>
+              <a:rPr lang="en-IT" sz="2000" dirty="0"/>
+              <a:t>. </a:t>
+            </a:r>
+          </a:p>
+          <a:p>
+            <a:endParaRPr lang="en-IT" sz="2000" dirty="0"/>
+          </a:p>
+          <a:p>
+            <a:r>
+              <a:rPr lang="en-IT" sz="2000" dirty="0"/>
+              <a:t>SVD decomposes a numerical matrix into components; when applied to a </a:t>
+            </a:r>
+            <a:r>
+              <a:rPr lang="en-IT" sz="2000" b="1" dirty="0"/>
+              <a:t>centered</a:t>
+            </a:r>
+            <a:r>
+              <a:rPr lang="en-IT" sz="2000" dirty="0"/>
+              <a:t> matrix, these components define the principal components.</a:t>
+            </a:r>
+          </a:p>
+          <a:p>
+            <a:endParaRPr lang="en-IT" sz="2000" dirty="0"/>
+          </a:p>
+          <a:p>
+            <a:r>
+              <a:rPr lang="en-IT" sz="2000" b="1" dirty="0"/>
+              <a:t>PC1 captures the largest variation, PC2 the largest remaining variation, and so on.</a:t>
+            </a:r>
+            <a:r>
+              <a:rPr lang="en-IT" sz="2000" dirty="0"/>
+              <a:t> Samples with similar expression profiles cluster together, while unexpected separation can reveal batch effects, technical problems or potential outliers.</a:t>
+            </a:r>
+          </a:p>
+        </p:txBody>
+      </p:sp>
+    </p:spTree>
+    <p:extLst>
+      <p:ext uri="{BB962C8B-B14F-4D97-AF65-F5344CB8AC3E}">
+        <p14:creationId xmlns:p14="http://schemas.microsoft.com/office/powerpoint/2010/main" val="2935389149"/>
+      </p:ext>
+    </p:extLst>
+  </p:cSld>
+  <p:clrMapOvr>
+    <a:masterClrMapping/>
+  </p:clrMapOvr>
+</p:sld>
+</file>
+
+<file path=ppt/slides/slide26.xml><?xml version="1.0" encoding="utf-8"?>
+<p:sld xmlns:a="http://schemas.openxmlformats.org/drawingml/2006/main" xmlns:r="http://schemas.openxmlformats.org/officeDocument/2006/relationships" xmlns:p="http://schemas.openxmlformats.org/presentationml/2006/main">
+  <p:cSld>
+    <p:spTree>
+      <p:nvGrpSpPr>
+        <p:cNvPr id="1" name="">
+          <a:extLst>
+            <a:ext uri="{FF2B5EF4-FFF2-40B4-BE49-F238E27FC236}">
+              <a16:creationId xmlns:a16="http://schemas.microsoft.com/office/drawing/2014/main" id="{B039364D-F93A-7EC3-6306-D1A8D99690F3}"/>
+            </a:ext>
+          </a:extLst>
+        </p:cNvPr>
+        <p:cNvGrpSpPr/>
+        <p:nvPr/>
+      </p:nvGrpSpPr>
+      <p:grpSpPr>
+        <a:xfrm>
+          <a:off x="0" y="0"/>
+          <a:ext cx="0" cy="0"/>
+          <a:chOff x="0" y="0"/>
+          <a:chExt cx="0" cy="0"/>
+        </a:xfrm>
+      </p:grpSpPr>
+      <p:sp>
+        <p:nvSpPr>
+          <p:cNvPr id="2" name="Title 1">
+            <a:extLst>
+              <a:ext uri="{FF2B5EF4-FFF2-40B4-BE49-F238E27FC236}">
+                <a16:creationId xmlns:a16="http://schemas.microsoft.com/office/drawing/2014/main" id="{783F3FDE-BE0E-51A4-3828-968ADDB17A82}"/>
+              </a:ext>
+            </a:extLst>
+          </p:cNvPr>
+          <p:cNvSpPr>
+            <a:spLocks noGrp="1"/>
+          </p:cNvSpPr>
+          <p:nvPr>
+            <p:ph type="title"/>
+          </p:nvPr>
+        </p:nvSpPr>
+        <p:spPr/>
+        <p:txBody>
+          <a:bodyPr>
+            <a:normAutofit fontScale="90000"/>
+          </a:bodyPr>
+          <a:lstStyle/>
+          <a:p>
+            <a:r>
+              <a:rPr lang="en-GB" b="1" dirty="0"/>
+              <a:t>Evaluate sample concordance through PCA</a:t>
+            </a:r>
+          </a:p>
+        </p:txBody>
+      </p:sp>
+      <p:sp>
+        <p:nvSpPr>
+          <p:cNvPr id="4" name="Date Placeholder 3">
+            <a:extLst>
+              <a:ext uri="{FF2B5EF4-FFF2-40B4-BE49-F238E27FC236}">
+                <a16:creationId xmlns:a16="http://schemas.microsoft.com/office/drawing/2014/main" id="{F3C7E28A-B6CF-CD57-CE77-06D08B5C8067}"/>
+              </a:ext>
+            </a:extLst>
+          </p:cNvPr>
+          <p:cNvSpPr>
+            <a:spLocks noGrp="1"/>
+          </p:cNvSpPr>
+          <p:nvPr>
+            <p:ph type="dt" sz="half" idx="10"/>
+          </p:nvPr>
+        </p:nvSpPr>
+        <p:spPr/>
+        <p:txBody>
+          <a:bodyPr/>
+          <a:lstStyle/>
+          <a:p>
+            <a:fld id="{761DFEEA-1162-B343-ACBF-B3E92F6AC390}" type="datetime1">
+              <a:rPr lang="it-IT" smtClean="0"/>
+              <a:t>25/09/26</a:t>
+            </a:fld>
+            <a:endParaRPr lang="en-GB"/>
+          </a:p>
+        </p:txBody>
+      </p:sp>
+      <p:sp>
+        <p:nvSpPr>
+          <p:cNvPr id="5" name="Footer Placeholder 4">
+            <a:extLst>
+              <a:ext uri="{FF2B5EF4-FFF2-40B4-BE49-F238E27FC236}">
+                <a16:creationId xmlns:a16="http://schemas.microsoft.com/office/drawing/2014/main" id="{7B36A149-9FAA-B3B4-ADAB-BDEA44220E4F}"/>
+              </a:ext>
+            </a:extLst>
+          </p:cNvPr>
+          <p:cNvSpPr>
+            <a:spLocks noGrp="1"/>
+          </p:cNvSpPr>
+          <p:nvPr>
+            <p:ph type="ftr" sz="quarter" idx="11"/>
+          </p:nvPr>
+        </p:nvSpPr>
+        <p:spPr/>
+        <p:txBody>
+          <a:bodyPr/>
+          <a:lstStyle/>
+          <a:p>
+            <a:r>
+              <a:rPr lang="en-GB"/>
+              <a:t>Day 1: Reproducible NGS Data Analysis on Personal Laptops</a:t>
+            </a:r>
+          </a:p>
+        </p:txBody>
+      </p:sp>
+      <p:sp>
+        <p:nvSpPr>
+          <p:cNvPr id="6" name="Slide Number Placeholder 5">
+            <a:extLst>
+              <a:ext uri="{FF2B5EF4-FFF2-40B4-BE49-F238E27FC236}">
+                <a16:creationId xmlns:a16="http://schemas.microsoft.com/office/drawing/2014/main" id="{4C4BCF54-C0DD-BE99-2659-0B58A920538B}"/>
+              </a:ext>
+            </a:extLst>
+          </p:cNvPr>
+          <p:cNvSpPr>
+            <a:spLocks noGrp="1"/>
+          </p:cNvSpPr>
+          <p:nvPr>
+            <p:ph type="sldNum" sz="quarter" idx="12"/>
+          </p:nvPr>
+        </p:nvSpPr>
+        <p:spPr/>
+        <p:txBody>
+          <a:bodyPr/>
+          <a:lstStyle/>
+          <a:p>
+            <a:fld id="{62E92BA6-6E87-3343-8D2C-B7A656D628E4}" type="slidenum">
+              <a:rPr lang="en-GB" smtClean="0"/>
+              <a:t>25</a:t>
+            </a:fld>
+            <a:endParaRPr lang="en-GB"/>
+          </a:p>
+        </p:txBody>
+      </p:sp>
+      <p:sp>
+        <p:nvSpPr>
+          <p:cNvPr id="10" name="TextBox 9">
+            <a:extLst>
+              <a:ext uri="{FF2B5EF4-FFF2-40B4-BE49-F238E27FC236}">
+                <a16:creationId xmlns:a16="http://schemas.microsoft.com/office/drawing/2014/main" id="{6559280A-2DDF-9394-049D-63BD3A8DF6B9}"/>
+              </a:ext>
+            </a:extLst>
+          </p:cNvPr>
+          <p:cNvSpPr txBox="1"/>
+          <p:nvPr/>
+        </p:nvSpPr>
+        <p:spPr>
+          <a:xfrm>
+            <a:off x="134470" y="963428"/>
+            <a:ext cx="11234057" cy="707886"/>
+          </a:xfrm>
+          <a:prstGeom prst="rect">
+            <a:avLst/>
+          </a:prstGeom>
+          <a:noFill/>
+        </p:spPr>
+        <p:txBody>
+          <a:bodyPr wrap="square">
+            <a:spAutoFit/>
+          </a:bodyPr>
+          <a:lstStyle/>
+          <a:p>
+            <a:r>
+              <a:rPr lang="en-IT" sz="2000" b="0" i="0" dirty="0">
+                <a:solidFill>
+                  <a:schemeClr val="tx1"/>
+                </a:solidFill>
+                <a:effectLst/>
+                <a:latin typeface="+mn-lt"/>
+              </a:rPr>
+              <a:t>Before testing genes one by one, we should first ask whether the </a:t>
+            </a:r>
+            <a:r>
+              <a:rPr lang="en-IT" sz="2000" b="1" i="0" dirty="0">
+                <a:solidFill>
+                  <a:schemeClr val="tx1"/>
+                </a:solidFill>
+                <a:effectLst/>
+                <a:latin typeface="+mn-lt"/>
+              </a:rPr>
+              <a:t>samples themselves</a:t>
+            </a:r>
+            <a:r>
+              <a:rPr lang="en-IT" sz="2000" b="0" i="0" dirty="0">
+                <a:solidFill>
+                  <a:schemeClr val="tx1"/>
+                </a:solidFill>
+                <a:effectLst/>
+                <a:latin typeface="+mn-lt"/>
+              </a:rPr>
+              <a:t> behave as expected.</a:t>
+            </a:r>
+            <a:endParaRPr lang="en-GB" sz="2000" dirty="0"/>
+          </a:p>
+        </p:txBody>
+      </p:sp>
+      <p:sp>
+        <p:nvSpPr>
+          <p:cNvPr id="14" name="TextBox 13">
+            <a:extLst>
+              <a:ext uri="{FF2B5EF4-FFF2-40B4-BE49-F238E27FC236}">
+                <a16:creationId xmlns:a16="http://schemas.microsoft.com/office/drawing/2014/main" id="{767C5B23-D330-03FA-0CC0-1FD2631D5351}"/>
+              </a:ext>
+            </a:extLst>
+          </p:cNvPr>
+          <p:cNvSpPr txBox="1"/>
+          <p:nvPr/>
+        </p:nvSpPr>
+        <p:spPr>
+          <a:xfrm>
+            <a:off x="134470" y="1924254"/>
+            <a:ext cx="8018930" cy="3970318"/>
+          </a:xfrm>
+          <a:prstGeom prst="rect">
+            <a:avLst/>
+          </a:prstGeom>
+          <a:noFill/>
+          <a:ln>
+            <a:solidFill>
+              <a:schemeClr val="tx1"/>
+            </a:solidFill>
+          </a:ln>
+        </p:spPr>
+        <p:txBody>
+          <a:bodyPr wrap="square">
+            <a:spAutoFit/>
+          </a:bodyPr>
+          <a:lstStyle/>
+          <a:p>
+            <a:pPr>
+              <a:buNone/>
+            </a:pPr>
+            <a:r>
+              <a:rPr lang="en-IT" dirty="0"/>
+              <a:t>Mathematically, each sample can be represented as a </a:t>
+            </a:r>
+            <a:r>
+              <a:rPr lang="en-IT" b="1" dirty="0"/>
+              <a:t>vector in a space with one dimension per gene</a:t>
+            </a:r>
+            <a:r>
+              <a:rPr lang="en-IT" dirty="0"/>
+              <a:t>. With thousands of genes, this space has thousands of dimensions.</a:t>
+            </a:r>
+          </a:p>
+          <a:p>
+            <a:pPr>
+              <a:buNone/>
+            </a:pPr>
+            <a:endParaRPr lang="en-IT" dirty="0"/>
+          </a:p>
+          <a:p>
+            <a:pPr>
+              <a:buNone/>
+            </a:pPr>
+            <a:r>
+              <a:rPr lang="en-IT" dirty="0"/>
+              <a:t>Because many genes vary together, much of the data lies close to a </a:t>
+            </a:r>
+            <a:r>
+              <a:rPr lang="en-IT" b="1" dirty="0"/>
+              <a:t>lower-dimensional subspace</a:t>
+            </a:r>
+            <a:r>
+              <a:rPr lang="en-IT" dirty="0"/>
+              <a:t> rather than filling the whole space. PCA finds the orthogonal directions that best describe this structure.</a:t>
+            </a:r>
+          </a:p>
+          <a:p>
+            <a:pPr>
+              <a:buNone/>
+            </a:pPr>
+            <a:endParaRPr lang="en-IT" dirty="0"/>
+          </a:p>
+          <a:p>
+            <a:pPr>
+              <a:buNone/>
+            </a:pPr>
+            <a:r>
+              <a:rPr lang="en-IT" dirty="0"/>
+              <a:t>Each sample is then </a:t>
+            </a:r>
+            <a:r>
+              <a:rPr lang="en-IT" b="1" dirty="0"/>
+              <a:t>projected onto these directions</a:t>
+            </a:r>
+            <a:r>
+              <a:rPr lang="en-IT" dirty="0"/>
+              <a:t>. The projection coordinates are the </a:t>
+            </a:r>
+            <a:r>
+              <a:rPr lang="en-IT" b="1" dirty="0"/>
+              <a:t>PC scores</a:t>
+            </a:r>
+            <a:r>
+              <a:rPr lang="en-IT" dirty="0"/>
+              <a:t>, while the contribution of each gene to a component is described by its </a:t>
+            </a:r>
+            <a:r>
+              <a:rPr lang="en-IT" b="1" dirty="0"/>
+              <a:t>loading</a:t>
+            </a:r>
+            <a:r>
+              <a:rPr lang="en-IT" dirty="0"/>
+              <a:t>.</a:t>
+            </a:r>
+          </a:p>
+          <a:p>
+            <a:pPr>
+              <a:buNone/>
+            </a:pPr>
+            <a:endParaRPr lang="en-IT" dirty="0"/>
+          </a:p>
+          <a:p>
+            <a:pPr>
+              <a:buNone/>
+            </a:pPr>
+            <a:r>
+              <a:rPr lang="en-IT" dirty="0"/>
+              <a:t>So PCA simplifies:</a:t>
+            </a:r>
+          </a:p>
+          <a:p>
+            <a:pPr>
+              <a:buNone/>
+            </a:pPr>
+            <a:r>
+              <a:rPr lang="en-IT" b="1" dirty="0"/>
+              <a:t>thousands of gene dimensions → a few major directions of variation</a:t>
+            </a:r>
+            <a:r>
+              <a:rPr lang="en-IT" dirty="0"/>
+              <a:t>.</a:t>
+            </a:r>
+          </a:p>
+        </p:txBody>
+      </p:sp>
+      <p:pic>
+        <p:nvPicPr>
+          <p:cNvPr id="3" name="Picture 2">
+            <a:extLst>
+              <a:ext uri="{FF2B5EF4-FFF2-40B4-BE49-F238E27FC236}">
+                <a16:creationId xmlns:a16="http://schemas.microsoft.com/office/drawing/2014/main" id="{721AA47F-9E26-7512-A01B-CA52EF5E83BD}"/>
+              </a:ext>
+            </a:extLst>
+          </p:cNvPr>
+          <p:cNvPicPr>
+            <a:picLocks noChangeAspect="1"/>
+          </p:cNvPicPr>
+          <p:nvPr/>
+        </p:nvPicPr>
+        <p:blipFill>
+          <a:blip r:embed="rId2"/>
+          <a:stretch>
+            <a:fillRect/>
+          </a:stretch>
+        </p:blipFill>
+        <p:spPr>
+          <a:xfrm>
+            <a:off x="8346485" y="2134031"/>
+            <a:ext cx="3550763" cy="3550763"/>
+          </a:xfrm>
+          <a:prstGeom prst="rect">
+            <a:avLst/>
+          </a:prstGeom>
+        </p:spPr>
+      </p:pic>
+    </p:spTree>
+    <p:extLst>
+      <p:ext uri="{BB962C8B-B14F-4D97-AF65-F5344CB8AC3E}">
+        <p14:creationId xmlns:p14="http://schemas.microsoft.com/office/powerpoint/2010/main" val="18129326"/>
+      </p:ext>
+    </p:extLst>
+  </p:cSld>
+  <p:clrMapOvr>
+    <a:masterClrMapping/>
+  </p:clrMapOvr>
+</p:sld>
+</file>
+
+<file path=ppt/slides/slide27.xml><?xml version="1.0" encoding="utf-8"?>
+<p:sld xmlns:a="http://schemas.openxmlformats.org/drawingml/2006/main" xmlns:r="http://schemas.openxmlformats.org/officeDocument/2006/relationships" xmlns:p="http://schemas.openxmlformats.org/presentationml/2006/main">
+  <p:cSld>
+    <p:spTree>
+      <p:nvGrpSpPr>
+        <p:cNvPr id="1" name=""/>
+        <p:cNvGrpSpPr/>
+        <p:nvPr/>
+      </p:nvGrpSpPr>
+      <p:grpSpPr>
+        <a:xfrm>
+          <a:off x="0" y="0"/>
+          <a:ext cx="0" cy="0"/>
+          <a:chOff x="0" y="0"/>
+          <a:chExt cx="0" cy="0"/>
+        </a:xfrm>
+      </p:grpSpPr>
+      <p:sp>
+        <p:nvSpPr>
+          <p:cNvPr id="4" name="Date Placeholder 3">
+            <a:extLst>
+              <a:ext uri="{FF2B5EF4-FFF2-40B4-BE49-F238E27FC236}">
+                <a16:creationId xmlns:a16="http://schemas.microsoft.com/office/drawing/2014/main" id="{CE447C8B-7A89-C06F-95BA-C6688CD53FD6}"/>
+              </a:ext>
+            </a:extLst>
+          </p:cNvPr>
+          <p:cNvSpPr>
+            <a:spLocks noGrp="1"/>
+          </p:cNvSpPr>
+          <p:nvPr>
+            <p:ph type="dt" sz="half" idx="10"/>
+          </p:nvPr>
+        </p:nvSpPr>
+        <p:spPr/>
+        <p:txBody>
+          <a:bodyPr/>
+          <a:lstStyle/>
+          <a:p>
+            <a:fld id="{761DFEEA-1162-B343-ACBF-B3E92F6AC390}" type="datetime1">
+              <a:rPr lang="it-IT" smtClean="0"/>
+              <a:t>25/09/26</a:t>
+            </a:fld>
+            <a:endParaRPr lang="en-GB"/>
+          </a:p>
+        </p:txBody>
+      </p:sp>
+      <p:sp>
+        <p:nvSpPr>
+          <p:cNvPr id="5" name="Footer Placeholder 4">
+            <a:extLst>
+              <a:ext uri="{FF2B5EF4-FFF2-40B4-BE49-F238E27FC236}">
+                <a16:creationId xmlns:a16="http://schemas.microsoft.com/office/drawing/2014/main" id="{999CE63F-0A25-D702-C396-CFC003E83A21}"/>
+              </a:ext>
+            </a:extLst>
+          </p:cNvPr>
+          <p:cNvSpPr>
+            <a:spLocks noGrp="1"/>
+          </p:cNvSpPr>
+          <p:nvPr>
+            <p:ph type="ftr" sz="quarter" idx="11"/>
+          </p:nvPr>
+        </p:nvSpPr>
+        <p:spPr/>
+        <p:txBody>
+          <a:bodyPr/>
+          <a:lstStyle/>
+          <a:p>
+            <a:r>
+              <a:rPr lang="en-GB"/>
+              <a:t>Day 1: Reproducible NGS Data Analysis on Personal Laptops</a:t>
+            </a:r>
+          </a:p>
+        </p:txBody>
+      </p:sp>
+      <p:sp>
+        <p:nvSpPr>
+          <p:cNvPr id="6" name="Slide Number Placeholder 5">
+            <a:extLst>
+              <a:ext uri="{FF2B5EF4-FFF2-40B4-BE49-F238E27FC236}">
+                <a16:creationId xmlns:a16="http://schemas.microsoft.com/office/drawing/2014/main" id="{C7F63183-F08D-B75F-1323-D0B29B21EF6C}"/>
+              </a:ext>
+            </a:extLst>
+          </p:cNvPr>
+          <p:cNvSpPr>
+            <a:spLocks noGrp="1"/>
+          </p:cNvSpPr>
+          <p:nvPr>
+            <p:ph type="sldNum" sz="quarter" idx="12"/>
+          </p:nvPr>
+        </p:nvSpPr>
+        <p:spPr/>
+        <p:txBody>
+          <a:bodyPr/>
+          <a:lstStyle/>
+          <a:p>
+            <a:fld id="{62E92BA6-6E87-3343-8D2C-B7A656D628E4}" type="slidenum">
+              <a:rPr lang="en-GB" smtClean="0"/>
+              <a:t>26</a:t>
+            </a:fld>
+            <a:endParaRPr lang="en-GB"/>
+          </a:p>
+        </p:txBody>
+      </p:sp>
+      <p:sp>
+        <p:nvSpPr>
+          <p:cNvPr id="7" name="TextBox 6">
+            <a:extLst>
+              <a:ext uri="{FF2B5EF4-FFF2-40B4-BE49-F238E27FC236}">
+                <a16:creationId xmlns:a16="http://schemas.microsoft.com/office/drawing/2014/main" id="{6E194FF5-AF0A-A891-7251-773732DF96C4}"/>
+              </a:ext>
+            </a:extLst>
+          </p:cNvPr>
+          <p:cNvSpPr txBox="1"/>
+          <p:nvPr/>
+        </p:nvSpPr>
+        <p:spPr>
+          <a:xfrm>
+            <a:off x="3463331" y="2228671"/>
+            <a:ext cx="5265337" cy="1200329"/>
+          </a:xfrm>
+          <a:prstGeom prst="rect">
+            <a:avLst/>
+          </a:prstGeom>
+          <a:solidFill>
+            <a:schemeClr val="bg1"/>
+          </a:solidFill>
+          <a:ln>
+            <a:solidFill>
+              <a:schemeClr val="tx1"/>
+            </a:solidFill>
+          </a:ln>
+        </p:spPr>
+        <p:txBody>
+          <a:bodyPr wrap="square">
+            <a:spAutoFit/>
+          </a:bodyPr>
+          <a:lstStyle/>
+          <a:p>
+            <a:r>
+              <a:rPr lang="en-GB" dirty="0">
+                <a:solidFill>
+                  <a:srgbClr val="92D050"/>
+                </a:solidFill>
+                <a:latin typeface="Courier New" panose="02070309020205020404" pitchFamily="49" charset="0"/>
+                <a:cs typeface="Courier New" panose="02070309020205020404" pitchFamily="49" charset="0"/>
+              </a:rPr>
+              <a:t>docker run --rm \</a:t>
+            </a:r>
+          </a:p>
+          <a:p>
+            <a:r>
+              <a:rPr lang="en-GB" dirty="0">
+                <a:solidFill>
+                  <a:srgbClr val="92D050"/>
+                </a:solidFill>
+                <a:latin typeface="Courier New" panose="02070309020205020404" pitchFamily="49" charset="0"/>
+                <a:cs typeface="Courier New" panose="02070309020205020404" pitchFamily="49" charset="0"/>
+              </a:rPr>
+              <a:t>  --user "$(id -u):$(id -g)" \</a:t>
+            </a:r>
+          </a:p>
+          <a:p>
+            <a:r>
+              <a:rPr lang="en-GB" dirty="0">
+                <a:solidFill>
+                  <a:srgbClr val="92D050"/>
+                </a:solidFill>
+                <a:latin typeface="Courier New" panose="02070309020205020404" pitchFamily="49" charset="0"/>
+                <a:cs typeface="Courier New" panose="02070309020205020404" pitchFamily="49" charset="0"/>
+              </a:rPr>
+              <a:t>  -v "$PWD:/work" \</a:t>
+            </a:r>
+          </a:p>
+          <a:p>
+            <a:r>
+              <a:rPr lang="en-GB" dirty="0">
+                <a:solidFill>
+                  <a:srgbClr val="92D050"/>
+                </a:solidFill>
+                <a:latin typeface="Courier New" panose="02070309020205020404" pitchFamily="49" charset="0"/>
+                <a:cs typeface="Courier New" panose="02070309020205020404" pitchFamily="49" charset="0"/>
+              </a:rPr>
+              <a:t>  -w /work –it </a:t>
+            </a:r>
+            <a:r>
+              <a:rPr lang="en-GB" dirty="0" err="1">
+                <a:solidFill>
+                  <a:srgbClr val="92D050"/>
+                </a:solidFill>
+                <a:latin typeface="Courier New" panose="02070309020205020404" pitchFamily="49" charset="0"/>
+                <a:cs typeface="Courier New" panose="02070309020205020404" pitchFamily="49" charset="0"/>
+              </a:rPr>
+              <a:t>fgualdr</a:t>
+            </a:r>
+            <a:r>
+              <a:rPr lang="en-GB" dirty="0">
+                <a:solidFill>
+                  <a:srgbClr val="92D050"/>
+                </a:solidFill>
+                <a:latin typeface="Courier New" panose="02070309020205020404" pitchFamily="49" charset="0"/>
+                <a:cs typeface="Courier New" panose="02070309020205020404" pitchFamily="49" charset="0"/>
+              </a:rPr>
+              <a:t>/</a:t>
+            </a:r>
+            <a:r>
+              <a:rPr lang="en-GB" dirty="0" err="1">
+                <a:solidFill>
+                  <a:srgbClr val="92D050"/>
+                </a:solidFill>
+                <a:latin typeface="Courier New" panose="02070309020205020404" pitchFamily="49" charset="0"/>
+                <a:cs typeface="Courier New" panose="02070309020205020404" pitchFamily="49" charset="0"/>
+              </a:rPr>
+              <a:t>ngs</a:t>
+            </a:r>
+            <a:r>
+              <a:rPr lang="en-GB" dirty="0">
+                <a:solidFill>
+                  <a:srgbClr val="92D050"/>
+                </a:solidFill>
+                <a:latin typeface="Courier New" panose="02070309020205020404" pitchFamily="49" charset="0"/>
+                <a:cs typeface="Courier New" panose="02070309020205020404" pitchFamily="49" charset="0"/>
+              </a:rPr>
+              <a:t>-r-</a:t>
+            </a:r>
+            <a:r>
+              <a:rPr lang="en-GB" dirty="0" err="1">
+                <a:solidFill>
+                  <a:srgbClr val="92D050"/>
+                </a:solidFill>
+                <a:latin typeface="Courier New" panose="02070309020205020404" pitchFamily="49" charset="0"/>
+                <a:cs typeface="Courier New" panose="02070309020205020404" pitchFamily="49" charset="0"/>
+              </a:rPr>
+              <a:t>bioc</a:t>
+            </a:r>
+            <a:r>
+              <a:rPr lang="en-GB" dirty="0">
+                <a:solidFill>
+                  <a:srgbClr val="92D050"/>
+                </a:solidFill>
+                <a:latin typeface="Courier New" panose="02070309020205020404" pitchFamily="49" charset="0"/>
+                <a:cs typeface="Courier New" panose="02070309020205020404" pitchFamily="49" charset="0"/>
+              </a:rPr>
+              <a:t> R</a:t>
+            </a:r>
+          </a:p>
+        </p:txBody>
+      </p:sp>
+    </p:spTree>
+    <p:extLst>
+      <p:ext uri="{BB962C8B-B14F-4D97-AF65-F5344CB8AC3E}">
+        <p14:creationId xmlns:p14="http://schemas.microsoft.com/office/powerpoint/2010/main" val="2982866977"/>
+      </p:ext>
+    </p:extLst>
+  </p:cSld>
+  <p:clrMapOvr>
+    <a:masterClrMapping/>
+  </p:clrMapOvr>
+  <p:timing>
+    <p:tnLst>
+      <p:par>
+        <p:cTn id="1" dur="indefinite" restart="never" nodeType="tmRoot">
+          <p:childTnLst>
+            <p:seq concurrent="1" nextAc="seek">
+              <p:cTn id="2" dur="indefinite" nodeType="mainSeq">
+                <p:childTnLst>
+                  <p:par>
+                    <p:cTn id="3" fill="hold">
+                      <p:stCondLst>
+                        <p:cond delay="indefinite"/>
+                      </p:stCondLst>
+                      <p:childTnLst>
+                        <p:par>
+                          <p:cTn id="4" fill="hold">
+                            <p:stCondLst>
+                              <p:cond delay="0"/>
+                            </p:stCondLst>
+                            <p:childTnLst>
+                              <p:par>
+                                <p:cTn id="5" presetID="1" presetClass="entr" presetSubtype="0" fill="hold" grpId="0" nodeType="clickEffect">
+                                  <p:stCondLst>
+                                    <p:cond delay="0"/>
+                                  </p:stCondLst>
+                                  <p:childTnLst>
+                                    <p:set>
+                                      <p:cBhvr>
+                                        <p:cTn id="6" dur="1" fill="hold">
+                                          <p:stCondLst>
+                                            <p:cond delay="0"/>
+                                          </p:stCondLst>
+                                        </p:cTn>
+                                        <p:tgtEl>
+                                          <p:spTgt spid="7"/>
+                                        </p:tgtEl>
+                                        <p:attrNameLst>
+                                          <p:attrName>style.visibility</p:attrName>
+                                        </p:attrNameLst>
+                                      </p:cBhvr>
+                                      <p:to>
+                                        <p:strVal val="visible"/>
+                                      </p:to>
+                                    </p:set>
+                                  </p:childTnLst>
+                                </p:cTn>
+                              </p:par>
+                            </p:childTnLst>
+                          </p:cTn>
+                        </p:par>
+                      </p:childTnLst>
+                    </p:cTn>
+                  </p:par>
+                </p:childTnLst>
+              </p:cTn>
+              <p:prevCondLst>
+                <p:cond evt="onPrev" delay="0">
+                  <p:tgtEl>
+                    <p:sldTgt/>
+                  </p:tgtEl>
+                </p:cond>
+              </p:prevCondLst>
+              <p:nextCondLst>
+                <p:cond evt="onNext" delay="0">
+                  <p:tgtEl>
+                    <p:sldTgt/>
+                  </p:tgtEl>
+                </p:cond>
+              </p:nextCondLst>
+            </p:seq>
+          </p:childTnLst>
+        </p:cTn>
+      </p:par>
+    </p:tnLst>
+    <p:bldLst>
+      <p:bldP spid="7" grpId="0" animBg="1"/>
+    </p:bldLst>
+  </p:timing>
+</p:sld>
+</file>
+
+<file path=ppt/slides/slide28.xml><?xml version="1.0" encoding="utf-8"?>
+<p:sld xmlns:a="http://schemas.openxmlformats.org/drawingml/2006/main" xmlns:r="http://schemas.openxmlformats.org/officeDocument/2006/relationships" xmlns:p="http://schemas.openxmlformats.org/presentationml/2006/main">
+  <p:cSld>
+    <p:spTree>
+      <p:nvGrpSpPr>
+        <p:cNvPr id="1" name=""/>
+        <p:cNvGrpSpPr/>
+        <p:nvPr/>
+      </p:nvGrpSpPr>
+      <p:grpSpPr>
+        <a:xfrm>
+          <a:off x="0" y="0"/>
+          <a:ext cx="0" cy="0"/>
+          <a:chOff x="0" y="0"/>
+          <a:chExt cx="0" cy="0"/>
+        </a:xfrm>
+      </p:grpSpPr>
+      <p:sp>
+        <p:nvSpPr>
+          <p:cNvPr id="2" name="Title 1">
+            <a:extLst>
+              <a:ext uri="{FF2B5EF4-FFF2-40B4-BE49-F238E27FC236}">
+                <a16:creationId xmlns:a16="http://schemas.microsoft.com/office/drawing/2014/main" id="{B734227A-B1D2-1C44-D277-FDEFFB545EC5}"/>
+              </a:ext>
+            </a:extLst>
+          </p:cNvPr>
+          <p:cNvSpPr>
+            <a:spLocks noGrp="1"/>
+          </p:cNvSpPr>
+          <p:nvPr>
+            <p:ph type="title"/>
+          </p:nvPr>
+        </p:nvSpPr>
+        <p:spPr/>
+        <p:txBody>
+          <a:bodyPr>
+            <a:normAutofit fontScale="90000"/>
+          </a:bodyPr>
+          <a:lstStyle/>
+          <a:p>
+            <a:r>
+              <a:rPr lang="en-GB" b="1" dirty="0" err="1"/>
+              <a:t>BigWigTracks</a:t>
+            </a:r>
+            <a:endParaRPr lang="en-GB" b="1" dirty="0"/>
+          </a:p>
+        </p:txBody>
+      </p:sp>
+      <p:sp>
+        <p:nvSpPr>
+          <p:cNvPr id="4" name="Date Placeholder 3">
+            <a:extLst>
+              <a:ext uri="{FF2B5EF4-FFF2-40B4-BE49-F238E27FC236}">
+                <a16:creationId xmlns:a16="http://schemas.microsoft.com/office/drawing/2014/main" id="{8C44FE10-70BF-DD77-FDAC-6237185646B6}"/>
+              </a:ext>
+            </a:extLst>
+          </p:cNvPr>
+          <p:cNvSpPr>
+            <a:spLocks noGrp="1"/>
+          </p:cNvSpPr>
+          <p:nvPr>
+            <p:ph type="dt" sz="half" idx="10"/>
+          </p:nvPr>
+        </p:nvSpPr>
+        <p:spPr/>
+        <p:txBody>
+          <a:bodyPr/>
+          <a:lstStyle/>
+          <a:p>
+            <a:fld id="{761DFEEA-1162-B343-ACBF-B3E92F6AC390}" type="datetime1">
+              <a:rPr lang="it-IT" smtClean="0"/>
+              <a:t>25/09/26</a:t>
+            </a:fld>
+            <a:endParaRPr lang="en-GB"/>
+          </a:p>
+        </p:txBody>
+      </p:sp>
+      <p:sp>
+        <p:nvSpPr>
+          <p:cNvPr id="5" name="Footer Placeholder 4">
+            <a:extLst>
+              <a:ext uri="{FF2B5EF4-FFF2-40B4-BE49-F238E27FC236}">
+                <a16:creationId xmlns:a16="http://schemas.microsoft.com/office/drawing/2014/main" id="{DFCEA4C6-C375-7115-704D-950C84EECAB3}"/>
+              </a:ext>
+            </a:extLst>
+          </p:cNvPr>
+          <p:cNvSpPr>
+            <a:spLocks noGrp="1"/>
+          </p:cNvSpPr>
+          <p:nvPr>
+            <p:ph type="ftr" sz="quarter" idx="11"/>
+          </p:nvPr>
+        </p:nvSpPr>
+        <p:spPr/>
+        <p:txBody>
+          <a:bodyPr/>
+          <a:lstStyle/>
+          <a:p>
+            <a:r>
+              <a:rPr lang="en-GB"/>
+              <a:t>Day 1: Reproducible NGS Data Analysis on Personal Laptops</a:t>
+            </a:r>
+          </a:p>
+        </p:txBody>
+      </p:sp>
+      <p:sp>
+        <p:nvSpPr>
+          <p:cNvPr id="6" name="Slide Number Placeholder 5">
+            <a:extLst>
+              <a:ext uri="{FF2B5EF4-FFF2-40B4-BE49-F238E27FC236}">
+                <a16:creationId xmlns:a16="http://schemas.microsoft.com/office/drawing/2014/main" id="{09BDB425-16DE-B985-6DAF-CE9733D3312D}"/>
+              </a:ext>
+            </a:extLst>
+          </p:cNvPr>
+          <p:cNvSpPr>
+            <a:spLocks noGrp="1"/>
+          </p:cNvSpPr>
+          <p:nvPr>
+            <p:ph type="sldNum" sz="quarter" idx="12"/>
+          </p:nvPr>
+        </p:nvSpPr>
+        <p:spPr/>
+        <p:txBody>
+          <a:bodyPr/>
+          <a:lstStyle/>
+          <a:p>
+            <a:fld id="{62E92BA6-6E87-3343-8D2C-B7A656D628E4}" type="slidenum">
+              <a:rPr lang="en-GB" smtClean="0"/>
+              <a:t>27</a:t>
+            </a:fld>
+            <a:endParaRPr lang="en-GB"/>
+          </a:p>
+        </p:txBody>
+      </p:sp>
+      <p:sp>
+        <p:nvSpPr>
+          <p:cNvPr id="3" name="TextBox 2">
+            <a:extLst>
+              <a:ext uri="{FF2B5EF4-FFF2-40B4-BE49-F238E27FC236}">
+                <a16:creationId xmlns:a16="http://schemas.microsoft.com/office/drawing/2014/main" id="{AA9C6D7F-DB43-2146-8FF8-6A9DC69DC119}"/>
+              </a:ext>
+            </a:extLst>
+          </p:cNvPr>
+          <p:cNvSpPr txBox="1"/>
+          <p:nvPr/>
+        </p:nvSpPr>
+        <p:spPr>
+          <a:xfrm>
+            <a:off x="351693" y="1077939"/>
+            <a:ext cx="4461467" cy="4524315"/>
+          </a:xfrm>
+          <a:prstGeom prst="rect">
+            <a:avLst/>
+          </a:prstGeom>
+          <a:noFill/>
+        </p:spPr>
+        <p:txBody>
+          <a:bodyPr wrap="square" rtlCol="0">
+            <a:spAutoFit/>
+          </a:bodyPr>
+          <a:lstStyle/>
+          <a:p>
+            <a:r>
+              <a:rPr lang="en-IT" dirty="0"/>
+              <a:t>BigWig files are compressed, indexed representations of genomic signal tracks, where values are associated with genomic coordinates or intervals.</a:t>
+            </a:r>
+          </a:p>
+          <a:p>
+            <a:endParaRPr lang="en-IT" dirty="0"/>
+          </a:p>
+          <a:p>
+            <a:r>
+              <a:rPr lang="en-IT" dirty="0"/>
+              <a:t>Their compact size comes from efficient binary compression, indexing, and the representation of consecutive genomic regions with the same or similar signal values, rather than storing every genomic position individually.</a:t>
+            </a:r>
+          </a:p>
+          <a:p>
+            <a:endParaRPr lang="en-IT" dirty="0"/>
+          </a:p>
+          <a:p>
+            <a:r>
+              <a:rPr lang="en-IT" dirty="0"/>
+              <a:t>The are usefull together with genome and annotations to inspect directly on IGV. </a:t>
+            </a:r>
+          </a:p>
+          <a:p>
+            <a:endParaRPr lang="en-IT" dirty="0"/>
+          </a:p>
+          <a:p>
+            <a:r>
+              <a:rPr lang="en-IT" dirty="0">
+                <a:hlinkClick r:id="rId2"/>
+              </a:rPr>
+              <a:t>Deeptools</a:t>
+            </a:r>
+            <a:endParaRPr lang="en-IT" dirty="0"/>
+          </a:p>
+        </p:txBody>
+      </p:sp>
+      <p:sp>
+        <p:nvSpPr>
+          <p:cNvPr id="8" name="TextBox 7">
+            <a:extLst>
+              <a:ext uri="{FF2B5EF4-FFF2-40B4-BE49-F238E27FC236}">
+                <a16:creationId xmlns:a16="http://schemas.microsoft.com/office/drawing/2014/main" id="{F35453A9-91C6-0870-E5F0-879D3B940317}"/>
+              </a:ext>
+            </a:extLst>
+          </p:cNvPr>
+          <p:cNvSpPr txBox="1"/>
+          <p:nvPr/>
+        </p:nvSpPr>
+        <p:spPr>
+          <a:xfrm>
+            <a:off x="3581400" y="700946"/>
+            <a:ext cx="8416331" cy="369332"/>
+          </a:xfrm>
+          <a:prstGeom prst="rect">
+            <a:avLst/>
+          </a:prstGeom>
+          <a:noFill/>
+          <a:ln>
+            <a:solidFill>
+              <a:schemeClr val="tx1"/>
+            </a:solidFill>
+          </a:ln>
+        </p:spPr>
+        <p:txBody>
+          <a:bodyPr wrap="square">
+            <a:spAutoFit/>
+          </a:bodyPr>
+          <a:lstStyle/>
+          <a:p>
+            <a:r>
+              <a:rPr lang="en-IT" sz="1800" b="0" i="0" dirty="0">
+                <a:solidFill>
+                  <a:schemeClr val="tx1"/>
+                </a:solidFill>
+                <a:effectLst/>
+                <a:latin typeface="Courier New" panose="02070309020205020404" pitchFamily="49" charset="0"/>
+                <a:cs typeface="Courier New" panose="02070309020205020404" pitchFamily="49" charset="0"/>
+              </a:rPr>
+              <a:t>Create </a:t>
+            </a:r>
+            <a:r>
+              <a:rPr lang="en-IT" b="0" i="0" dirty="0">
+                <a:solidFill>
+                  <a:srgbClr val="A72AA7"/>
+                </a:solidFill>
+                <a:effectLst/>
+                <a:latin typeface="Courier New" panose="02070309020205020404" pitchFamily="49" charset="0"/>
+                <a:cs typeface="Courier New" panose="02070309020205020404" pitchFamily="49" charset="0"/>
+              </a:rPr>
+              <a:t>scripts/day2_rnaseq/05_make_bigwig_bamcoverage.sh</a:t>
+            </a:r>
+            <a:endParaRPr lang="en-GB" dirty="0">
+              <a:solidFill>
+                <a:srgbClr val="A72AA7"/>
+              </a:solidFill>
+              <a:latin typeface="Courier New" panose="02070309020205020404" pitchFamily="49" charset="0"/>
+              <a:cs typeface="Courier New" panose="02070309020205020404" pitchFamily="49" charset="0"/>
+            </a:endParaRPr>
+          </a:p>
+        </p:txBody>
+      </p:sp>
+      <p:sp>
+        <p:nvSpPr>
+          <p:cNvPr id="10" name="TextBox 9">
+            <a:extLst>
+              <a:ext uri="{FF2B5EF4-FFF2-40B4-BE49-F238E27FC236}">
+                <a16:creationId xmlns:a16="http://schemas.microsoft.com/office/drawing/2014/main" id="{A15AABAB-19CB-F8D5-A5C7-30A6EA24AA76}"/>
+              </a:ext>
+            </a:extLst>
+          </p:cNvPr>
+          <p:cNvSpPr txBox="1"/>
+          <p:nvPr/>
+        </p:nvSpPr>
+        <p:spPr>
+          <a:xfrm>
+            <a:off x="4813160" y="1129315"/>
+            <a:ext cx="7244862" cy="5632311"/>
+          </a:xfrm>
+          <a:prstGeom prst="rect">
+            <a:avLst/>
+          </a:prstGeom>
+          <a:solidFill>
+            <a:schemeClr val="bg1"/>
+          </a:solidFill>
+          <a:ln>
+            <a:solidFill>
+              <a:schemeClr val="tx1"/>
+            </a:solidFill>
+          </a:ln>
+        </p:spPr>
+        <p:txBody>
+          <a:bodyPr wrap="square">
+            <a:spAutoFit/>
+          </a:bodyPr>
+          <a:lstStyle/>
+          <a:p>
+            <a:r>
+              <a:rPr lang="en-GB" sz="1200" dirty="0">
+                <a:latin typeface="Courier New" panose="02070309020205020404" pitchFamily="49" charset="0"/>
+                <a:cs typeface="Courier New" panose="02070309020205020404" pitchFamily="49" charset="0"/>
+              </a:rPr>
+              <a:t>#!/</a:t>
+            </a:r>
+            <a:r>
+              <a:rPr lang="en-GB" sz="1200" dirty="0" err="1">
+                <a:latin typeface="Courier New" panose="02070309020205020404" pitchFamily="49" charset="0"/>
+                <a:cs typeface="Courier New" panose="02070309020205020404" pitchFamily="49" charset="0"/>
+              </a:rPr>
+              <a:t>usr</a:t>
+            </a:r>
+            <a:r>
+              <a:rPr lang="en-GB" sz="1200" dirty="0">
+                <a:latin typeface="Courier New" panose="02070309020205020404" pitchFamily="49" charset="0"/>
+                <a:cs typeface="Courier New" panose="02070309020205020404" pitchFamily="49" charset="0"/>
+              </a:rPr>
+              <a:t>/bin/env bash</a:t>
+            </a:r>
+          </a:p>
+          <a:p>
+            <a:r>
+              <a:rPr lang="en-GB" sz="1200" dirty="0">
+                <a:latin typeface="Courier New" panose="02070309020205020404" pitchFamily="49" charset="0"/>
+                <a:cs typeface="Courier New" panose="02070309020205020404" pitchFamily="49" charset="0"/>
+              </a:rPr>
+              <a:t>set -</a:t>
+            </a:r>
+            <a:r>
+              <a:rPr lang="en-GB" sz="1200" dirty="0" err="1">
+                <a:latin typeface="Courier New" panose="02070309020205020404" pitchFamily="49" charset="0"/>
+                <a:cs typeface="Courier New" panose="02070309020205020404" pitchFamily="49" charset="0"/>
+              </a:rPr>
+              <a:t>euo</a:t>
+            </a:r>
+            <a:r>
+              <a:rPr lang="en-GB" sz="1200" dirty="0">
+                <a:latin typeface="Courier New" panose="02070309020205020404" pitchFamily="49" charset="0"/>
+                <a:cs typeface="Courier New" panose="02070309020205020404" pitchFamily="49" charset="0"/>
+              </a:rPr>
+              <a:t> </a:t>
+            </a:r>
+            <a:r>
+              <a:rPr lang="en-GB" sz="1200" dirty="0" err="1">
+                <a:latin typeface="Courier New" panose="02070309020205020404" pitchFamily="49" charset="0"/>
+                <a:cs typeface="Courier New" panose="02070309020205020404" pitchFamily="49" charset="0"/>
+              </a:rPr>
+              <a:t>pipefail</a:t>
+            </a:r>
+            <a:endParaRPr lang="en-GB" sz="1200" dirty="0">
+              <a:latin typeface="Courier New" panose="02070309020205020404" pitchFamily="49" charset="0"/>
+              <a:cs typeface="Courier New" panose="02070309020205020404" pitchFamily="49" charset="0"/>
+            </a:endParaRPr>
+          </a:p>
+          <a:p>
+            <a:endParaRPr lang="en-GB" sz="1200" dirty="0">
+              <a:latin typeface="Courier New" panose="02070309020205020404" pitchFamily="49" charset="0"/>
+              <a:cs typeface="Courier New" panose="02070309020205020404" pitchFamily="49" charset="0"/>
+            </a:endParaRPr>
+          </a:p>
+          <a:p>
+            <a:r>
+              <a:rPr lang="en-GB" sz="1200" dirty="0" err="1">
+                <a:latin typeface="Courier New" panose="02070309020205020404" pitchFamily="49" charset="0"/>
+                <a:cs typeface="Courier New" panose="02070309020205020404" pitchFamily="49" charset="0"/>
+              </a:rPr>
+              <a:t>bam_dir</a:t>
+            </a:r>
+            <a:r>
+              <a:rPr lang="en-GB" sz="1200" dirty="0">
+                <a:latin typeface="Courier New" panose="02070309020205020404" pitchFamily="49" charset="0"/>
+                <a:cs typeface="Courier New" panose="02070309020205020404" pitchFamily="49" charset="0"/>
+              </a:rPr>
+              <a:t>="results/day2_rnaseq/bam"</a:t>
+            </a:r>
+          </a:p>
+          <a:p>
+            <a:r>
+              <a:rPr lang="en-GB" sz="1200" dirty="0" err="1">
+                <a:latin typeface="Courier New" panose="02070309020205020404" pitchFamily="49" charset="0"/>
+                <a:cs typeface="Courier New" panose="02070309020205020404" pitchFamily="49" charset="0"/>
+              </a:rPr>
+              <a:t>out_dir</a:t>
+            </a:r>
+            <a:r>
+              <a:rPr lang="en-GB" sz="1200" dirty="0">
+                <a:latin typeface="Courier New" panose="02070309020205020404" pitchFamily="49" charset="0"/>
+                <a:cs typeface="Courier New" panose="02070309020205020404" pitchFamily="49" charset="0"/>
+              </a:rPr>
+              <a:t>="results/day2_rnaseq/bigwig"</a:t>
+            </a:r>
+          </a:p>
+          <a:p>
+            <a:r>
+              <a:rPr lang="en-GB" sz="1200" dirty="0" err="1">
+                <a:latin typeface="Courier New" panose="02070309020205020404" pitchFamily="49" charset="0"/>
+                <a:cs typeface="Courier New" panose="02070309020205020404" pitchFamily="49" charset="0"/>
+              </a:rPr>
+              <a:t>scale_file</a:t>
+            </a:r>
+            <a:r>
+              <a:rPr lang="en-GB" sz="1200" dirty="0">
+                <a:latin typeface="Courier New" panose="02070309020205020404" pitchFamily="49" charset="0"/>
+                <a:cs typeface="Courier New" panose="02070309020205020404" pitchFamily="49" charset="0"/>
+              </a:rPr>
+              <a:t>="results/day2_rnaseq/deseq2/deseq2_size_factors.tsv"</a:t>
+            </a:r>
+          </a:p>
+          <a:p>
+            <a:endParaRPr lang="en-GB" sz="1200" dirty="0">
+              <a:latin typeface="Courier New" panose="02070309020205020404" pitchFamily="49" charset="0"/>
+              <a:cs typeface="Courier New" panose="02070309020205020404" pitchFamily="49" charset="0"/>
+            </a:endParaRPr>
+          </a:p>
+          <a:p>
+            <a:r>
+              <a:rPr lang="en-GB" sz="1200" dirty="0" err="1">
+                <a:latin typeface="Courier New" panose="02070309020205020404" pitchFamily="49" charset="0"/>
+                <a:cs typeface="Courier New" panose="02070309020205020404" pitchFamily="49" charset="0"/>
+              </a:rPr>
+              <a:t>mkdir</a:t>
+            </a:r>
+            <a:r>
+              <a:rPr lang="en-GB" sz="1200" dirty="0">
+                <a:latin typeface="Courier New" panose="02070309020205020404" pitchFamily="49" charset="0"/>
+                <a:cs typeface="Courier New" panose="02070309020205020404" pitchFamily="49" charset="0"/>
+              </a:rPr>
+              <a:t> -p "${</a:t>
+            </a:r>
+            <a:r>
+              <a:rPr lang="en-GB" sz="1200" dirty="0" err="1">
+                <a:latin typeface="Courier New" panose="02070309020205020404" pitchFamily="49" charset="0"/>
+                <a:cs typeface="Courier New" panose="02070309020205020404" pitchFamily="49" charset="0"/>
+              </a:rPr>
+              <a:t>out_dir</a:t>
+            </a:r>
+            <a:r>
+              <a:rPr lang="en-GB" sz="1200" dirty="0">
+                <a:latin typeface="Courier New" panose="02070309020205020404" pitchFamily="49" charset="0"/>
+                <a:cs typeface="Courier New" panose="02070309020205020404" pitchFamily="49" charset="0"/>
+              </a:rPr>
+              <a:t>}"</a:t>
+            </a:r>
+          </a:p>
+          <a:p>
+            <a:endParaRPr lang="en-GB" sz="1200" dirty="0">
+              <a:latin typeface="Courier New" panose="02070309020205020404" pitchFamily="49" charset="0"/>
+              <a:cs typeface="Courier New" panose="02070309020205020404" pitchFamily="49" charset="0"/>
+            </a:endParaRPr>
+          </a:p>
+          <a:p>
+            <a:endParaRPr lang="en-GB" sz="1200" dirty="0">
+              <a:latin typeface="Courier New" panose="02070309020205020404" pitchFamily="49" charset="0"/>
+              <a:cs typeface="Courier New" panose="02070309020205020404" pitchFamily="49" charset="0"/>
+            </a:endParaRPr>
+          </a:p>
+          <a:p>
+            <a:r>
+              <a:rPr lang="en-GB" sz="1200" dirty="0">
+                <a:latin typeface="Courier New" panose="02070309020205020404" pitchFamily="49" charset="0"/>
+                <a:cs typeface="Courier New" panose="02070309020205020404" pitchFamily="49" charset="0"/>
+              </a:rPr>
+              <a:t>tail -n +2 "${</a:t>
+            </a:r>
+            <a:r>
+              <a:rPr lang="en-GB" sz="1200" dirty="0" err="1">
+                <a:latin typeface="Courier New" panose="02070309020205020404" pitchFamily="49" charset="0"/>
+                <a:cs typeface="Courier New" panose="02070309020205020404" pitchFamily="49" charset="0"/>
+              </a:rPr>
+              <a:t>scale_file</a:t>
+            </a:r>
+            <a:r>
+              <a:rPr lang="en-GB" sz="1200" dirty="0">
+                <a:latin typeface="Courier New" panose="02070309020205020404" pitchFamily="49" charset="0"/>
+                <a:cs typeface="Courier New" panose="02070309020205020404" pitchFamily="49" charset="0"/>
+              </a:rPr>
+              <a:t>}" |</a:t>
+            </a:r>
+          </a:p>
+          <a:p>
+            <a:r>
+              <a:rPr lang="en-GB" sz="1200" dirty="0">
+                <a:latin typeface="Courier New" panose="02070309020205020404" pitchFamily="49" charset="0"/>
+                <a:cs typeface="Courier New" panose="02070309020205020404" pitchFamily="49" charset="0"/>
+              </a:rPr>
+              <a:t>while IFS=$'\t' read -r sample deseq2_size_factor </a:t>
+            </a:r>
+            <a:r>
+              <a:rPr lang="en-GB" sz="1200" dirty="0" err="1">
+                <a:latin typeface="Courier New" panose="02070309020205020404" pitchFamily="49" charset="0"/>
+                <a:cs typeface="Courier New" panose="02070309020205020404" pitchFamily="49" charset="0"/>
+              </a:rPr>
+              <a:t>bamcoverage_scale_factor</a:t>
+            </a:r>
+            <a:endParaRPr lang="en-GB" sz="1200" dirty="0">
+              <a:latin typeface="Courier New" panose="02070309020205020404" pitchFamily="49" charset="0"/>
+              <a:cs typeface="Courier New" panose="02070309020205020404" pitchFamily="49" charset="0"/>
+            </a:endParaRPr>
+          </a:p>
+          <a:p>
+            <a:r>
+              <a:rPr lang="en-GB" sz="1200" dirty="0">
+                <a:latin typeface="Courier New" panose="02070309020205020404" pitchFamily="49" charset="0"/>
+                <a:cs typeface="Courier New" panose="02070309020205020404" pitchFamily="49" charset="0"/>
+              </a:rPr>
+              <a:t>do</a:t>
+            </a:r>
+          </a:p>
+          <a:p>
+            <a:r>
+              <a:rPr lang="en-GB" sz="1200" dirty="0">
+                <a:latin typeface="Courier New" panose="02070309020205020404" pitchFamily="49" charset="0"/>
+                <a:cs typeface="Courier New" panose="02070309020205020404" pitchFamily="49" charset="0"/>
+              </a:rPr>
+              <a:t>  bam="${</a:t>
+            </a:r>
+            <a:r>
+              <a:rPr lang="en-GB" sz="1200" dirty="0" err="1">
+                <a:latin typeface="Courier New" panose="02070309020205020404" pitchFamily="49" charset="0"/>
+                <a:cs typeface="Courier New" panose="02070309020205020404" pitchFamily="49" charset="0"/>
+              </a:rPr>
+              <a:t>bam_dir</a:t>
+            </a:r>
+            <a:r>
+              <a:rPr lang="en-GB" sz="1200" dirty="0">
+                <a:latin typeface="Courier New" panose="02070309020205020404" pitchFamily="49" charset="0"/>
+                <a:cs typeface="Courier New" panose="02070309020205020404" pitchFamily="49" charset="0"/>
+              </a:rPr>
+              <a:t>}/${sample}.</a:t>
+            </a:r>
+            <a:r>
+              <a:rPr lang="en-GB" sz="1200" dirty="0" err="1">
+                <a:latin typeface="Courier New" panose="02070309020205020404" pitchFamily="49" charset="0"/>
+                <a:cs typeface="Courier New" panose="02070309020205020404" pitchFamily="49" charset="0"/>
+              </a:rPr>
+              <a:t>filtered.bam</a:t>
+            </a:r>
+            <a:r>
+              <a:rPr lang="en-GB" sz="1200" dirty="0">
+                <a:latin typeface="Courier New" panose="02070309020205020404" pitchFamily="49" charset="0"/>
+                <a:cs typeface="Courier New" panose="02070309020205020404" pitchFamily="49" charset="0"/>
+              </a:rPr>
+              <a:t>"</a:t>
+            </a:r>
+          </a:p>
+          <a:p>
+            <a:r>
+              <a:rPr lang="en-GB" sz="1200" dirty="0">
+                <a:latin typeface="Courier New" panose="02070309020205020404" pitchFamily="49" charset="0"/>
+                <a:cs typeface="Courier New" panose="02070309020205020404" pitchFamily="49" charset="0"/>
+              </a:rPr>
+              <a:t>  </a:t>
+            </a:r>
+            <a:r>
+              <a:rPr lang="en-GB" sz="1200" dirty="0" err="1">
+                <a:latin typeface="Courier New" panose="02070309020205020404" pitchFamily="49" charset="0"/>
+                <a:cs typeface="Courier New" panose="02070309020205020404" pitchFamily="49" charset="0"/>
+              </a:rPr>
+              <a:t>bamCoverage</a:t>
+            </a:r>
+            <a:r>
+              <a:rPr lang="en-GB" sz="1200" dirty="0">
+                <a:latin typeface="Courier New" panose="02070309020205020404" pitchFamily="49" charset="0"/>
+                <a:cs typeface="Courier New" panose="02070309020205020404" pitchFamily="49" charset="0"/>
+              </a:rPr>
+              <a:t> \</a:t>
+            </a:r>
+          </a:p>
+          <a:p>
+            <a:r>
+              <a:rPr lang="en-GB" sz="1200" dirty="0">
+                <a:latin typeface="Courier New" panose="02070309020205020404" pitchFamily="49" charset="0"/>
+                <a:cs typeface="Courier New" panose="02070309020205020404" pitchFamily="49" charset="0"/>
+              </a:rPr>
+              <a:t>    -b "${bam}" \</a:t>
+            </a:r>
+          </a:p>
+          <a:p>
+            <a:r>
+              <a:rPr lang="en-GB" sz="1200" dirty="0">
+                <a:latin typeface="Courier New" panose="02070309020205020404" pitchFamily="49" charset="0"/>
+                <a:cs typeface="Courier New" panose="02070309020205020404" pitchFamily="49" charset="0"/>
+              </a:rPr>
+              <a:t>	</a:t>
+            </a:r>
+            <a:r>
+              <a:rPr lang="en-IT" sz="1200" dirty="0">
+                <a:latin typeface="Courier New" panose="02070309020205020404" pitchFamily="49" charset="0"/>
+                <a:cs typeface="Courier New" panose="02070309020205020404" pitchFamily="49" charset="0"/>
+              </a:rPr>
+              <a:t>--filterRNAstrand forward \</a:t>
+            </a:r>
+            <a:endParaRPr lang="en-GB" sz="1200" dirty="0">
+              <a:latin typeface="Courier New" panose="02070309020205020404" pitchFamily="49" charset="0"/>
+              <a:cs typeface="Courier New" panose="02070309020205020404" pitchFamily="49" charset="0"/>
+            </a:endParaRPr>
+          </a:p>
+          <a:p>
+            <a:r>
+              <a:rPr lang="en-GB" sz="1200" dirty="0">
+                <a:latin typeface="Courier New" panose="02070309020205020404" pitchFamily="49" charset="0"/>
+                <a:cs typeface="Courier New" panose="02070309020205020404" pitchFamily="49" charset="0"/>
+              </a:rPr>
+              <a:t>    -o "${</a:t>
+            </a:r>
+            <a:r>
+              <a:rPr lang="en-GB" sz="1200" dirty="0" err="1">
+                <a:latin typeface="Courier New" panose="02070309020205020404" pitchFamily="49" charset="0"/>
+                <a:cs typeface="Courier New" panose="02070309020205020404" pitchFamily="49" charset="0"/>
+              </a:rPr>
+              <a:t>out_dir</a:t>
+            </a:r>
+            <a:r>
+              <a:rPr lang="en-GB" sz="1200" dirty="0">
+                <a:latin typeface="Courier New" panose="02070309020205020404" pitchFamily="49" charset="0"/>
+                <a:cs typeface="Courier New" panose="02070309020205020404" pitchFamily="49" charset="0"/>
+              </a:rPr>
+              <a:t>}/${sample}.</a:t>
+            </a:r>
+            <a:r>
+              <a:rPr lang="en-GB" sz="1200" dirty="0" err="1">
+                <a:latin typeface="Courier New" panose="02070309020205020404" pitchFamily="49" charset="0"/>
+                <a:cs typeface="Courier New" panose="02070309020205020404" pitchFamily="49" charset="0"/>
+              </a:rPr>
+              <a:t>norm.fw.bw</a:t>
+            </a:r>
+            <a:r>
+              <a:rPr lang="en-GB" sz="1200" dirty="0">
+                <a:latin typeface="Courier New" panose="02070309020205020404" pitchFamily="49" charset="0"/>
+                <a:cs typeface="Courier New" panose="02070309020205020404" pitchFamily="49" charset="0"/>
+              </a:rPr>
+              <a:t>" \</a:t>
+            </a:r>
+          </a:p>
+          <a:p>
+            <a:r>
+              <a:rPr lang="en-GB" sz="1200" dirty="0">
+                <a:latin typeface="Courier New" panose="02070309020205020404" pitchFamily="49" charset="0"/>
+                <a:cs typeface="Courier New" panose="02070309020205020404" pitchFamily="49" charset="0"/>
+              </a:rPr>
+              <a:t>    --</a:t>
+            </a:r>
+            <a:r>
+              <a:rPr lang="en-GB" sz="1200" dirty="0" err="1">
+                <a:latin typeface="Courier New" panose="02070309020205020404" pitchFamily="49" charset="0"/>
+                <a:cs typeface="Courier New" panose="02070309020205020404" pitchFamily="49" charset="0"/>
+              </a:rPr>
+              <a:t>scaleFactor</a:t>
+            </a:r>
+            <a:r>
+              <a:rPr lang="en-GB" sz="1200" dirty="0">
+                <a:latin typeface="Courier New" panose="02070309020205020404" pitchFamily="49" charset="0"/>
+                <a:cs typeface="Courier New" panose="02070309020205020404" pitchFamily="49" charset="0"/>
+              </a:rPr>
+              <a:t> "${</a:t>
+            </a:r>
+            <a:r>
+              <a:rPr lang="en-GB" sz="1200" dirty="0" err="1">
+                <a:latin typeface="Courier New" panose="02070309020205020404" pitchFamily="49" charset="0"/>
+                <a:cs typeface="Courier New" panose="02070309020205020404" pitchFamily="49" charset="0"/>
+              </a:rPr>
+              <a:t>bamcoverage_scale_factor</a:t>
+            </a:r>
+            <a:r>
+              <a:rPr lang="en-GB" sz="1200" dirty="0">
+                <a:latin typeface="Courier New" panose="02070309020205020404" pitchFamily="49" charset="0"/>
+                <a:cs typeface="Courier New" panose="02070309020205020404" pitchFamily="49" charset="0"/>
+              </a:rPr>
+              <a:t>}" \</a:t>
+            </a:r>
+          </a:p>
+          <a:p>
+            <a:r>
+              <a:rPr lang="en-GB" sz="1200" dirty="0">
+                <a:latin typeface="Courier New" panose="02070309020205020404" pitchFamily="49" charset="0"/>
+                <a:cs typeface="Courier New" panose="02070309020205020404" pitchFamily="49" charset="0"/>
+              </a:rPr>
+              <a:t>    --</a:t>
+            </a:r>
+            <a:r>
+              <a:rPr lang="en-GB" sz="1200" dirty="0" err="1">
+                <a:latin typeface="Courier New" panose="02070309020205020404" pitchFamily="49" charset="0"/>
+                <a:cs typeface="Courier New" panose="02070309020205020404" pitchFamily="49" charset="0"/>
+              </a:rPr>
+              <a:t>binSize</a:t>
+            </a:r>
+            <a:r>
+              <a:rPr lang="en-GB" sz="1200" dirty="0">
+                <a:latin typeface="Courier New" panose="02070309020205020404" pitchFamily="49" charset="0"/>
+                <a:cs typeface="Courier New" panose="02070309020205020404" pitchFamily="49" charset="0"/>
+              </a:rPr>
+              <a:t> 10 \</a:t>
+            </a:r>
+          </a:p>
+          <a:p>
+            <a:r>
+              <a:rPr lang="en-GB" sz="1200" dirty="0">
+                <a:latin typeface="Courier New" panose="02070309020205020404" pitchFamily="49" charset="0"/>
+                <a:cs typeface="Courier New" panose="02070309020205020404" pitchFamily="49" charset="0"/>
+              </a:rPr>
+              <a:t>    --</a:t>
+            </a:r>
+            <a:r>
+              <a:rPr lang="en-GB" sz="1200" dirty="0" err="1">
+                <a:latin typeface="Courier New" panose="02070309020205020404" pitchFamily="49" charset="0"/>
+                <a:cs typeface="Courier New" panose="02070309020205020404" pitchFamily="49" charset="0"/>
+              </a:rPr>
+              <a:t>numberOfProcessors</a:t>
+            </a:r>
+            <a:r>
+              <a:rPr lang="en-GB" sz="1200" dirty="0">
+                <a:latin typeface="Courier New" panose="02070309020205020404" pitchFamily="49" charset="0"/>
+                <a:cs typeface="Courier New" panose="02070309020205020404" pitchFamily="49" charset="0"/>
+              </a:rPr>
+              <a:t> 2</a:t>
+            </a:r>
+          </a:p>
+          <a:p>
+            <a:r>
+              <a:rPr lang="en-GB" sz="1200" dirty="0">
+                <a:latin typeface="Courier New" panose="02070309020205020404" pitchFamily="49" charset="0"/>
+                <a:cs typeface="Courier New" panose="02070309020205020404" pitchFamily="49" charset="0"/>
+              </a:rPr>
+              <a:t> </a:t>
+            </a:r>
+            <a:r>
+              <a:rPr lang="en-GB" sz="1200" dirty="0" err="1">
+                <a:latin typeface="Courier New" panose="02070309020205020404" pitchFamily="49" charset="0"/>
+                <a:cs typeface="Courier New" panose="02070309020205020404" pitchFamily="49" charset="0"/>
+              </a:rPr>
+              <a:t>bamCoverage</a:t>
+            </a:r>
+            <a:r>
+              <a:rPr lang="en-GB" sz="1200" dirty="0">
+                <a:latin typeface="Courier New" panose="02070309020205020404" pitchFamily="49" charset="0"/>
+                <a:cs typeface="Courier New" panose="02070309020205020404" pitchFamily="49" charset="0"/>
+              </a:rPr>
+              <a:t> \</a:t>
+            </a:r>
+          </a:p>
+          <a:p>
+            <a:r>
+              <a:rPr lang="en-GB" sz="1200" dirty="0">
+                <a:latin typeface="Courier New" panose="02070309020205020404" pitchFamily="49" charset="0"/>
+                <a:cs typeface="Courier New" panose="02070309020205020404" pitchFamily="49" charset="0"/>
+              </a:rPr>
+              <a:t>    -b "${bam}" \</a:t>
+            </a:r>
+          </a:p>
+          <a:p>
+            <a:r>
+              <a:rPr lang="en-GB" sz="1200" dirty="0">
+                <a:latin typeface="Courier New" panose="02070309020205020404" pitchFamily="49" charset="0"/>
+                <a:cs typeface="Courier New" panose="02070309020205020404" pitchFamily="49" charset="0"/>
+              </a:rPr>
+              <a:t>	</a:t>
+            </a:r>
+            <a:r>
+              <a:rPr lang="en-IT" sz="1200" dirty="0">
+                <a:latin typeface="Courier New" panose="02070309020205020404" pitchFamily="49" charset="0"/>
+                <a:cs typeface="Courier New" panose="02070309020205020404" pitchFamily="49" charset="0"/>
+              </a:rPr>
+              <a:t>--filterRNAstrand reverse \</a:t>
+            </a:r>
+            <a:endParaRPr lang="en-GB" sz="1200" dirty="0">
+              <a:latin typeface="Courier New" panose="02070309020205020404" pitchFamily="49" charset="0"/>
+              <a:cs typeface="Courier New" panose="02070309020205020404" pitchFamily="49" charset="0"/>
+            </a:endParaRPr>
+          </a:p>
+          <a:p>
+            <a:r>
+              <a:rPr lang="en-GB" sz="1200" dirty="0">
+                <a:latin typeface="Courier New" panose="02070309020205020404" pitchFamily="49" charset="0"/>
+                <a:cs typeface="Courier New" panose="02070309020205020404" pitchFamily="49" charset="0"/>
+              </a:rPr>
+              <a:t>    -o "${</a:t>
+            </a:r>
+            <a:r>
+              <a:rPr lang="en-GB" sz="1200" dirty="0" err="1">
+                <a:latin typeface="Courier New" panose="02070309020205020404" pitchFamily="49" charset="0"/>
+                <a:cs typeface="Courier New" panose="02070309020205020404" pitchFamily="49" charset="0"/>
+              </a:rPr>
+              <a:t>out_dir</a:t>
+            </a:r>
+            <a:r>
+              <a:rPr lang="en-GB" sz="1200" dirty="0">
+                <a:latin typeface="Courier New" panose="02070309020205020404" pitchFamily="49" charset="0"/>
+                <a:cs typeface="Courier New" panose="02070309020205020404" pitchFamily="49" charset="0"/>
+              </a:rPr>
+              <a:t>}/${sample}.</a:t>
+            </a:r>
+            <a:r>
+              <a:rPr lang="en-GB" sz="1200" dirty="0" err="1">
+                <a:latin typeface="Courier New" panose="02070309020205020404" pitchFamily="49" charset="0"/>
+                <a:cs typeface="Courier New" panose="02070309020205020404" pitchFamily="49" charset="0"/>
+              </a:rPr>
+              <a:t>norm.rv.bw</a:t>
+            </a:r>
+            <a:r>
+              <a:rPr lang="en-GB" sz="1200" dirty="0">
+                <a:latin typeface="Courier New" panose="02070309020205020404" pitchFamily="49" charset="0"/>
+                <a:cs typeface="Courier New" panose="02070309020205020404" pitchFamily="49" charset="0"/>
+              </a:rPr>
+              <a:t>" \</a:t>
+            </a:r>
+          </a:p>
+          <a:p>
+            <a:r>
+              <a:rPr lang="en-GB" sz="1200" dirty="0">
+                <a:latin typeface="Courier New" panose="02070309020205020404" pitchFamily="49" charset="0"/>
+                <a:cs typeface="Courier New" panose="02070309020205020404" pitchFamily="49" charset="0"/>
+              </a:rPr>
+              <a:t>    --</a:t>
+            </a:r>
+            <a:r>
+              <a:rPr lang="en-GB" sz="1200" dirty="0" err="1">
+                <a:latin typeface="Courier New" panose="02070309020205020404" pitchFamily="49" charset="0"/>
+                <a:cs typeface="Courier New" panose="02070309020205020404" pitchFamily="49" charset="0"/>
+              </a:rPr>
+              <a:t>scaleFactor</a:t>
+            </a:r>
+            <a:r>
+              <a:rPr lang="en-GB" sz="1200" dirty="0">
+                <a:latin typeface="Courier New" panose="02070309020205020404" pitchFamily="49" charset="0"/>
+                <a:cs typeface="Courier New" panose="02070309020205020404" pitchFamily="49" charset="0"/>
+              </a:rPr>
+              <a:t> "${</a:t>
+            </a:r>
+            <a:r>
+              <a:rPr lang="en-GB" sz="1200" dirty="0" err="1">
+                <a:latin typeface="Courier New" panose="02070309020205020404" pitchFamily="49" charset="0"/>
+                <a:cs typeface="Courier New" panose="02070309020205020404" pitchFamily="49" charset="0"/>
+              </a:rPr>
+              <a:t>bamcoverage_scale_factor</a:t>
+            </a:r>
+            <a:r>
+              <a:rPr lang="en-GB" sz="1200" dirty="0">
+                <a:latin typeface="Courier New" panose="02070309020205020404" pitchFamily="49" charset="0"/>
+                <a:cs typeface="Courier New" panose="02070309020205020404" pitchFamily="49" charset="0"/>
+              </a:rPr>
+              <a:t>}" \</a:t>
+            </a:r>
+          </a:p>
+          <a:p>
+            <a:r>
+              <a:rPr lang="en-GB" sz="1200" dirty="0">
+                <a:latin typeface="Courier New" panose="02070309020205020404" pitchFamily="49" charset="0"/>
+                <a:cs typeface="Courier New" panose="02070309020205020404" pitchFamily="49" charset="0"/>
+              </a:rPr>
+              <a:t>    --</a:t>
+            </a:r>
+            <a:r>
+              <a:rPr lang="en-GB" sz="1200" dirty="0" err="1">
+                <a:latin typeface="Courier New" panose="02070309020205020404" pitchFamily="49" charset="0"/>
+                <a:cs typeface="Courier New" panose="02070309020205020404" pitchFamily="49" charset="0"/>
+              </a:rPr>
+              <a:t>binSize</a:t>
+            </a:r>
+            <a:r>
+              <a:rPr lang="en-GB" sz="1200" dirty="0">
+                <a:latin typeface="Courier New" panose="02070309020205020404" pitchFamily="49" charset="0"/>
+                <a:cs typeface="Courier New" panose="02070309020205020404" pitchFamily="49" charset="0"/>
+              </a:rPr>
+              <a:t> 10 \</a:t>
+            </a:r>
+          </a:p>
+          <a:p>
+            <a:r>
+              <a:rPr lang="en-GB" sz="1200" dirty="0">
+                <a:latin typeface="Courier New" panose="02070309020205020404" pitchFamily="49" charset="0"/>
+                <a:cs typeface="Courier New" panose="02070309020205020404" pitchFamily="49" charset="0"/>
+              </a:rPr>
+              <a:t>    --</a:t>
+            </a:r>
+            <a:r>
+              <a:rPr lang="en-GB" sz="1200" dirty="0" err="1">
+                <a:latin typeface="Courier New" panose="02070309020205020404" pitchFamily="49" charset="0"/>
+                <a:cs typeface="Courier New" panose="02070309020205020404" pitchFamily="49" charset="0"/>
+              </a:rPr>
+              <a:t>numberOfProcessors</a:t>
+            </a:r>
+            <a:r>
+              <a:rPr lang="en-GB" sz="1200" dirty="0">
+                <a:latin typeface="Courier New" panose="02070309020205020404" pitchFamily="49" charset="0"/>
+                <a:cs typeface="Courier New" panose="02070309020205020404" pitchFamily="49" charset="0"/>
+              </a:rPr>
+              <a:t> 2</a:t>
+            </a:r>
+          </a:p>
+          <a:p>
+            <a:r>
+              <a:rPr lang="en-GB" sz="1200" dirty="0">
+                <a:latin typeface="Courier New" panose="02070309020205020404" pitchFamily="49" charset="0"/>
+                <a:cs typeface="Courier New" panose="02070309020205020404" pitchFamily="49" charset="0"/>
+              </a:rPr>
+              <a:t>done</a:t>
+            </a:r>
+          </a:p>
+        </p:txBody>
+      </p:sp>
+      <p:sp>
+        <p:nvSpPr>
+          <p:cNvPr id="12" name="TextBox 11">
+            <a:extLst>
+              <a:ext uri="{FF2B5EF4-FFF2-40B4-BE49-F238E27FC236}">
+                <a16:creationId xmlns:a16="http://schemas.microsoft.com/office/drawing/2014/main" id="{83607F9D-087C-D1DC-D36B-BFBC3BF1F055}"/>
+              </a:ext>
+            </a:extLst>
+          </p:cNvPr>
+          <p:cNvSpPr txBox="1"/>
+          <p:nvPr/>
+        </p:nvSpPr>
+        <p:spPr>
+          <a:xfrm>
+            <a:off x="351693" y="5338583"/>
+            <a:ext cx="7717134" cy="1200329"/>
+          </a:xfrm>
+          <a:prstGeom prst="rect">
+            <a:avLst/>
+          </a:prstGeom>
+          <a:solidFill>
+            <a:schemeClr val="bg1"/>
+          </a:solidFill>
+          <a:ln>
+            <a:solidFill>
+              <a:schemeClr val="tx1"/>
+            </a:solidFill>
+          </a:ln>
+        </p:spPr>
+        <p:txBody>
+          <a:bodyPr wrap="square">
+            <a:spAutoFit/>
+          </a:bodyPr>
+          <a:lstStyle/>
+          <a:p>
+            <a:r>
+              <a:rPr lang="en-GB" sz="1200" dirty="0">
+                <a:latin typeface="Courier New" panose="02070309020205020404" pitchFamily="49" charset="0"/>
+                <a:cs typeface="Courier New" panose="02070309020205020404" pitchFamily="49" charset="0"/>
+              </a:rPr>
+              <a:t>docker run --rm \</a:t>
+            </a:r>
+          </a:p>
+          <a:p>
+            <a:r>
+              <a:rPr lang="en-GB" sz="1200" dirty="0">
+                <a:latin typeface="Courier New" panose="02070309020205020404" pitchFamily="49" charset="0"/>
+                <a:cs typeface="Courier New" panose="02070309020205020404" pitchFamily="49" charset="0"/>
+              </a:rPr>
+              <a:t>  --user "$(id -u):$(id -g)" \</a:t>
+            </a:r>
+          </a:p>
+          <a:p>
+            <a:r>
+              <a:rPr lang="en-GB" sz="1200" dirty="0">
+                <a:latin typeface="Courier New" panose="02070309020205020404" pitchFamily="49" charset="0"/>
+                <a:cs typeface="Courier New" panose="02070309020205020404" pitchFamily="49" charset="0"/>
+              </a:rPr>
+              <a:t>  -v "$PWD:/work" \</a:t>
+            </a:r>
+          </a:p>
+          <a:p>
+            <a:r>
+              <a:rPr lang="en-GB" sz="1200" dirty="0">
+                <a:latin typeface="Courier New" panose="02070309020205020404" pitchFamily="49" charset="0"/>
+                <a:cs typeface="Courier New" panose="02070309020205020404" pitchFamily="49" charset="0"/>
+              </a:rPr>
+              <a:t>  -w /work \</a:t>
+            </a:r>
+          </a:p>
+          <a:p>
+            <a:r>
+              <a:rPr lang="en-GB" sz="1200" dirty="0">
+                <a:latin typeface="Courier New" panose="02070309020205020404" pitchFamily="49" charset="0"/>
+                <a:cs typeface="Courier New" panose="02070309020205020404" pitchFamily="49" charset="0"/>
+              </a:rPr>
+              <a:t>  </a:t>
+            </a:r>
+            <a:r>
+              <a:rPr lang="en-GB" sz="1200" dirty="0" err="1">
+                <a:latin typeface="Courier New" panose="02070309020205020404" pitchFamily="49" charset="0"/>
+                <a:cs typeface="Courier New" panose="02070309020205020404" pitchFamily="49" charset="0"/>
+              </a:rPr>
+              <a:t>docker.io</a:t>
+            </a:r>
+            <a:r>
+              <a:rPr lang="en-GB" sz="1200" dirty="0">
+                <a:latin typeface="Courier New" panose="02070309020205020404" pitchFamily="49" charset="0"/>
+                <a:cs typeface="Courier New" panose="02070309020205020404" pitchFamily="49" charset="0"/>
+              </a:rPr>
+              <a:t>/</a:t>
+            </a:r>
+            <a:r>
+              <a:rPr lang="en-GB" sz="1200" dirty="0" err="1">
+                <a:latin typeface="Courier New" panose="02070309020205020404" pitchFamily="49" charset="0"/>
+                <a:cs typeface="Courier New" panose="02070309020205020404" pitchFamily="49" charset="0"/>
+              </a:rPr>
+              <a:t>fgualdr</a:t>
+            </a:r>
+            <a:r>
+              <a:rPr lang="en-GB" sz="1200" dirty="0">
+                <a:latin typeface="Courier New" panose="02070309020205020404" pitchFamily="49" charset="0"/>
+                <a:cs typeface="Courier New" panose="02070309020205020404" pitchFamily="49" charset="0"/>
+              </a:rPr>
+              <a:t>/</a:t>
+            </a:r>
+            <a:r>
+              <a:rPr lang="en-GB" sz="1200" dirty="0" err="1">
+                <a:latin typeface="Courier New" panose="02070309020205020404" pitchFamily="49" charset="0"/>
+                <a:cs typeface="Courier New" panose="02070309020205020404" pitchFamily="49" charset="0"/>
+              </a:rPr>
+              <a:t>ngs-deeptools</a:t>
+            </a:r>
+            <a:r>
+              <a:rPr lang="en-GB" sz="1200" dirty="0">
+                <a:latin typeface="Courier New" panose="02070309020205020404" pitchFamily="49" charset="0"/>
+                <a:cs typeface="Courier New" panose="02070309020205020404" pitchFamily="49" charset="0"/>
+              </a:rPr>
+              <a:t> \</a:t>
+            </a:r>
+          </a:p>
+          <a:p>
+            <a:r>
+              <a:rPr lang="en-GB" sz="1200" dirty="0">
+                <a:latin typeface="Courier New" panose="02070309020205020404" pitchFamily="49" charset="0"/>
+                <a:cs typeface="Courier New" panose="02070309020205020404" pitchFamily="49" charset="0"/>
+              </a:rPr>
+              <a:t>  bash scripts/day2_rnaseq/05_make_bigwig_bamcoverage.sh</a:t>
+            </a:r>
+          </a:p>
+        </p:txBody>
+      </p:sp>
+    </p:spTree>
+    <p:extLst>
+      <p:ext uri="{BB962C8B-B14F-4D97-AF65-F5344CB8AC3E}">
+        <p14:creationId xmlns:p14="http://schemas.microsoft.com/office/powerpoint/2010/main" val="1784293623"/>
+      </p:ext>
+    </p:extLst>
+  </p:cSld>
+  <p:clrMapOvr>
+    <a:masterClrMapping/>
+  </p:clrMapOvr>
+  <p:timing>
+    <p:tnLst>
+      <p:par>
+        <p:cTn id="1" dur="indefinite" restart="never" nodeType="tmRoot">
+          <p:childTnLst>
+            <p:seq concurrent="1" nextAc="seek">
+              <p:cTn id="2" dur="indefinite" nodeType="mainSeq">
+                <p:childTnLst>
+                  <p:par>
+                    <p:cTn id="3" fill="hold">
+                      <p:stCondLst>
+                        <p:cond delay="indefinite"/>
+                      </p:stCondLst>
+                      <p:childTnLst>
+                        <p:par>
+                          <p:cTn id="4" fill="hold">
+                            <p:stCondLst>
+                              <p:cond delay="0"/>
+                            </p:stCondLst>
+                            <p:childTnLst>
+                              <p:par>
+                                <p:cTn id="5" presetID="1" presetClass="entr" presetSubtype="0" fill="hold" grpId="0" nodeType="clickEffect">
+                                  <p:stCondLst>
+                                    <p:cond delay="0"/>
+                                  </p:stCondLst>
+                                  <p:childTnLst>
+                                    <p:set>
+                                      <p:cBhvr>
+                                        <p:cTn id="6" dur="1" fill="hold">
+                                          <p:stCondLst>
+                                            <p:cond delay="0"/>
+                                          </p:stCondLst>
+                                        </p:cTn>
+                                        <p:tgtEl>
+                                          <p:spTgt spid="8"/>
+                                        </p:tgtEl>
+                                        <p:attrNameLst>
+                                          <p:attrName>style.visibility</p:attrName>
+                                        </p:attrNameLst>
+                                      </p:cBhvr>
+                                      <p:to>
+                                        <p:strVal val="visible"/>
+                                      </p:to>
+                                    </p:set>
+                                  </p:childTnLst>
+                                </p:cTn>
+                              </p:par>
+                              <p:par>
+                                <p:cTn id="7" presetID="1" presetClass="entr" presetSubtype="0" fill="hold" grpId="0" nodeType="withEffect">
+                                  <p:stCondLst>
+                                    <p:cond delay="0"/>
+                                  </p:stCondLst>
+                                  <p:childTnLst>
+                                    <p:set>
+                                      <p:cBhvr>
+                                        <p:cTn id="8" dur="1" fill="hold">
+                                          <p:stCondLst>
+                                            <p:cond delay="0"/>
+                                          </p:stCondLst>
+                                        </p:cTn>
+                                        <p:tgtEl>
+                                          <p:spTgt spid="10"/>
+                                        </p:tgtEl>
+                                        <p:attrNameLst>
+                                          <p:attrName>style.visibility</p:attrName>
+                                        </p:attrNameLst>
+                                      </p:cBhvr>
+                                      <p:to>
+                                        <p:strVal val="visible"/>
+                                      </p:to>
+                                    </p:set>
+                                  </p:childTnLst>
+                                </p:cTn>
+                              </p:par>
+                            </p:childTnLst>
+                          </p:cTn>
+                        </p:par>
+                      </p:childTnLst>
+                    </p:cTn>
+                  </p:par>
+                  <p:par>
+                    <p:cTn id="9" fill="hold">
+                      <p:stCondLst>
+                        <p:cond delay="indefinite"/>
+                      </p:stCondLst>
+                      <p:childTnLst>
+                        <p:par>
+                          <p:cTn id="10" fill="hold">
+                            <p:stCondLst>
+                              <p:cond delay="0"/>
+                            </p:stCondLst>
+                            <p:childTnLst>
+                              <p:par>
+                                <p:cTn id="11" presetID="1" presetClass="entr" presetSubtype="0" fill="hold" grpId="0" nodeType="clickEffect">
+                                  <p:stCondLst>
+                                    <p:cond delay="0"/>
+                                  </p:stCondLst>
+                                  <p:childTnLst>
+                                    <p:set>
+                                      <p:cBhvr>
+                                        <p:cTn id="12" dur="1" fill="hold">
+                                          <p:stCondLst>
+                                            <p:cond delay="0"/>
+                                          </p:stCondLst>
+                                        </p:cTn>
+                                        <p:tgtEl>
+                                          <p:spTgt spid="12"/>
+                                        </p:tgtEl>
+                                        <p:attrNameLst>
+                                          <p:attrName>style.visibility</p:attrName>
+                                        </p:attrNameLst>
+                                      </p:cBhvr>
+                                      <p:to>
+                                        <p:strVal val="visible"/>
+                                      </p:to>
+                                    </p:set>
+                                  </p:childTnLst>
+                                </p:cTn>
+                              </p:par>
+                            </p:childTnLst>
+                          </p:cTn>
+                        </p:par>
+                      </p:childTnLst>
+                    </p:cTn>
+                  </p:par>
+                </p:childTnLst>
+              </p:cTn>
+              <p:prevCondLst>
+                <p:cond evt="onPrev" delay="0">
+                  <p:tgtEl>
+                    <p:sldTgt/>
+                  </p:tgtEl>
+                </p:cond>
+              </p:prevCondLst>
+              <p:nextCondLst>
+                <p:cond evt="onNext" delay="0">
+                  <p:tgtEl>
+                    <p:sldTgt/>
+                  </p:tgtEl>
+                </p:cond>
+              </p:nextCondLst>
+            </p:seq>
+          </p:childTnLst>
+        </p:cTn>
+      </p:par>
+    </p:tnLst>
+    <p:bldLst>
+      <p:bldP spid="8" grpId="0" animBg="1"/>
+      <p:bldP spid="10" grpId="0" animBg="1"/>
+      <p:bldP spid="12" grpId="0" animBg="1"/>
+    </p:bldLst>
+  </p:timing>
+</p:sld>
+</file>
+
+<file path=ppt/slides/slide29.xml><?xml version="1.0" encoding="utf-8"?>
+<p:sld xmlns:a="http://schemas.openxmlformats.org/drawingml/2006/main" xmlns:r="http://schemas.openxmlformats.org/officeDocument/2006/relationships" xmlns:p="http://schemas.openxmlformats.org/presentationml/2006/main">
+  <p:cSld>
+    <p:spTree>
+      <p:nvGrpSpPr>
+        <p:cNvPr id="1" name=""/>
+        <p:cNvGrpSpPr/>
+        <p:nvPr/>
+      </p:nvGrpSpPr>
+      <p:grpSpPr>
+        <a:xfrm>
+          <a:off x="0" y="0"/>
+          <a:ext cx="0" cy="0"/>
+          <a:chOff x="0" y="0"/>
+          <a:chExt cx="0" cy="0"/>
+        </a:xfrm>
+      </p:grpSpPr>
+      <p:sp>
+        <p:nvSpPr>
+          <p:cNvPr id="2" name="Title 1">
+            <a:extLst>
+              <a:ext uri="{FF2B5EF4-FFF2-40B4-BE49-F238E27FC236}">
+                <a16:creationId xmlns:a16="http://schemas.microsoft.com/office/drawing/2014/main" id="{6B29CDE0-0AA7-8F7A-C753-C9AED3E6384D}"/>
+              </a:ext>
+            </a:extLst>
+          </p:cNvPr>
+          <p:cNvSpPr>
+            <a:spLocks noGrp="1"/>
+          </p:cNvSpPr>
+          <p:nvPr>
+            <p:ph type="title"/>
+          </p:nvPr>
+        </p:nvSpPr>
+        <p:spPr/>
+        <p:txBody>
+          <a:bodyPr>
+            <a:normAutofit fontScale="90000"/>
+          </a:bodyPr>
+          <a:lstStyle/>
+          <a:p>
+            <a:r>
+              <a:rPr lang="en-GB" b="1" dirty="0" err="1"/>
+              <a:t>MultiQC</a:t>
+            </a:r>
+            <a:r>
+              <a:rPr lang="en-GB" b="1" dirty="0"/>
+              <a:t> </a:t>
+            </a:r>
+          </a:p>
+        </p:txBody>
+      </p:sp>
+      <p:sp>
+        <p:nvSpPr>
+          <p:cNvPr id="4" name="Date Placeholder 3">
+            <a:extLst>
+              <a:ext uri="{FF2B5EF4-FFF2-40B4-BE49-F238E27FC236}">
+                <a16:creationId xmlns:a16="http://schemas.microsoft.com/office/drawing/2014/main" id="{83F2FCDB-F036-E220-C48B-29A86B8AC5AD}"/>
+              </a:ext>
+            </a:extLst>
+          </p:cNvPr>
+          <p:cNvSpPr>
+            <a:spLocks noGrp="1"/>
+          </p:cNvSpPr>
+          <p:nvPr>
+            <p:ph type="dt" sz="half" idx="10"/>
+          </p:nvPr>
+        </p:nvSpPr>
+        <p:spPr/>
+        <p:txBody>
+          <a:bodyPr/>
+          <a:lstStyle/>
+          <a:p>
+            <a:fld id="{761DFEEA-1162-B343-ACBF-B3E92F6AC390}" type="datetime1">
+              <a:rPr lang="it-IT" smtClean="0"/>
+              <a:t>25/09/26</a:t>
+            </a:fld>
+            <a:endParaRPr lang="en-GB"/>
+          </a:p>
+        </p:txBody>
+      </p:sp>
+      <p:sp>
+        <p:nvSpPr>
+          <p:cNvPr id="5" name="Footer Placeholder 4">
+            <a:extLst>
+              <a:ext uri="{FF2B5EF4-FFF2-40B4-BE49-F238E27FC236}">
+                <a16:creationId xmlns:a16="http://schemas.microsoft.com/office/drawing/2014/main" id="{A6E49E3D-4BC9-B305-D91F-52DF7BEBBD24}"/>
+              </a:ext>
+            </a:extLst>
+          </p:cNvPr>
+          <p:cNvSpPr>
+            <a:spLocks noGrp="1"/>
+          </p:cNvSpPr>
+          <p:nvPr>
+            <p:ph type="ftr" sz="quarter" idx="11"/>
+          </p:nvPr>
+        </p:nvSpPr>
+        <p:spPr/>
+        <p:txBody>
+          <a:bodyPr/>
+          <a:lstStyle/>
+          <a:p>
+            <a:r>
+              <a:rPr lang="en-GB"/>
+              <a:t>Day 1: Reproducible NGS Data Analysis on Personal Laptops</a:t>
+            </a:r>
+          </a:p>
+        </p:txBody>
+      </p:sp>
+      <p:sp>
+        <p:nvSpPr>
+          <p:cNvPr id="6" name="Slide Number Placeholder 5">
+            <a:extLst>
+              <a:ext uri="{FF2B5EF4-FFF2-40B4-BE49-F238E27FC236}">
+                <a16:creationId xmlns:a16="http://schemas.microsoft.com/office/drawing/2014/main" id="{C7270641-A9C3-3A3F-F91D-C2DD083E6355}"/>
+              </a:ext>
+            </a:extLst>
+          </p:cNvPr>
+          <p:cNvSpPr>
+            <a:spLocks noGrp="1"/>
+          </p:cNvSpPr>
+          <p:nvPr>
+            <p:ph type="sldNum" sz="quarter" idx="12"/>
+          </p:nvPr>
+        </p:nvSpPr>
+        <p:spPr/>
+        <p:txBody>
+          <a:bodyPr/>
+          <a:lstStyle/>
+          <a:p>
+            <a:fld id="{62E92BA6-6E87-3343-8D2C-B7A656D628E4}" type="slidenum">
+              <a:rPr lang="en-GB" smtClean="0"/>
+              <a:t>28</a:t>
+            </a:fld>
+            <a:endParaRPr lang="en-GB"/>
+          </a:p>
+        </p:txBody>
+      </p:sp>
+      <p:sp>
+        <p:nvSpPr>
+          <p:cNvPr id="7" name="TextBox 6">
+            <a:extLst>
+              <a:ext uri="{FF2B5EF4-FFF2-40B4-BE49-F238E27FC236}">
+                <a16:creationId xmlns:a16="http://schemas.microsoft.com/office/drawing/2014/main" id="{2DAD1662-BF73-49CD-F16A-393D869463C4}"/>
+              </a:ext>
+            </a:extLst>
+          </p:cNvPr>
+          <p:cNvSpPr txBox="1"/>
+          <p:nvPr/>
+        </p:nvSpPr>
+        <p:spPr>
+          <a:xfrm>
+            <a:off x="476459" y="835179"/>
+            <a:ext cx="11541369" cy="646331"/>
+          </a:xfrm>
+          <a:prstGeom prst="rect">
+            <a:avLst/>
+          </a:prstGeom>
+          <a:noFill/>
+        </p:spPr>
+        <p:txBody>
+          <a:bodyPr wrap="square">
+            <a:spAutoFit/>
+          </a:bodyPr>
+          <a:lstStyle/>
+          <a:p>
+            <a:r>
+              <a:rPr lang="en-IT" sz="1800" b="0" i="0" dirty="0">
+                <a:solidFill>
+                  <a:schemeClr val="tx1"/>
+                </a:solidFill>
+                <a:effectLst/>
+                <a:latin typeface="+mn-lt"/>
+              </a:rPr>
+              <a:t>MultiQC collects tool logs into one HTML report. This makes it easier to compare samples side by side instead of opening each Bowtie2, samtools, and featureCounts log separately. </a:t>
+            </a:r>
+            <a:r>
+              <a:rPr lang="en-IT" sz="1800" b="0" i="0" u="sng" dirty="0">
+                <a:solidFill>
+                  <a:schemeClr val="tx1"/>
+                </a:solidFill>
+                <a:effectLst/>
+                <a:latin typeface="+mn-lt"/>
+                <a:hlinkClick r:id="rId2"/>
+              </a:rPr>
+              <a:t>MultiQC</a:t>
+            </a:r>
+            <a:r>
+              <a:rPr lang="en-IT" sz="1800" b="0" i="0" dirty="0">
+                <a:solidFill>
+                  <a:schemeClr val="tx1"/>
+                </a:solidFill>
+                <a:effectLst/>
+                <a:latin typeface="+mn-lt"/>
+              </a:rPr>
+              <a:t>.</a:t>
+            </a:r>
+            <a:endParaRPr lang="en-GB" dirty="0"/>
+          </a:p>
+        </p:txBody>
+      </p:sp>
+      <p:sp>
+        <p:nvSpPr>
+          <p:cNvPr id="9" name="TextBox 8">
+            <a:extLst>
+              <a:ext uri="{FF2B5EF4-FFF2-40B4-BE49-F238E27FC236}">
+                <a16:creationId xmlns:a16="http://schemas.microsoft.com/office/drawing/2014/main" id="{5E105D52-0023-7014-C1D2-F4C117DE84B5}"/>
+              </a:ext>
+            </a:extLst>
+          </p:cNvPr>
+          <p:cNvSpPr txBox="1"/>
+          <p:nvPr/>
+        </p:nvSpPr>
+        <p:spPr>
+          <a:xfrm>
+            <a:off x="476459" y="1674780"/>
+            <a:ext cx="6541477" cy="369332"/>
+          </a:xfrm>
+          <a:prstGeom prst="rect">
+            <a:avLst/>
+          </a:prstGeom>
+          <a:noFill/>
+          <a:ln>
+            <a:solidFill>
+              <a:schemeClr val="tx1"/>
+            </a:solidFill>
+          </a:ln>
+        </p:spPr>
+        <p:txBody>
+          <a:bodyPr wrap="square">
+            <a:spAutoFit/>
+          </a:bodyPr>
+          <a:lstStyle/>
+          <a:p>
+            <a:r>
+              <a:rPr lang="en-IT" sz="1800" b="0" i="0" dirty="0">
+                <a:solidFill>
+                  <a:schemeClr val="tx1"/>
+                </a:solidFill>
+                <a:effectLst/>
+                <a:latin typeface="Courier New" panose="02070309020205020404" pitchFamily="49" charset="0"/>
+                <a:cs typeface="Courier New" panose="02070309020205020404" pitchFamily="49" charset="0"/>
+              </a:rPr>
+              <a:t>Create </a:t>
+            </a:r>
+            <a:r>
+              <a:rPr lang="en-IT" b="0" i="0" dirty="0">
+                <a:solidFill>
+                  <a:schemeClr val="tx1"/>
+                </a:solidFill>
+                <a:effectLst/>
+                <a:latin typeface="Courier New" panose="02070309020205020404" pitchFamily="49" charset="0"/>
+                <a:cs typeface="Courier New" panose="02070309020205020404" pitchFamily="49" charset="0"/>
+              </a:rPr>
+              <a:t>scripts/day2_rnaseq/06_multiqc_day2.sh</a:t>
+            </a:r>
+            <a:endParaRPr lang="en-GB" dirty="0">
+              <a:latin typeface="Courier New" panose="02070309020205020404" pitchFamily="49" charset="0"/>
+              <a:cs typeface="Courier New" panose="02070309020205020404" pitchFamily="49" charset="0"/>
+            </a:endParaRPr>
+          </a:p>
+        </p:txBody>
+      </p:sp>
+      <p:sp>
+        <p:nvSpPr>
+          <p:cNvPr id="11" name="TextBox 10">
+            <a:extLst>
+              <a:ext uri="{FF2B5EF4-FFF2-40B4-BE49-F238E27FC236}">
+                <a16:creationId xmlns:a16="http://schemas.microsoft.com/office/drawing/2014/main" id="{C1A597B5-AF38-AF60-4B50-5B46EFF5965C}"/>
+              </a:ext>
+            </a:extLst>
+          </p:cNvPr>
+          <p:cNvSpPr txBox="1"/>
+          <p:nvPr/>
+        </p:nvSpPr>
+        <p:spPr>
+          <a:xfrm>
+            <a:off x="476460" y="2215072"/>
+            <a:ext cx="6541476" cy="3970318"/>
+          </a:xfrm>
+          <a:prstGeom prst="rect">
+            <a:avLst/>
+          </a:prstGeom>
+          <a:noFill/>
+          <a:ln>
+            <a:solidFill>
+              <a:schemeClr val="tx1"/>
+            </a:solidFill>
+          </a:ln>
+        </p:spPr>
+        <p:txBody>
+          <a:bodyPr wrap="square">
+            <a:spAutoFit/>
+          </a:bodyPr>
+          <a:lstStyle/>
+          <a:p>
+            <a:r>
+              <a:rPr lang="en-GB" sz="1400" dirty="0">
+                <a:latin typeface="Courier New" panose="02070309020205020404" pitchFamily="49" charset="0"/>
+                <a:cs typeface="Courier New" panose="02070309020205020404" pitchFamily="49" charset="0"/>
+              </a:rPr>
+              <a:t>#!/</a:t>
+            </a:r>
+            <a:r>
+              <a:rPr lang="en-GB" sz="1400" dirty="0" err="1">
+                <a:latin typeface="Courier New" panose="02070309020205020404" pitchFamily="49" charset="0"/>
+                <a:cs typeface="Courier New" panose="02070309020205020404" pitchFamily="49" charset="0"/>
+              </a:rPr>
+              <a:t>usr</a:t>
+            </a:r>
+            <a:r>
+              <a:rPr lang="en-GB" sz="1400" dirty="0">
+                <a:latin typeface="Courier New" panose="02070309020205020404" pitchFamily="49" charset="0"/>
+                <a:cs typeface="Courier New" panose="02070309020205020404" pitchFamily="49" charset="0"/>
+              </a:rPr>
+              <a:t>/bin/env bash</a:t>
+            </a:r>
+          </a:p>
+          <a:p>
+            <a:r>
+              <a:rPr lang="en-GB" sz="1400" dirty="0">
+                <a:latin typeface="Courier New" panose="02070309020205020404" pitchFamily="49" charset="0"/>
+                <a:cs typeface="Courier New" panose="02070309020205020404" pitchFamily="49" charset="0"/>
+              </a:rPr>
+              <a:t>set -</a:t>
+            </a:r>
+            <a:r>
+              <a:rPr lang="en-GB" sz="1400" dirty="0" err="1">
+                <a:latin typeface="Courier New" panose="02070309020205020404" pitchFamily="49" charset="0"/>
+                <a:cs typeface="Courier New" panose="02070309020205020404" pitchFamily="49" charset="0"/>
+              </a:rPr>
+              <a:t>euo</a:t>
+            </a:r>
+            <a:r>
+              <a:rPr lang="en-GB" sz="1400" dirty="0">
+                <a:latin typeface="Courier New" panose="02070309020205020404" pitchFamily="49" charset="0"/>
+                <a:cs typeface="Courier New" panose="02070309020205020404" pitchFamily="49" charset="0"/>
+              </a:rPr>
+              <a:t> </a:t>
+            </a:r>
+            <a:r>
+              <a:rPr lang="en-GB" sz="1400" dirty="0" err="1">
+                <a:latin typeface="Courier New" panose="02070309020205020404" pitchFamily="49" charset="0"/>
+                <a:cs typeface="Courier New" panose="02070309020205020404" pitchFamily="49" charset="0"/>
+              </a:rPr>
+              <a:t>pipefail</a:t>
+            </a:r>
+            <a:endParaRPr lang="en-GB" sz="1400" dirty="0">
+              <a:latin typeface="Courier New" panose="02070309020205020404" pitchFamily="49" charset="0"/>
+              <a:cs typeface="Courier New" panose="02070309020205020404" pitchFamily="49" charset="0"/>
+            </a:endParaRPr>
+          </a:p>
+          <a:p>
+            <a:endParaRPr lang="en-GB" sz="1400" dirty="0">
+              <a:latin typeface="Courier New" panose="02070309020205020404" pitchFamily="49" charset="0"/>
+              <a:cs typeface="Courier New" panose="02070309020205020404" pitchFamily="49" charset="0"/>
+            </a:endParaRPr>
+          </a:p>
+          <a:p>
+            <a:r>
+              <a:rPr lang="en-GB" sz="1400" dirty="0">
+                <a:latin typeface="Courier New" panose="02070309020205020404" pitchFamily="49" charset="0"/>
+                <a:cs typeface="Courier New" panose="02070309020205020404" pitchFamily="49" charset="0"/>
+              </a:rPr>
+              <a:t>day1_fastp_dir="results/logs/day1/</a:t>
+            </a:r>
+            <a:r>
+              <a:rPr lang="en-GB" sz="1400" dirty="0" err="1">
+                <a:latin typeface="Courier New" panose="02070309020205020404" pitchFamily="49" charset="0"/>
+                <a:cs typeface="Courier New" panose="02070309020205020404" pitchFamily="49" charset="0"/>
+              </a:rPr>
+              <a:t>fastp</a:t>
+            </a:r>
+            <a:r>
+              <a:rPr lang="en-GB" sz="1400" dirty="0">
+                <a:latin typeface="Courier New" panose="02070309020205020404" pitchFamily="49" charset="0"/>
+                <a:cs typeface="Courier New" panose="02070309020205020404" pitchFamily="49" charset="0"/>
+              </a:rPr>
+              <a:t>"</a:t>
+            </a:r>
+          </a:p>
+          <a:p>
+            <a:r>
+              <a:rPr lang="en-GB" sz="1400" dirty="0">
+                <a:latin typeface="Courier New" panose="02070309020205020404" pitchFamily="49" charset="0"/>
+                <a:cs typeface="Courier New" panose="02070309020205020404" pitchFamily="49" charset="0"/>
+              </a:rPr>
+              <a:t>day2_log_dir="results/logs/day2"</a:t>
+            </a:r>
+          </a:p>
+          <a:p>
+            <a:r>
+              <a:rPr lang="en-GB" sz="1400" dirty="0" err="1">
+                <a:latin typeface="Courier New" panose="02070309020205020404" pitchFamily="49" charset="0"/>
+                <a:cs typeface="Courier New" panose="02070309020205020404" pitchFamily="49" charset="0"/>
+              </a:rPr>
+              <a:t>counts_dir</a:t>
+            </a:r>
+            <a:r>
+              <a:rPr lang="en-GB" sz="1400" dirty="0">
+                <a:latin typeface="Courier New" panose="02070309020205020404" pitchFamily="49" charset="0"/>
+                <a:cs typeface="Courier New" panose="02070309020205020404" pitchFamily="49" charset="0"/>
+              </a:rPr>
+              <a:t>="results/day2_rnaseq/counts"</a:t>
+            </a:r>
+          </a:p>
+          <a:p>
+            <a:r>
+              <a:rPr lang="en-GB" sz="1400" dirty="0" err="1">
+                <a:latin typeface="Courier New" panose="02070309020205020404" pitchFamily="49" charset="0"/>
+                <a:cs typeface="Courier New" panose="02070309020205020404" pitchFamily="49" charset="0"/>
+              </a:rPr>
+              <a:t>qc_dir</a:t>
+            </a:r>
+            <a:r>
+              <a:rPr lang="en-GB" sz="1400" dirty="0">
+                <a:latin typeface="Courier New" panose="02070309020205020404" pitchFamily="49" charset="0"/>
+                <a:cs typeface="Courier New" panose="02070309020205020404" pitchFamily="49" charset="0"/>
+              </a:rPr>
+              <a:t>="results/day2_rnaseq/qc"</a:t>
+            </a:r>
+          </a:p>
+          <a:p>
+            <a:endParaRPr lang="en-GB" sz="1400" dirty="0">
+              <a:latin typeface="Courier New" panose="02070309020205020404" pitchFamily="49" charset="0"/>
+              <a:cs typeface="Courier New" panose="02070309020205020404" pitchFamily="49" charset="0"/>
+            </a:endParaRPr>
+          </a:p>
+          <a:p>
+            <a:r>
+              <a:rPr lang="en-GB" sz="1400" dirty="0" err="1">
+                <a:latin typeface="Courier New" panose="02070309020205020404" pitchFamily="49" charset="0"/>
+                <a:cs typeface="Courier New" panose="02070309020205020404" pitchFamily="49" charset="0"/>
+              </a:rPr>
+              <a:t>mkdir</a:t>
+            </a:r>
+            <a:r>
+              <a:rPr lang="en-GB" sz="1400" dirty="0">
+                <a:latin typeface="Courier New" panose="02070309020205020404" pitchFamily="49" charset="0"/>
+                <a:cs typeface="Courier New" panose="02070309020205020404" pitchFamily="49" charset="0"/>
+              </a:rPr>
+              <a:t> -p "${</a:t>
+            </a:r>
+            <a:r>
+              <a:rPr lang="en-GB" sz="1400" dirty="0" err="1">
+                <a:latin typeface="Courier New" panose="02070309020205020404" pitchFamily="49" charset="0"/>
+                <a:cs typeface="Courier New" panose="02070309020205020404" pitchFamily="49" charset="0"/>
+              </a:rPr>
+              <a:t>qc_dir</a:t>
+            </a:r>
+            <a:r>
+              <a:rPr lang="en-GB" sz="1400" dirty="0">
+                <a:latin typeface="Courier New" panose="02070309020205020404" pitchFamily="49" charset="0"/>
+                <a:cs typeface="Courier New" panose="02070309020205020404" pitchFamily="49" charset="0"/>
+              </a:rPr>
+              <a:t>}"</a:t>
+            </a:r>
+          </a:p>
+          <a:p>
+            <a:endParaRPr lang="en-GB" sz="1400" dirty="0">
+              <a:latin typeface="Courier New" panose="02070309020205020404" pitchFamily="49" charset="0"/>
+              <a:cs typeface="Courier New" panose="02070309020205020404" pitchFamily="49" charset="0"/>
+            </a:endParaRPr>
+          </a:p>
+          <a:p>
+            <a:r>
+              <a:rPr lang="en-GB" sz="1400" dirty="0" err="1">
+                <a:latin typeface="Courier New" panose="02070309020205020404" pitchFamily="49" charset="0"/>
+                <a:cs typeface="Courier New" panose="02070309020205020404" pitchFamily="49" charset="0"/>
+              </a:rPr>
+              <a:t>multiqc</a:t>
+            </a:r>
+            <a:r>
+              <a:rPr lang="en-GB" sz="1400" dirty="0">
+                <a:latin typeface="Courier New" panose="02070309020205020404" pitchFamily="49" charset="0"/>
+                <a:cs typeface="Courier New" panose="02070309020205020404" pitchFamily="49" charset="0"/>
+              </a:rPr>
+              <a:t> \</a:t>
+            </a:r>
+          </a:p>
+          <a:p>
+            <a:r>
+              <a:rPr lang="en-GB" sz="1400" dirty="0">
+                <a:latin typeface="Courier New" panose="02070309020205020404" pitchFamily="49" charset="0"/>
+                <a:cs typeface="Courier New" panose="02070309020205020404" pitchFamily="49" charset="0"/>
+              </a:rPr>
+              <a:t>  "${day1_fastp_dir}" \</a:t>
+            </a:r>
+          </a:p>
+          <a:p>
+            <a:r>
+              <a:rPr lang="en-GB" sz="1400" dirty="0">
+                <a:latin typeface="Courier New" panose="02070309020205020404" pitchFamily="49" charset="0"/>
+                <a:cs typeface="Courier New" panose="02070309020205020404" pitchFamily="49" charset="0"/>
+              </a:rPr>
+              <a:t>  "${day2_log_dir}" \</a:t>
+            </a:r>
+          </a:p>
+          <a:p>
+            <a:r>
+              <a:rPr lang="en-GB" sz="1400" dirty="0">
+                <a:latin typeface="Courier New" panose="02070309020205020404" pitchFamily="49" charset="0"/>
+                <a:cs typeface="Courier New" panose="02070309020205020404" pitchFamily="49" charset="0"/>
+              </a:rPr>
+              <a:t>  "${</a:t>
+            </a:r>
+            <a:r>
+              <a:rPr lang="en-GB" sz="1400" dirty="0" err="1">
+                <a:latin typeface="Courier New" panose="02070309020205020404" pitchFamily="49" charset="0"/>
+                <a:cs typeface="Courier New" panose="02070309020205020404" pitchFamily="49" charset="0"/>
+              </a:rPr>
+              <a:t>counts_dir</a:t>
+            </a:r>
+            <a:r>
+              <a:rPr lang="en-GB" sz="1400" dirty="0">
+                <a:latin typeface="Courier New" panose="02070309020205020404" pitchFamily="49" charset="0"/>
+                <a:cs typeface="Courier New" panose="02070309020205020404" pitchFamily="49" charset="0"/>
+              </a:rPr>
+              <a:t>}" \</a:t>
+            </a:r>
+          </a:p>
+          <a:p>
+            <a:r>
+              <a:rPr lang="en-GB" sz="1400" dirty="0">
+                <a:latin typeface="Courier New" panose="02070309020205020404" pitchFamily="49" charset="0"/>
+                <a:cs typeface="Courier New" panose="02070309020205020404" pitchFamily="49" charset="0"/>
+              </a:rPr>
+              <a:t>  --</a:t>
+            </a:r>
+            <a:r>
+              <a:rPr lang="en-GB" sz="1400" dirty="0" err="1">
+                <a:latin typeface="Courier New" panose="02070309020205020404" pitchFamily="49" charset="0"/>
+                <a:cs typeface="Courier New" panose="02070309020205020404" pitchFamily="49" charset="0"/>
+              </a:rPr>
+              <a:t>outdir</a:t>
+            </a:r>
+            <a:r>
+              <a:rPr lang="en-GB" sz="1400" dirty="0">
+                <a:latin typeface="Courier New" panose="02070309020205020404" pitchFamily="49" charset="0"/>
+                <a:cs typeface="Courier New" panose="02070309020205020404" pitchFamily="49" charset="0"/>
+              </a:rPr>
+              <a:t> "${</a:t>
+            </a:r>
+            <a:r>
+              <a:rPr lang="en-GB" sz="1400" dirty="0" err="1">
+                <a:latin typeface="Courier New" panose="02070309020205020404" pitchFamily="49" charset="0"/>
+                <a:cs typeface="Courier New" panose="02070309020205020404" pitchFamily="49" charset="0"/>
+              </a:rPr>
+              <a:t>qc_dir</a:t>
+            </a:r>
+            <a:r>
+              <a:rPr lang="en-GB" sz="1400" dirty="0">
+                <a:latin typeface="Courier New" panose="02070309020205020404" pitchFamily="49" charset="0"/>
+                <a:cs typeface="Courier New" panose="02070309020205020404" pitchFamily="49" charset="0"/>
+              </a:rPr>
+              <a:t>}" \</a:t>
+            </a:r>
+          </a:p>
+          <a:p>
+            <a:r>
+              <a:rPr lang="en-GB" sz="1400" dirty="0">
+                <a:latin typeface="Courier New" panose="02070309020205020404" pitchFamily="49" charset="0"/>
+                <a:cs typeface="Courier New" panose="02070309020205020404" pitchFamily="49" charset="0"/>
+              </a:rPr>
+              <a:t>  --filename </a:t>
+            </a:r>
+            <a:r>
+              <a:rPr lang="en-GB" sz="1400" dirty="0" err="1">
+                <a:latin typeface="Courier New" panose="02070309020205020404" pitchFamily="49" charset="0"/>
+                <a:cs typeface="Courier New" panose="02070309020205020404" pitchFamily="49" charset="0"/>
+              </a:rPr>
+              <a:t>multiqc_report.html</a:t>
+            </a:r>
+            <a:r>
+              <a:rPr lang="en-GB" sz="1400" dirty="0">
+                <a:latin typeface="Courier New" panose="02070309020205020404" pitchFamily="49" charset="0"/>
+                <a:cs typeface="Courier New" panose="02070309020205020404" pitchFamily="49" charset="0"/>
+              </a:rPr>
+              <a:t> \</a:t>
+            </a:r>
+          </a:p>
+          <a:p>
+            <a:r>
+              <a:rPr lang="en-GB" sz="1400" dirty="0">
+                <a:latin typeface="Courier New" panose="02070309020205020404" pitchFamily="49" charset="0"/>
+                <a:cs typeface="Courier New" panose="02070309020205020404" pitchFamily="49" charset="0"/>
+              </a:rPr>
+              <a:t>  --title "Workshop RNA-</a:t>
+            </a:r>
+            <a:r>
+              <a:rPr lang="en-GB" sz="1400" dirty="0" err="1">
+                <a:latin typeface="Courier New" panose="02070309020205020404" pitchFamily="49" charset="0"/>
+                <a:cs typeface="Courier New" panose="02070309020205020404" pitchFamily="49" charset="0"/>
+              </a:rPr>
+              <a:t>seq</a:t>
+            </a:r>
+            <a:r>
+              <a:rPr lang="en-GB" sz="1400" dirty="0">
+                <a:latin typeface="Courier New" panose="02070309020205020404" pitchFamily="49" charset="0"/>
+                <a:cs typeface="Courier New" panose="02070309020205020404" pitchFamily="49" charset="0"/>
+              </a:rPr>
+              <a:t> QC: Day 1 + Day 2" \</a:t>
+            </a:r>
+          </a:p>
+          <a:p>
+            <a:r>
+              <a:rPr lang="en-GB" sz="1400" dirty="0">
+                <a:latin typeface="Courier New" panose="02070309020205020404" pitchFamily="49" charset="0"/>
+                <a:cs typeface="Courier New" panose="02070309020205020404" pitchFamily="49" charset="0"/>
+              </a:rPr>
+              <a:t>  --force</a:t>
+            </a:r>
+          </a:p>
+        </p:txBody>
+      </p:sp>
+      <p:sp>
+        <p:nvSpPr>
+          <p:cNvPr id="13" name="TextBox 12">
+            <a:extLst>
+              <a:ext uri="{FF2B5EF4-FFF2-40B4-BE49-F238E27FC236}">
+                <a16:creationId xmlns:a16="http://schemas.microsoft.com/office/drawing/2014/main" id="{091BAC0A-78FE-4679-F7DD-1878C2FA1472}"/>
+              </a:ext>
+            </a:extLst>
+          </p:cNvPr>
+          <p:cNvSpPr txBox="1"/>
+          <p:nvPr/>
+        </p:nvSpPr>
+        <p:spPr>
+          <a:xfrm>
+            <a:off x="5505660" y="3323068"/>
+            <a:ext cx="6209880" cy="1569660"/>
+          </a:xfrm>
+          <a:prstGeom prst="rect">
+            <a:avLst/>
+          </a:prstGeom>
+          <a:solidFill>
+            <a:schemeClr val="bg1"/>
+          </a:solidFill>
+          <a:ln>
+            <a:solidFill>
+              <a:schemeClr val="tx1"/>
+            </a:solidFill>
+          </a:ln>
+        </p:spPr>
+        <p:txBody>
+          <a:bodyPr wrap="square">
+            <a:spAutoFit/>
+          </a:bodyPr>
+          <a:lstStyle/>
+          <a:p>
+            <a:r>
+              <a:rPr lang="en-GB" sz="1600" dirty="0">
+                <a:latin typeface="Courier New" panose="02070309020205020404" pitchFamily="49" charset="0"/>
+                <a:cs typeface="Courier New" panose="02070309020205020404" pitchFamily="49" charset="0"/>
+              </a:rPr>
+              <a:t>docker run --rm \</a:t>
+            </a:r>
+          </a:p>
+          <a:p>
+            <a:r>
+              <a:rPr lang="en-GB" sz="1600" dirty="0">
+                <a:latin typeface="Courier New" panose="02070309020205020404" pitchFamily="49" charset="0"/>
+                <a:cs typeface="Courier New" panose="02070309020205020404" pitchFamily="49" charset="0"/>
+              </a:rPr>
+              <a:t>  --user "$(id -u):$(id -g)" \</a:t>
+            </a:r>
+          </a:p>
+          <a:p>
+            <a:r>
+              <a:rPr lang="en-GB" sz="1600" dirty="0">
+                <a:latin typeface="Courier New" panose="02070309020205020404" pitchFamily="49" charset="0"/>
+                <a:cs typeface="Courier New" panose="02070309020205020404" pitchFamily="49" charset="0"/>
+              </a:rPr>
+              <a:t>  -v "$PWD:/work" \</a:t>
+            </a:r>
+          </a:p>
+          <a:p>
+            <a:r>
+              <a:rPr lang="en-GB" sz="1600" dirty="0">
+                <a:latin typeface="Courier New" panose="02070309020205020404" pitchFamily="49" charset="0"/>
+                <a:cs typeface="Courier New" panose="02070309020205020404" pitchFamily="49" charset="0"/>
+              </a:rPr>
+              <a:t>  -w /work \</a:t>
+            </a:r>
+          </a:p>
+          <a:p>
+            <a:r>
+              <a:rPr lang="en-GB" sz="1600" dirty="0">
+                <a:latin typeface="Courier New" panose="02070309020205020404" pitchFamily="49" charset="0"/>
+                <a:cs typeface="Courier New" panose="02070309020205020404" pitchFamily="49" charset="0"/>
+              </a:rPr>
+              <a:t>  </a:t>
+            </a:r>
+            <a:r>
+              <a:rPr lang="en-GB" sz="1600" dirty="0" err="1">
+                <a:latin typeface="Courier New" panose="02070309020205020404" pitchFamily="49" charset="0"/>
+                <a:cs typeface="Courier New" panose="02070309020205020404" pitchFamily="49" charset="0"/>
+              </a:rPr>
+              <a:t>docker.io</a:t>
+            </a:r>
+            <a:r>
+              <a:rPr lang="en-GB" sz="1600" dirty="0">
+                <a:latin typeface="Courier New" panose="02070309020205020404" pitchFamily="49" charset="0"/>
+                <a:cs typeface="Courier New" panose="02070309020205020404" pitchFamily="49" charset="0"/>
+              </a:rPr>
+              <a:t>/</a:t>
+            </a:r>
+            <a:r>
+              <a:rPr lang="en-GB" sz="1600" dirty="0" err="1">
+                <a:latin typeface="Courier New" panose="02070309020205020404" pitchFamily="49" charset="0"/>
+                <a:cs typeface="Courier New" panose="02070309020205020404" pitchFamily="49" charset="0"/>
+              </a:rPr>
+              <a:t>multiqc</a:t>
+            </a:r>
+            <a:r>
+              <a:rPr lang="en-GB" sz="1600" dirty="0">
+                <a:latin typeface="Courier New" panose="02070309020205020404" pitchFamily="49" charset="0"/>
+                <a:cs typeface="Courier New" panose="02070309020205020404" pitchFamily="49" charset="0"/>
+              </a:rPr>
+              <a:t>/</a:t>
+            </a:r>
+            <a:r>
+              <a:rPr lang="en-GB" sz="1600" dirty="0" err="1">
+                <a:latin typeface="Courier New" panose="02070309020205020404" pitchFamily="49" charset="0"/>
+                <a:cs typeface="Courier New" panose="02070309020205020404" pitchFamily="49" charset="0"/>
+              </a:rPr>
+              <a:t>multiqc</a:t>
+            </a:r>
+            <a:r>
+              <a:rPr lang="en-GB" sz="1600" dirty="0">
+                <a:latin typeface="Courier New" panose="02070309020205020404" pitchFamily="49" charset="0"/>
+                <a:cs typeface="Courier New" panose="02070309020205020404" pitchFamily="49" charset="0"/>
+              </a:rPr>
+              <a:t> \</a:t>
+            </a:r>
+          </a:p>
+          <a:p>
+            <a:r>
+              <a:rPr lang="en-GB" sz="1600" dirty="0">
+                <a:latin typeface="Courier New" panose="02070309020205020404" pitchFamily="49" charset="0"/>
+                <a:cs typeface="Courier New" panose="02070309020205020404" pitchFamily="49" charset="0"/>
+              </a:rPr>
+              <a:t>  bash scripts/day2_rnaseq/06_multiqc_day2.sh</a:t>
+            </a:r>
+          </a:p>
+        </p:txBody>
+      </p:sp>
+    </p:spTree>
+    <p:extLst>
+      <p:ext uri="{BB962C8B-B14F-4D97-AF65-F5344CB8AC3E}">
+        <p14:creationId xmlns:p14="http://schemas.microsoft.com/office/powerpoint/2010/main" val="4282221230"/>
       </p:ext>
     </p:extLst>
   </p:cSld>
@@ -12725,7 +17437,7 @@
           <a:p>
             <a:fld id="{761DFEEA-1162-B343-ACBF-B3E92F6AC390}" type="datetime1">
               <a:rPr lang="it-IT" smtClean="0"/>
-              <a:t>23/09/26</a:t>
+              <a:t>25/09/26</a:t>
             </a:fld>
             <a:endParaRPr lang="en-GB"/>
           </a:p>
@@ -13436,6 +18148,255 @@
 </p:sld>
 </file>
 
+<file path=ppt/slides/slide30.xml><?xml version="1.0" encoding="utf-8"?>
+<p:sld xmlns:a="http://schemas.openxmlformats.org/drawingml/2006/main" xmlns:r="http://schemas.openxmlformats.org/officeDocument/2006/relationships" xmlns:p="http://schemas.openxmlformats.org/presentationml/2006/main">
+  <p:cSld>
+    <p:spTree>
+      <p:nvGrpSpPr>
+        <p:cNvPr id="1" name=""/>
+        <p:cNvGrpSpPr/>
+        <p:nvPr/>
+      </p:nvGrpSpPr>
+      <p:grpSpPr>
+        <a:xfrm>
+          <a:off x="0" y="0"/>
+          <a:ext cx="0" cy="0"/>
+          <a:chOff x="0" y="0"/>
+          <a:chExt cx="0" cy="0"/>
+        </a:xfrm>
+      </p:grpSpPr>
+      <p:sp>
+        <p:nvSpPr>
+          <p:cNvPr id="2" name="Title 1">
+            <a:extLst>
+              <a:ext uri="{FF2B5EF4-FFF2-40B4-BE49-F238E27FC236}">
+                <a16:creationId xmlns:a16="http://schemas.microsoft.com/office/drawing/2014/main" id="{97D9C1FB-AD63-1310-86A5-9DBDFECACFFA}"/>
+              </a:ext>
+            </a:extLst>
+          </p:cNvPr>
+          <p:cNvSpPr>
+            <a:spLocks noGrp="1"/>
+          </p:cNvSpPr>
+          <p:nvPr>
+            <p:ph type="title"/>
+          </p:nvPr>
+        </p:nvSpPr>
+        <p:spPr/>
+        <p:txBody>
+          <a:bodyPr>
+            <a:normAutofit fontScale="90000"/>
+          </a:bodyPr>
+          <a:lstStyle/>
+          <a:p>
+            <a:r>
+              <a:rPr lang="en-GB" b="1" dirty="0"/>
+              <a:t>Final Commit</a:t>
+            </a:r>
+          </a:p>
+        </p:txBody>
+      </p:sp>
+      <p:sp>
+        <p:nvSpPr>
+          <p:cNvPr id="4" name="Date Placeholder 3">
+            <a:extLst>
+              <a:ext uri="{FF2B5EF4-FFF2-40B4-BE49-F238E27FC236}">
+                <a16:creationId xmlns:a16="http://schemas.microsoft.com/office/drawing/2014/main" id="{E00A7EDD-9584-766D-69B2-FF369882EC22}"/>
+              </a:ext>
+            </a:extLst>
+          </p:cNvPr>
+          <p:cNvSpPr>
+            <a:spLocks noGrp="1"/>
+          </p:cNvSpPr>
+          <p:nvPr>
+            <p:ph type="dt" sz="half" idx="10"/>
+          </p:nvPr>
+        </p:nvSpPr>
+        <p:spPr/>
+        <p:txBody>
+          <a:bodyPr/>
+          <a:lstStyle/>
+          <a:p>
+            <a:fld id="{761DFEEA-1162-B343-ACBF-B3E92F6AC390}" type="datetime1">
+              <a:rPr lang="it-IT" smtClean="0"/>
+              <a:t>25/09/26</a:t>
+            </a:fld>
+            <a:endParaRPr lang="en-GB"/>
+          </a:p>
+        </p:txBody>
+      </p:sp>
+      <p:sp>
+        <p:nvSpPr>
+          <p:cNvPr id="5" name="Footer Placeholder 4">
+            <a:extLst>
+              <a:ext uri="{FF2B5EF4-FFF2-40B4-BE49-F238E27FC236}">
+                <a16:creationId xmlns:a16="http://schemas.microsoft.com/office/drawing/2014/main" id="{D7B32757-303B-FBB3-3321-D8845A0134BD}"/>
+              </a:ext>
+            </a:extLst>
+          </p:cNvPr>
+          <p:cNvSpPr>
+            <a:spLocks noGrp="1"/>
+          </p:cNvSpPr>
+          <p:nvPr>
+            <p:ph type="ftr" sz="quarter" idx="11"/>
+          </p:nvPr>
+        </p:nvSpPr>
+        <p:spPr/>
+        <p:txBody>
+          <a:bodyPr/>
+          <a:lstStyle/>
+          <a:p>
+            <a:r>
+              <a:rPr lang="en-GB"/>
+              <a:t>Day 1: Reproducible NGS Data Analysis on Personal Laptops</a:t>
+            </a:r>
+          </a:p>
+        </p:txBody>
+      </p:sp>
+      <p:sp>
+        <p:nvSpPr>
+          <p:cNvPr id="6" name="Slide Number Placeholder 5">
+            <a:extLst>
+              <a:ext uri="{FF2B5EF4-FFF2-40B4-BE49-F238E27FC236}">
+                <a16:creationId xmlns:a16="http://schemas.microsoft.com/office/drawing/2014/main" id="{8FED38FA-F72E-EBFD-B1CB-D796DCCFAA9D}"/>
+              </a:ext>
+            </a:extLst>
+          </p:cNvPr>
+          <p:cNvSpPr>
+            <a:spLocks noGrp="1"/>
+          </p:cNvSpPr>
+          <p:nvPr>
+            <p:ph type="sldNum" sz="quarter" idx="12"/>
+          </p:nvPr>
+        </p:nvSpPr>
+        <p:spPr/>
+        <p:txBody>
+          <a:bodyPr/>
+          <a:lstStyle/>
+          <a:p>
+            <a:fld id="{62E92BA6-6E87-3343-8D2C-B7A656D628E4}" type="slidenum">
+              <a:rPr lang="en-GB" smtClean="0"/>
+              <a:t>29</a:t>
+            </a:fld>
+            <a:endParaRPr lang="en-GB"/>
+          </a:p>
+        </p:txBody>
+      </p:sp>
+      <p:sp>
+        <p:nvSpPr>
+          <p:cNvPr id="3" name="TextBox 2">
+            <a:extLst>
+              <a:ext uri="{FF2B5EF4-FFF2-40B4-BE49-F238E27FC236}">
+                <a16:creationId xmlns:a16="http://schemas.microsoft.com/office/drawing/2014/main" id="{04B20829-77D8-621E-4BDC-C3A13B114100}"/>
+              </a:ext>
+            </a:extLst>
+          </p:cNvPr>
+          <p:cNvSpPr txBox="1"/>
+          <p:nvPr/>
+        </p:nvSpPr>
+        <p:spPr>
+          <a:xfrm>
+            <a:off x="2984360" y="1597688"/>
+            <a:ext cx="4871847" cy="923330"/>
+          </a:xfrm>
+          <a:prstGeom prst="rect">
+            <a:avLst/>
+          </a:prstGeom>
+          <a:noFill/>
+          <a:ln>
+            <a:solidFill>
+              <a:schemeClr val="tx1"/>
+            </a:solidFill>
+          </a:ln>
+        </p:spPr>
+        <p:txBody>
+          <a:bodyPr wrap="none" rtlCol="0">
+            <a:spAutoFit/>
+          </a:bodyPr>
+          <a:lstStyle/>
+          <a:p>
+            <a:r>
+              <a:rPr lang="en-GB" dirty="0">
+                <a:latin typeface="Courier New" panose="02070309020205020404" pitchFamily="49" charset="0"/>
+                <a:cs typeface="Courier New" panose="02070309020205020404" pitchFamily="49" charset="0"/>
+              </a:rPr>
+              <a:t>git add .</a:t>
+            </a:r>
+          </a:p>
+          <a:p>
+            <a:r>
+              <a:rPr lang="en-GB" dirty="0">
+                <a:latin typeface="Courier New" panose="02070309020205020404" pitchFamily="49" charset="0"/>
+                <a:cs typeface="Courier New" panose="02070309020205020404" pitchFamily="49" charset="0"/>
+              </a:rPr>
+              <a:t>git commit –m “day2 …</a:t>
+            </a:r>
+            <a:r>
+              <a:rPr lang="en-GB" dirty="0" err="1">
+                <a:latin typeface="Courier New" panose="02070309020205020404" pitchFamily="49" charset="0"/>
+                <a:cs typeface="Courier New" panose="02070309020205020404" pitchFamily="49" charset="0"/>
+              </a:rPr>
+              <a:t>bla</a:t>
+            </a:r>
+            <a:r>
+              <a:rPr lang="en-GB" dirty="0">
+                <a:latin typeface="Courier New" panose="02070309020205020404" pitchFamily="49" charset="0"/>
+                <a:cs typeface="Courier New" panose="02070309020205020404" pitchFamily="49" charset="0"/>
+              </a:rPr>
+              <a:t> </a:t>
+            </a:r>
+            <a:r>
+              <a:rPr lang="en-GB" dirty="0" err="1">
+                <a:latin typeface="Courier New" panose="02070309020205020404" pitchFamily="49" charset="0"/>
+                <a:cs typeface="Courier New" panose="02070309020205020404" pitchFamily="49" charset="0"/>
+              </a:rPr>
+              <a:t>bla</a:t>
+            </a:r>
+            <a:r>
+              <a:rPr lang="en-GB" dirty="0">
+                <a:latin typeface="Courier New" panose="02070309020205020404" pitchFamily="49" charset="0"/>
+                <a:cs typeface="Courier New" panose="02070309020205020404" pitchFamily="49" charset="0"/>
+              </a:rPr>
+              <a:t> </a:t>
+            </a:r>
+            <a:r>
+              <a:rPr lang="en-GB" dirty="0" err="1">
+                <a:latin typeface="Courier New" panose="02070309020205020404" pitchFamily="49" charset="0"/>
+                <a:cs typeface="Courier New" panose="02070309020205020404" pitchFamily="49" charset="0"/>
+              </a:rPr>
+              <a:t>bla</a:t>
+            </a:r>
+            <a:r>
+              <a:rPr lang="en-GB" dirty="0">
+                <a:latin typeface="Courier New" panose="02070309020205020404" pitchFamily="49" charset="0"/>
+                <a:cs typeface="Courier New" panose="02070309020205020404" pitchFamily="49" charset="0"/>
+              </a:rPr>
+              <a:t>…”</a:t>
+            </a:r>
+          </a:p>
+          <a:p>
+            <a:r>
+              <a:rPr lang="en-GB" dirty="0">
+                <a:latin typeface="Courier New" panose="02070309020205020404" pitchFamily="49" charset="0"/>
+                <a:cs typeface="Courier New" panose="02070309020205020404" pitchFamily="49" charset="0"/>
+              </a:rPr>
+              <a:t>git push</a:t>
+            </a:r>
+          </a:p>
+        </p:txBody>
+      </p:sp>
+    </p:spTree>
+    <p:extLst>
+      <p:ext uri="{BB962C8B-B14F-4D97-AF65-F5344CB8AC3E}">
+        <p14:creationId xmlns:p14="http://schemas.microsoft.com/office/powerpoint/2010/main" val="4200866922"/>
+      </p:ext>
+    </p:extLst>
+  </p:cSld>
+  <p:clrMapOvr>
+    <a:masterClrMapping/>
+  </p:clrMapOvr>
+</p:sld>
+</file>
+
 <file path=ppt/slides/slide4.xml><?xml version="1.0" encoding="utf-8"?>
 <p:sld xmlns:a="http://schemas.openxmlformats.org/drawingml/2006/main" xmlns:r="http://schemas.openxmlformats.org/officeDocument/2006/relationships" xmlns:p="http://schemas.openxmlformats.org/presentationml/2006/main">
   <p:cSld>
@@ -13507,7 +18468,7 @@
           <a:p>
             <a:fld id="{761DFEEA-1162-B343-ACBF-B3E92F6AC390}" type="datetime1">
               <a:rPr lang="it-IT" smtClean="0"/>
-              <a:t>23/09/26</a:t>
+              <a:t>25/09/26</a:t>
             </a:fld>
             <a:endParaRPr lang="en-GB"/>
           </a:p>
@@ -13869,8 +18830,8 @@
         </p:nvSpPr>
         <p:spPr>
           <a:xfrm>
-            <a:off x="134470" y="4235629"/>
-            <a:ext cx="6205728" cy="2062103"/>
+            <a:off x="134469" y="4235629"/>
+            <a:ext cx="8923469" cy="1569660"/>
           </a:xfrm>
           <a:prstGeom prst="rect">
             <a:avLst/>
@@ -14455,7 +19416,7 @@
           <a:p>
             <a:fld id="{761DFEEA-1162-B343-ACBF-B3E92F6AC390}" type="datetime1">
               <a:rPr lang="it-IT" smtClean="0"/>
-              <a:t>23/09/26</a:t>
+              <a:t>25/09/26</a:t>
             </a:fld>
             <a:endParaRPr lang="en-GB"/>
           </a:p>
@@ -14647,7 +19608,7 @@
           <a:p>
             <a:fld id="{761DFEEA-1162-B343-ACBF-B3E92F6AC390}" type="datetime1">
               <a:rPr lang="it-IT" smtClean="0"/>
-              <a:t>23/09/26</a:t>
+              <a:t>25/09/26</a:t>
             </a:fld>
             <a:endParaRPr lang="en-GB"/>
           </a:p>
@@ -14807,8 +19768,8 @@
         </p:nvSpPr>
         <p:spPr>
           <a:xfrm>
-            <a:off x="6179123" y="2506660"/>
-            <a:ext cx="5400679" cy="1200329"/>
+            <a:off x="6179123" y="2646270"/>
+            <a:ext cx="5400679" cy="923330"/>
           </a:xfrm>
           <a:prstGeom prst="rect">
             <a:avLst/>
@@ -14826,9 +19787,10 @@
           </a:bodyPr>
           <a:lstStyle/>
           <a:p>
+            <a:pPr algn="ctr"/>
             <a:r>
               <a:rPr lang="en-IT" i="1" dirty="0"/>
-              <a:t>must search for possible locations for millions of reads. Searching the FASTA sequence from beginning to end for every read would be inefficient, so indexes are compact files that allows aligner to search positions efficiently.</a:t>
+              <a:t>Searching the FASTA sequence from beginning to end for every read would be inefficient, so indexes are compact files that allows aligner to search positions efficiently.</a:t>
             </a:r>
             <a:endParaRPr lang="en-GB" i="1" dirty="0"/>
           </a:p>
@@ -14893,6 +19855,176 @@
   <p:clrMapOvr>
     <a:masterClrMapping/>
   </p:clrMapOvr>
+  <p:timing>
+    <p:tnLst>
+      <p:par>
+        <p:cTn id="1" dur="indefinite" restart="never" nodeType="tmRoot">
+          <p:childTnLst>
+            <p:seq concurrent="1" nextAc="seek">
+              <p:cTn id="2" dur="indefinite" nodeType="mainSeq">
+                <p:childTnLst>
+                  <p:par>
+                    <p:cTn id="3" fill="hold">
+                      <p:stCondLst>
+                        <p:cond delay="indefinite"/>
+                      </p:stCondLst>
+                      <p:childTnLst>
+                        <p:par>
+                          <p:cTn id="4" fill="hold">
+                            <p:stCondLst>
+                              <p:cond delay="0"/>
+                            </p:stCondLst>
+                            <p:childTnLst>
+                              <p:par>
+                                <p:cTn id="5" presetID="1" presetClass="entr" presetSubtype="0" fill="hold" grpId="0" nodeType="clickEffect">
+                                  <p:stCondLst>
+                                    <p:cond delay="0"/>
+                                  </p:stCondLst>
+                                  <p:childTnLst>
+                                    <p:set>
+                                      <p:cBhvr>
+                                        <p:cTn id="6" dur="1" fill="hold">
+                                          <p:stCondLst>
+                                            <p:cond delay="0"/>
+                                          </p:stCondLst>
+                                        </p:cTn>
+                                        <p:tgtEl>
+                                          <p:spTgt spid="7"/>
+                                        </p:tgtEl>
+                                        <p:attrNameLst>
+                                          <p:attrName>style.visibility</p:attrName>
+                                        </p:attrNameLst>
+                                      </p:cBhvr>
+                                      <p:to>
+                                        <p:strVal val="visible"/>
+                                      </p:to>
+                                    </p:set>
+                                  </p:childTnLst>
+                                </p:cTn>
+                              </p:par>
+                            </p:childTnLst>
+                          </p:cTn>
+                        </p:par>
+                      </p:childTnLst>
+                    </p:cTn>
+                  </p:par>
+                  <p:par>
+                    <p:cTn id="7" fill="hold">
+                      <p:stCondLst>
+                        <p:cond delay="indefinite"/>
+                      </p:stCondLst>
+                      <p:childTnLst>
+                        <p:par>
+                          <p:cTn id="8" fill="hold">
+                            <p:stCondLst>
+                              <p:cond delay="0"/>
+                            </p:stCondLst>
+                            <p:childTnLst>
+                              <p:par>
+                                <p:cTn id="9" presetID="1" presetClass="entr" presetSubtype="0" fill="hold" grpId="0" nodeType="clickEffect">
+                                  <p:stCondLst>
+                                    <p:cond delay="0"/>
+                                  </p:stCondLst>
+                                  <p:childTnLst>
+                                    <p:set>
+                                      <p:cBhvr>
+                                        <p:cTn id="10" dur="1" fill="hold">
+                                          <p:stCondLst>
+                                            <p:cond delay="0"/>
+                                          </p:stCondLst>
+                                        </p:cTn>
+                                        <p:tgtEl>
+                                          <p:spTgt spid="8"/>
+                                        </p:tgtEl>
+                                        <p:attrNameLst>
+                                          <p:attrName>style.visibility</p:attrName>
+                                        </p:attrNameLst>
+                                      </p:cBhvr>
+                                      <p:to>
+                                        <p:strVal val="visible"/>
+                                      </p:to>
+                                    </p:set>
+                                  </p:childTnLst>
+                                </p:cTn>
+                              </p:par>
+                            </p:childTnLst>
+                          </p:cTn>
+                        </p:par>
+                      </p:childTnLst>
+                    </p:cTn>
+                  </p:par>
+                  <p:par>
+                    <p:cTn id="11" fill="hold">
+                      <p:stCondLst>
+                        <p:cond delay="indefinite"/>
+                      </p:stCondLst>
+                      <p:childTnLst>
+                        <p:par>
+                          <p:cTn id="12" fill="hold">
+                            <p:stCondLst>
+                              <p:cond delay="0"/>
+                            </p:stCondLst>
+                            <p:childTnLst>
+                              <p:par>
+                                <p:cTn id="13" presetID="1" presetClass="entr" presetSubtype="0" fill="hold" grpId="0" nodeType="clickEffect">
+                                  <p:stCondLst>
+                                    <p:cond delay="0"/>
+                                  </p:stCondLst>
+                                  <p:childTnLst>
+                                    <p:set>
+                                      <p:cBhvr>
+                                        <p:cTn id="14" dur="1" fill="hold">
+                                          <p:stCondLst>
+                                            <p:cond delay="0"/>
+                                          </p:stCondLst>
+                                        </p:cTn>
+                                        <p:tgtEl>
+                                          <p:spTgt spid="12"/>
+                                        </p:tgtEl>
+                                        <p:attrNameLst>
+                                          <p:attrName>style.visibility</p:attrName>
+                                        </p:attrNameLst>
+                                      </p:cBhvr>
+                                      <p:to>
+                                        <p:strVal val="visible"/>
+                                      </p:to>
+                                    </p:set>
+                                  </p:childTnLst>
+                                </p:cTn>
+                              </p:par>
+                            </p:childTnLst>
+                          </p:cTn>
+                        </p:par>
+                      </p:childTnLst>
+                    </p:cTn>
+                  </p:par>
+                </p:childTnLst>
+              </p:cTn>
+              <p:prevCondLst>
+                <p:cond evt="onPrev" delay="0">
+                  <p:tgtEl>
+                    <p:sldTgt/>
+                  </p:tgtEl>
+                </p:cond>
+              </p:prevCondLst>
+              <p:nextCondLst>
+                <p:cond evt="onNext" delay="0">
+                  <p:tgtEl>
+                    <p:sldTgt/>
+                  </p:tgtEl>
+                </p:cond>
+              </p:nextCondLst>
+            </p:seq>
+          </p:childTnLst>
+        </p:cTn>
+      </p:par>
+    </p:tnLst>
+    <p:bldLst>
+      <p:bldP spid="7" grpId="0"/>
+      <p:bldP spid="8" grpId="0" animBg="1"/>
+      <p:bldP spid="12" grpId="0"/>
+    </p:bldLst>
+  </p:timing>
 </p:sld>
 </file>
 
@@ -15003,7 +20135,7 @@
           <a:p>
             <a:fld id="{761DFEEA-1162-B343-ACBF-B3E92F6AC390}" type="datetime1">
               <a:rPr lang="it-IT" smtClean="0"/>
-              <a:t>23/09/26</a:t>
+              <a:t>25/09/26</a:t>
             </a:fld>
             <a:endParaRPr lang="en-GB"/>
           </a:p>
@@ -15800,7 +20932,7 @@
           <a:p>
             <a:fld id="{761DFEEA-1162-B343-ACBF-B3E92F6AC390}" type="datetime1">
               <a:rPr lang="it-IT" smtClean="0"/>
-              <a:t>23/09/26</a:t>
+              <a:t>25/09/26</a:t>
             </a:fld>
             <a:endParaRPr lang="en-GB"/>
           </a:p>
@@ -16371,7 +21503,7 @@
           <a:p>
             <a:fld id="{761DFEEA-1162-B343-ACBF-B3E92F6AC390}" type="datetime1">
               <a:rPr lang="it-IT" smtClean="0"/>
-              <a:t>23/09/26</a:t>
+              <a:t>25/09/26</a:t>
             </a:fld>
             <a:endParaRPr lang="en-GB"/>
           </a:p>
